--- a/_Slides/REACT ESSENTIALS - HandsOn Presentation.pptx
+++ b/_Slides/REACT ESSENTIALS - HandsOn Presentation.pptx
@@ -4,15 +4,20 @@
   <p:sldMasterIdLst>
     <p:sldMasterId id="2147483648" r:id="rId1"/>
   </p:sldMasterIdLst>
+  <p:notesMasterIdLst>
+    <p:notesMasterId r:id="rId12"/>
+  </p:notesMasterIdLst>
   <p:sldIdLst>
     <p:sldId id="256" r:id="rId2"/>
     <p:sldId id="257" r:id="rId3"/>
-    <p:sldId id="265" r:id="rId4"/>
-    <p:sldId id="264" r:id="rId5"/>
-    <p:sldId id="266" r:id="rId6"/>
-    <p:sldId id="269" r:id="rId7"/>
-    <p:sldId id="260" r:id="rId8"/>
-    <p:sldId id="270" r:id="rId9"/>
+    <p:sldId id="271" r:id="rId4"/>
+    <p:sldId id="272" r:id="rId5"/>
+    <p:sldId id="265" r:id="rId6"/>
+    <p:sldId id="264" r:id="rId7"/>
+    <p:sldId id="266" r:id="rId8"/>
+    <p:sldId id="269" r:id="rId9"/>
+    <p:sldId id="260" r:id="rId10"/>
+    <p:sldId id="270" r:id="rId11"/>
   </p:sldIdLst>
   <p:sldSz cx="12192000" cy="6858000"/>
   <p:notesSz cx="6858000" cy="9144000"/>
@@ -119,6 +124,356 @@
 </p:presentation>
 </file>
 
+<file path=ppt/notesMasters/notesMaster1.xml><?xml version="1.0" encoding="utf-8"?>
+<p:notesMaster xmlns:a="http://schemas.openxmlformats.org/drawingml/2006/main" xmlns:r="http://schemas.openxmlformats.org/officeDocument/2006/relationships" xmlns:p="http://schemas.openxmlformats.org/presentationml/2006/main">
+  <p:cSld>
+    <p:bg>
+      <p:bgRef idx="1001">
+        <a:schemeClr val="bg1"/>
+      </p:bgRef>
+    </p:bg>
+    <p:spTree>
+      <p:nvGrpSpPr>
+        <p:cNvPr id="1" name=""/>
+        <p:cNvGrpSpPr/>
+        <p:nvPr/>
+      </p:nvGrpSpPr>
+      <p:grpSpPr>
+        <a:xfrm>
+          <a:off x="0" y="0"/>
+          <a:ext cx="0" cy="0"/>
+          <a:chOff x="0" y="0"/>
+          <a:chExt cx="0" cy="0"/>
+        </a:xfrm>
+      </p:grpSpPr>
+      <p:sp>
+        <p:nvSpPr>
+          <p:cNvPr id="2" name="Header Placeholder 1"/>
+          <p:cNvSpPr>
+            <a:spLocks noGrp="1"/>
+          </p:cNvSpPr>
+          <p:nvPr>
+            <p:ph type="hdr" sz="quarter"/>
+          </p:nvPr>
+        </p:nvSpPr>
+        <p:spPr>
+          <a:xfrm>
+            <a:off x="0" y="0"/>
+            <a:ext cx="2971800" cy="458788"/>
+          </a:xfrm>
+          <a:prstGeom prst="rect">
+            <a:avLst/>
+          </a:prstGeom>
+        </p:spPr>
+        <p:txBody>
+          <a:bodyPr vert="horz" lIns="91440" tIns="45720" rIns="91440" bIns="45720" rtlCol="0"/>
+          <a:lstStyle>
+            <a:lvl1pPr algn="l">
+              <a:defRPr sz="1200"/>
+            </a:lvl1pPr>
+          </a:lstStyle>
+          <a:p>
+            <a:endParaRPr lang="en-PH"/>
+          </a:p>
+        </p:txBody>
+      </p:sp>
+      <p:sp>
+        <p:nvSpPr>
+          <p:cNvPr id="3" name="Date Placeholder 2"/>
+          <p:cNvSpPr>
+            <a:spLocks noGrp="1"/>
+          </p:cNvSpPr>
+          <p:nvPr>
+            <p:ph type="dt" idx="1"/>
+          </p:nvPr>
+        </p:nvSpPr>
+        <p:spPr>
+          <a:xfrm>
+            <a:off x="3884613" y="0"/>
+            <a:ext cx="2971800" cy="458788"/>
+          </a:xfrm>
+          <a:prstGeom prst="rect">
+            <a:avLst/>
+          </a:prstGeom>
+        </p:spPr>
+        <p:txBody>
+          <a:bodyPr vert="horz" lIns="91440" tIns="45720" rIns="91440" bIns="45720" rtlCol="0"/>
+          <a:lstStyle>
+            <a:lvl1pPr algn="r">
+              <a:defRPr sz="1200"/>
+            </a:lvl1pPr>
+          </a:lstStyle>
+          <a:p>
+            <a:fld id="{98817549-4A25-4258-8A7B-A1B52B94CDB3}" type="datetimeFigureOut">
+              <a:rPr lang="en-PH" smtClean="0"/>
+              <a:t>3/9/2026</a:t>
+            </a:fld>
+            <a:endParaRPr lang="en-PH"/>
+          </a:p>
+        </p:txBody>
+      </p:sp>
+      <p:sp>
+        <p:nvSpPr>
+          <p:cNvPr id="4" name="Slide Image Placeholder 3"/>
+          <p:cNvSpPr>
+            <a:spLocks noGrp="1" noRot="1" noChangeAspect="1"/>
+          </p:cNvSpPr>
+          <p:nvPr>
+            <p:ph type="sldImg" idx="2"/>
+          </p:nvPr>
+        </p:nvSpPr>
+        <p:spPr>
+          <a:xfrm>
+            <a:off x="685800" y="1143000"/>
+            <a:ext cx="5486400" cy="3086100"/>
+          </a:xfrm>
+          <a:prstGeom prst="rect">
+            <a:avLst/>
+          </a:prstGeom>
+          <a:noFill/>
+          <a:ln w="12700">
+            <a:solidFill>
+              <a:prstClr val="black"/>
+            </a:solidFill>
+          </a:ln>
+        </p:spPr>
+        <p:txBody>
+          <a:bodyPr vert="horz" lIns="91440" tIns="45720" rIns="91440" bIns="45720" rtlCol="0" anchor="ctr"/>
+          <a:lstStyle/>
+          <a:p>
+            <a:endParaRPr lang="en-PH"/>
+          </a:p>
+        </p:txBody>
+      </p:sp>
+      <p:sp>
+        <p:nvSpPr>
+          <p:cNvPr id="5" name="Notes Placeholder 4"/>
+          <p:cNvSpPr>
+            <a:spLocks noGrp="1"/>
+          </p:cNvSpPr>
+          <p:nvPr>
+            <p:ph type="body" sz="quarter" idx="3"/>
+          </p:nvPr>
+        </p:nvSpPr>
+        <p:spPr>
+          <a:xfrm>
+            <a:off x="685800" y="4400550"/>
+            <a:ext cx="5486400" cy="3600450"/>
+          </a:xfrm>
+          <a:prstGeom prst="rect">
+            <a:avLst/>
+          </a:prstGeom>
+        </p:spPr>
+        <p:txBody>
+          <a:bodyPr vert="horz" lIns="91440" tIns="45720" rIns="91440" bIns="45720" rtlCol="0"/>
+          <a:lstStyle/>
+          <a:p>
+            <a:pPr lvl="0"/>
+            <a:r>
+              <a:rPr lang="en-US"/>
+              <a:t>Click to edit Master text styles</a:t>
+            </a:r>
+          </a:p>
+          <a:p>
+            <a:pPr lvl="1"/>
+            <a:r>
+              <a:rPr lang="en-US"/>
+              <a:t>Second level</a:t>
+            </a:r>
+          </a:p>
+          <a:p>
+            <a:pPr lvl="2"/>
+            <a:r>
+              <a:rPr lang="en-US"/>
+              <a:t>Third level</a:t>
+            </a:r>
+          </a:p>
+          <a:p>
+            <a:pPr lvl="3"/>
+            <a:r>
+              <a:rPr lang="en-US"/>
+              <a:t>Fourth level</a:t>
+            </a:r>
+          </a:p>
+          <a:p>
+            <a:pPr lvl="4"/>
+            <a:r>
+              <a:rPr lang="en-US"/>
+              <a:t>Fifth level</a:t>
+            </a:r>
+            <a:endParaRPr lang="en-PH"/>
+          </a:p>
+        </p:txBody>
+      </p:sp>
+      <p:sp>
+        <p:nvSpPr>
+          <p:cNvPr id="6" name="Footer Placeholder 5"/>
+          <p:cNvSpPr>
+            <a:spLocks noGrp="1"/>
+          </p:cNvSpPr>
+          <p:nvPr>
+            <p:ph type="ftr" sz="quarter" idx="4"/>
+          </p:nvPr>
+        </p:nvSpPr>
+        <p:spPr>
+          <a:xfrm>
+            <a:off x="0" y="8685213"/>
+            <a:ext cx="2971800" cy="458787"/>
+          </a:xfrm>
+          <a:prstGeom prst="rect">
+            <a:avLst/>
+          </a:prstGeom>
+        </p:spPr>
+        <p:txBody>
+          <a:bodyPr vert="horz" lIns="91440" tIns="45720" rIns="91440" bIns="45720" rtlCol="0" anchor="b"/>
+          <a:lstStyle>
+            <a:lvl1pPr algn="l">
+              <a:defRPr sz="1200"/>
+            </a:lvl1pPr>
+          </a:lstStyle>
+          <a:p>
+            <a:endParaRPr lang="en-PH"/>
+          </a:p>
+        </p:txBody>
+      </p:sp>
+      <p:sp>
+        <p:nvSpPr>
+          <p:cNvPr id="7" name="Slide Number Placeholder 6"/>
+          <p:cNvSpPr>
+            <a:spLocks noGrp="1"/>
+          </p:cNvSpPr>
+          <p:nvPr>
+            <p:ph type="sldNum" sz="quarter" idx="5"/>
+          </p:nvPr>
+        </p:nvSpPr>
+        <p:spPr>
+          <a:xfrm>
+            <a:off x="3884613" y="8685213"/>
+            <a:ext cx="2971800" cy="458787"/>
+          </a:xfrm>
+          <a:prstGeom prst="rect">
+            <a:avLst/>
+          </a:prstGeom>
+        </p:spPr>
+        <p:txBody>
+          <a:bodyPr vert="horz" lIns="91440" tIns="45720" rIns="91440" bIns="45720" rtlCol="0" anchor="b"/>
+          <a:lstStyle>
+            <a:lvl1pPr algn="r">
+              <a:defRPr sz="1200"/>
+            </a:lvl1pPr>
+          </a:lstStyle>
+          <a:p>
+            <a:fld id="{A48E66CE-74E5-4F20-A23C-D380BD4C0726}" type="slidenum">
+              <a:rPr lang="en-PH" smtClean="0"/>
+              <a:t>‹#›</a:t>
+            </a:fld>
+            <a:endParaRPr lang="en-PH"/>
+          </a:p>
+        </p:txBody>
+      </p:sp>
+    </p:spTree>
+    <p:extLst>
+      <p:ext uri="{BB962C8B-B14F-4D97-AF65-F5344CB8AC3E}">
+        <p14:creationId xmlns:p14="http://schemas.microsoft.com/office/powerpoint/2010/main" val="2581373141"/>
+      </p:ext>
+    </p:extLst>
+  </p:cSld>
+  <p:clrMap bg1="lt1" tx1="dk1" bg2="lt2" tx2="dk2" accent1="accent1" accent2="accent2" accent3="accent3" accent4="accent4" accent5="accent5" accent6="accent6" hlink="hlink" folHlink="folHlink"/>
+  <p:notesStyle>
+    <a:lvl1pPr marL="0" algn="l" defTabSz="914400" rtl="0" eaLnBrk="1" latinLnBrk="0" hangingPunct="1">
+      <a:defRPr sz="1200" kern="1200">
+        <a:solidFill>
+          <a:schemeClr val="tx1"/>
+        </a:solidFill>
+        <a:latin typeface="+mn-lt"/>
+        <a:ea typeface="+mn-ea"/>
+        <a:cs typeface="+mn-cs"/>
+      </a:defRPr>
+    </a:lvl1pPr>
+    <a:lvl2pPr marL="457200" algn="l" defTabSz="914400" rtl="0" eaLnBrk="1" latinLnBrk="0" hangingPunct="1">
+      <a:defRPr sz="1200" kern="1200">
+        <a:solidFill>
+          <a:schemeClr val="tx1"/>
+        </a:solidFill>
+        <a:latin typeface="+mn-lt"/>
+        <a:ea typeface="+mn-ea"/>
+        <a:cs typeface="+mn-cs"/>
+      </a:defRPr>
+    </a:lvl2pPr>
+    <a:lvl3pPr marL="914400" algn="l" defTabSz="914400" rtl="0" eaLnBrk="1" latinLnBrk="0" hangingPunct="1">
+      <a:defRPr sz="1200" kern="1200">
+        <a:solidFill>
+          <a:schemeClr val="tx1"/>
+        </a:solidFill>
+        <a:latin typeface="+mn-lt"/>
+        <a:ea typeface="+mn-ea"/>
+        <a:cs typeface="+mn-cs"/>
+      </a:defRPr>
+    </a:lvl3pPr>
+    <a:lvl4pPr marL="1371600" algn="l" defTabSz="914400" rtl="0" eaLnBrk="1" latinLnBrk="0" hangingPunct="1">
+      <a:defRPr sz="1200" kern="1200">
+        <a:solidFill>
+          <a:schemeClr val="tx1"/>
+        </a:solidFill>
+        <a:latin typeface="+mn-lt"/>
+        <a:ea typeface="+mn-ea"/>
+        <a:cs typeface="+mn-cs"/>
+      </a:defRPr>
+    </a:lvl4pPr>
+    <a:lvl5pPr marL="1828800" algn="l" defTabSz="914400" rtl="0" eaLnBrk="1" latinLnBrk="0" hangingPunct="1">
+      <a:defRPr sz="1200" kern="1200">
+        <a:solidFill>
+          <a:schemeClr val="tx1"/>
+        </a:solidFill>
+        <a:latin typeface="+mn-lt"/>
+        <a:ea typeface="+mn-ea"/>
+        <a:cs typeface="+mn-cs"/>
+      </a:defRPr>
+    </a:lvl5pPr>
+    <a:lvl6pPr marL="2286000" algn="l" defTabSz="914400" rtl="0" eaLnBrk="1" latinLnBrk="0" hangingPunct="1">
+      <a:defRPr sz="1200" kern="1200">
+        <a:solidFill>
+          <a:schemeClr val="tx1"/>
+        </a:solidFill>
+        <a:latin typeface="+mn-lt"/>
+        <a:ea typeface="+mn-ea"/>
+        <a:cs typeface="+mn-cs"/>
+      </a:defRPr>
+    </a:lvl6pPr>
+    <a:lvl7pPr marL="2743200" algn="l" defTabSz="914400" rtl="0" eaLnBrk="1" latinLnBrk="0" hangingPunct="1">
+      <a:defRPr sz="1200" kern="1200">
+        <a:solidFill>
+          <a:schemeClr val="tx1"/>
+        </a:solidFill>
+        <a:latin typeface="+mn-lt"/>
+        <a:ea typeface="+mn-ea"/>
+        <a:cs typeface="+mn-cs"/>
+      </a:defRPr>
+    </a:lvl7pPr>
+    <a:lvl8pPr marL="3200400" algn="l" defTabSz="914400" rtl="0" eaLnBrk="1" latinLnBrk="0" hangingPunct="1">
+      <a:defRPr sz="1200" kern="1200">
+        <a:solidFill>
+          <a:schemeClr val="tx1"/>
+        </a:solidFill>
+        <a:latin typeface="+mn-lt"/>
+        <a:ea typeface="+mn-ea"/>
+        <a:cs typeface="+mn-cs"/>
+      </a:defRPr>
+    </a:lvl8pPr>
+    <a:lvl9pPr marL="3657600" algn="l" defTabSz="914400" rtl="0" eaLnBrk="1" latinLnBrk="0" hangingPunct="1">
+      <a:defRPr sz="1200" kern="1200">
+        <a:solidFill>
+          <a:schemeClr val="tx1"/>
+        </a:solidFill>
+        <a:latin typeface="+mn-lt"/>
+        <a:ea typeface="+mn-ea"/>
+        <a:cs typeface="+mn-cs"/>
+      </a:defRPr>
+    </a:lvl9pPr>
+  </p:notesStyle>
+</p:notesMaster>
+</file>
+
 <file path=ppt/slideLayouts/slideLayout1.xml><?xml version="1.0" encoding="utf-8"?>
 <p:sldLayout xmlns:a="http://schemas.openxmlformats.org/drawingml/2006/main" xmlns:r="http://schemas.openxmlformats.org/officeDocument/2006/relationships" xmlns:p="http://schemas.openxmlformats.org/presentationml/2006/main" type="title" preserve="1">
   <p:cSld name="Title Slide">
@@ -268,7 +623,7 @@
           <a:p>
             <a:fld id="{B004625C-03B8-46B3-ABE1-25C5A90DD2C7}" type="datetimeFigureOut">
               <a:rPr lang="en-PH" smtClean="0"/>
-              <a:t>3/5/2026</a:t>
+              <a:t>3/9/2026</a:t>
             </a:fld>
             <a:endParaRPr lang="en-PH"/>
           </a:p>
@@ -468,7 +823,7 @@
           <a:p>
             <a:fld id="{B004625C-03B8-46B3-ABE1-25C5A90DD2C7}" type="datetimeFigureOut">
               <a:rPr lang="en-PH" smtClean="0"/>
-              <a:t>3/5/2026</a:t>
+              <a:t>3/9/2026</a:t>
             </a:fld>
             <a:endParaRPr lang="en-PH"/>
           </a:p>
@@ -678,7 +1033,7 @@
           <a:p>
             <a:fld id="{B004625C-03B8-46B3-ABE1-25C5A90DD2C7}" type="datetimeFigureOut">
               <a:rPr lang="en-PH" smtClean="0"/>
-              <a:t>3/5/2026</a:t>
+              <a:t>3/9/2026</a:t>
             </a:fld>
             <a:endParaRPr lang="en-PH"/>
           </a:p>
@@ -878,7 +1233,7 @@
           <a:p>
             <a:fld id="{B004625C-03B8-46B3-ABE1-25C5A90DD2C7}" type="datetimeFigureOut">
               <a:rPr lang="en-PH" smtClean="0"/>
-              <a:t>3/5/2026</a:t>
+              <a:t>3/9/2026</a:t>
             </a:fld>
             <a:endParaRPr lang="en-PH"/>
           </a:p>
@@ -1154,7 +1509,7 @@
           <a:p>
             <a:fld id="{B004625C-03B8-46B3-ABE1-25C5A90DD2C7}" type="datetimeFigureOut">
               <a:rPr lang="en-PH" smtClean="0"/>
-              <a:t>3/5/2026</a:t>
+              <a:t>3/9/2026</a:t>
             </a:fld>
             <a:endParaRPr lang="en-PH"/>
           </a:p>
@@ -1422,7 +1777,7 @@
           <a:p>
             <a:fld id="{B004625C-03B8-46B3-ABE1-25C5A90DD2C7}" type="datetimeFigureOut">
               <a:rPr lang="en-PH" smtClean="0"/>
-              <a:t>3/5/2026</a:t>
+              <a:t>3/9/2026</a:t>
             </a:fld>
             <a:endParaRPr lang="en-PH"/>
           </a:p>
@@ -1837,7 +2192,7 @@
           <a:p>
             <a:fld id="{B004625C-03B8-46B3-ABE1-25C5A90DD2C7}" type="datetimeFigureOut">
               <a:rPr lang="en-PH" smtClean="0"/>
-              <a:t>3/5/2026</a:t>
+              <a:t>3/9/2026</a:t>
             </a:fld>
             <a:endParaRPr lang="en-PH"/>
           </a:p>
@@ -1979,7 +2334,7 @@
           <a:p>
             <a:fld id="{B004625C-03B8-46B3-ABE1-25C5A90DD2C7}" type="datetimeFigureOut">
               <a:rPr lang="en-PH" smtClean="0"/>
-              <a:t>3/5/2026</a:t>
+              <a:t>3/9/2026</a:t>
             </a:fld>
             <a:endParaRPr lang="en-PH"/>
           </a:p>
@@ -2092,7 +2447,7 @@
           <a:p>
             <a:fld id="{B004625C-03B8-46B3-ABE1-25C5A90DD2C7}" type="datetimeFigureOut">
               <a:rPr lang="en-PH" smtClean="0"/>
-              <a:t>3/5/2026</a:t>
+              <a:t>3/9/2026</a:t>
             </a:fld>
             <a:endParaRPr lang="en-PH"/>
           </a:p>
@@ -2405,7 +2760,7 @@
           <a:p>
             <a:fld id="{B004625C-03B8-46B3-ABE1-25C5A90DD2C7}" type="datetimeFigureOut">
               <a:rPr lang="en-PH" smtClean="0"/>
-              <a:t>3/5/2026</a:t>
+              <a:t>3/9/2026</a:t>
             </a:fld>
             <a:endParaRPr lang="en-PH"/>
           </a:p>
@@ -2694,7 +3049,7 @@
           <a:p>
             <a:fld id="{B004625C-03B8-46B3-ABE1-25C5A90DD2C7}" type="datetimeFigureOut">
               <a:rPr lang="en-PH" smtClean="0"/>
-              <a:t>3/5/2026</a:t>
+              <a:t>3/9/2026</a:t>
             </a:fld>
             <a:endParaRPr lang="en-PH"/>
           </a:p>
@@ -2937,7 +3292,7 @@
           <a:p>
             <a:fld id="{B004625C-03B8-46B3-ABE1-25C5A90DD2C7}" type="datetimeFigureOut">
               <a:rPr lang="en-PH" smtClean="0"/>
-              <a:t>3/5/2026</a:t>
+              <a:t>3/9/2026</a:t>
             </a:fld>
             <a:endParaRPr lang="en-PH"/>
           </a:p>
@@ -3640,6 +3995,639 @@
 </p:sld>
 </file>
 
+<file path=ppt/slides/slide10.xml><?xml version="1.0" encoding="utf-8"?>
+<p:sld xmlns:a="http://schemas.openxmlformats.org/drawingml/2006/main" xmlns:r="http://schemas.openxmlformats.org/officeDocument/2006/relationships" xmlns:p="http://schemas.openxmlformats.org/presentationml/2006/main">
+  <p:cSld>
+    <p:spTree>
+      <p:nvGrpSpPr>
+        <p:cNvPr id="1" name="">
+          <a:extLst>
+            <a:ext uri="{FF2B5EF4-FFF2-40B4-BE49-F238E27FC236}">
+              <a16:creationId xmlns:a16="http://schemas.microsoft.com/office/drawing/2014/main" id="{EB926461-778A-D3E5-4C48-F2168536D9C6}"/>
+            </a:ext>
+          </a:extLst>
+        </p:cNvPr>
+        <p:cNvGrpSpPr/>
+        <p:nvPr/>
+      </p:nvGrpSpPr>
+      <p:grpSpPr>
+        <a:xfrm>
+          <a:off x="0" y="0"/>
+          <a:ext cx="0" cy="0"/>
+          <a:chOff x="0" y="0"/>
+          <a:chExt cx="0" cy="0"/>
+        </a:xfrm>
+      </p:grpSpPr>
+      <p:sp>
+        <p:nvSpPr>
+          <p:cNvPr id="2" name="TextBox 1">
+            <a:extLst>
+              <a:ext uri="{FF2B5EF4-FFF2-40B4-BE49-F238E27FC236}">
+                <a16:creationId xmlns:a16="http://schemas.microsoft.com/office/drawing/2014/main" id="{8A97854A-CE4E-6AF6-115B-F2D2A7520779}"/>
+              </a:ext>
+            </a:extLst>
+          </p:cNvPr>
+          <p:cNvSpPr txBox="1"/>
+          <p:nvPr/>
+        </p:nvSpPr>
+        <p:spPr>
+          <a:xfrm>
+            <a:off x="106490" y="126682"/>
+            <a:ext cx="1444370" cy="276999"/>
+          </a:xfrm>
+          <a:prstGeom prst="rect">
+            <a:avLst/>
+          </a:prstGeom>
+          <a:noFill/>
+        </p:spPr>
+        <p:txBody>
+          <a:bodyPr wrap="none" rtlCol="0">
+            <a:spAutoFit/>
+          </a:bodyPr>
+          <a:lstStyle/>
+          <a:p>
+            <a:r>
+              <a:rPr lang="en-US" sz="1200" dirty="0">
+                <a:latin typeface="+mj-lt"/>
+              </a:rPr>
+              <a:t>REACT WORKSHOP</a:t>
+            </a:r>
+            <a:endParaRPr lang="en-PH" sz="1200" dirty="0">
+              <a:latin typeface="+mj-lt"/>
+            </a:endParaRPr>
+          </a:p>
+        </p:txBody>
+      </p:sp>
+      <p:pic>
+        <p:nvPicPr>
+          <p:cNvPr id="4" name="Picture 3">
+            <a:extLst>
+              <a:ext uri="{FF2B5EF4-FFF2-40B4-BE49-F238E27FC236}">
+                <a16:creationId xmlns:a16="http://schemas.microsoft.com/office/drawing/2014/main" id="{3DAFE6DE-0FFF-C26C-5D15-0A04DB0D079D}"/>
+              </a:ext>
+            </a:extLst>
+          </p:cNvPr>
+          <p:cNvPicPr>
+            <a:picLocks noChangeAspect="1"/>
+          </p:cNvPicPr>
+          <p:nvPr/>
+        </p:nvPicPr>
+        <p:blipFill>
+          <a:blip r:embed="rId2">
+            <a:extLst>
+              <a:ext uri="{28A0092B-C50C-407E-A947-70E740481C1C}">
+                <a14:useLocalDpi xmlns:a14="http://schemas.microsoft.com/office/drawing/2010/main" val="0"/>
+              </a:ext>
+            </a:extLst>
+          </a:blip>
+          <a:stretch>
+            <a:fillRect/>
+          </a:stretch>
+        </p:blipFill>
+        <p:spPr>
+          <a:xfrm>
+            <a:off x="11305222" y="130398"/>
+            <a:ext cx="780288" cy="723333"/>
+          </a:xfrm>
+          <a:prstGeom prst="rect">
+            <a:avLst/>
+          </a:prstGeom>
+        </p:spPr>
+      </p:pic>
+      <p:sp>
+        <p:nvSpPr>
+          <p:cNvPr id="5" name="TextBox 4">
+            <a:extLst>
+              <a:ext uri="{FF2B5EF4-FFF2-40B4-BE49-F238E27FC236}">
+                <a16:creationId xmlns:a16="http://schemas.microsoft.com/office/drawing/2014/main" id="{65BA651D-65F0-920F-F16A-DB173828EF1C}"/>
+              </a:ext>
+            </a:extLst>
+          </p:cNvPr>
+          <p:cNvSpPr txBox="1"/>
+          <p:nvPr/>
+        </p:nvSpPr>
+        <p:spPr>
+          <a:xfrm>
+            <a:off x="4079358" y="126682"/>
+            <a:ext cx="4033284" cy="461665"/>
+          </a:xfrm>
+          <a:prstGeom prst="rect">
+            <a:avLst/>
+          </a:prstGeom>
+          <a:noFill/>
+        </p:spPr>
+        <p:txBody>
+          <a:bodyPr wrap="none" rtlCol="0">
+            <a:spAutoFit/>
+          </a:bodyPr>
+          <a:lstStyle/>
+          <a:p>
+            <a:pPr algn="ctr"/>
+            <a:r>
+              <a:rPr lang="en-US" sz="1200" b="1" dirty="0">
+                <a:latin typeface="+mj-lt"/>
+              </a:rPr>
+              <a:t>REACT ESSENTIALS:</a:t>
+            </a:r>
+          </a:p>
+          <a:p>
+            <a:pPr algn="ctr"/>
+            <a:r>
+              <a:rPr lang="en-US" sz="1200" b="1" dirty="0">
+                <a:latin typeface="+mj-lt"/>
+              </a:rPr>
+              <a:t>BUILDING INTERACTIVE WEB APPLICATIONS WITH APIs</a:t>
+            </a:r>
+            <a:endParaRPr lang="en-PH" sz="1200" b="1" dirty="0">
+              <a:latin typeface="+mj-lt"/>
+            </a:endParaRPr>
+          </a:p>
+        </p:txBody>
+      </p:sp>
+      <p:cxnSp>
+        <p:nvCxnSpPr>
+          <p:cNvPr id="10" name="Straight Connector 9">
+            <a:extLst>
+              <a:ext uri="{FF2B5EF4-FFF2-40B4-BE49-F238E27FC236}">
+                <a16:creationId xmlns:a16="http://schemas.microsoft.com/office/drawing/2014/main" id="{B0850B5F-43D9-274F-3461-4D4431D3FF5D}"/>
+              </a:ext>
+            </a:extLst>
+          </p:cNvPr>
+          <p:cNvCxnSpPr>
+            <a:cxnSpLocks/>
+          </p:cNvCxnSpPr>
+          <p:nvPr/>
+        </p:nvCxnSpPr>
+        <p:spPr>
+          <a:xfrm>
+            <a:off x="246888" y="615779"/>
+            <a:ext cx="10991088" cy="0"/>
+          </a:xfrm>
+          <a:prstGeom prst="line">
+            <a:avLst/>
+          </a:prstGeom>
+        </p:spPr>
+        <p:style>
+          <a:lnRef idx="2">
+            <a:schemeClr val="accent1"/>
+          </a:lnRef>
+          <a:fillRef idx="0">
+            <a:schemeClr val="accent1"/>
+          </a:fillRef>
+          <a:effectRef idx="1">
+            <a:schemeClr val="accent1"/>
+          </a:effectRef>
+          <a:fontRef idx="minor">
+            <a:schemeClr val="tx1"/>
+          </a:fontRef>
+        </p:style>
+      </p:cxnSp>
+      <p:sp>
+        <p:nvSpPr>
+          <p:cNvPr id="20" name="TextBox 19">
+            <a:extLst>
+              <a:ext uri="{FF2B5EF4-FFF2-40B4-BE49-F238E27FC236}">
+                <a16:creationId xmlns:a16="http://schemas.microsoft.com/office/drawing/2014/main" id="{E674A659-C195-214E-9BBF-2DAFCC8F51BE}"/>
+              </a:ext>
+            </a:extLst>
+          </p:cNvPr>
+          <p:cNvSpPr txBox="1"/>
+          <p:nvPr/>
+        </p:nvSpPr>
+        <p:spPr>
+          <a:xfrm>
+            <a:off x="9328872" y="129474"/>
+            <a:ext cx="2025426" cy="276999"/>
+          </a:xfrm>
+          <a:prstGeom prst="rect">
+            <a:avLst/>
+          </a:prstGeom>
+          <a:noFill/>
+        </p:spPr>
+        <p:txBody>
+          <a:bodyPr wrap="none" rtlCol="0">
+            <a:spAutoFit/>
+          </a:bodyPr>
+          <a:lstStyle/>
+          <a:p>
+            <a:r>
+              <a:rPr lang="en-US" sz="1200" dirty="0">
+                <a:latin typeface="+mj-lt"/>
+              </a:rPr>
+              <a:t>First City Providential College </a:t>
+            </a:r>
+            <a:endParaRPr lang="en-PH" sz="1200" dirty="0">
+              <a:latin typeface="+mj-lt"/>
+            </a:endParaRPr>
+          </a:p>
+        </p:txBody>
+      </p:sp>
+      <p:sp>
+        <p:nvSpPr>
+          <p:cNvPr id="3" name="TextBox 2">
+            <a:extLst>
+              <a:ext uri="{FF2B5EF4-FFF2-40B4-BE49-F238E27FC236}">
+                <a16:creationId xmlns:a16="http://schemas.microsoft.com/office/drawing/2014/main" id="{F3DD3856-8DB3-D3B9-2C2B-6DA613710F05}"/>
+              </a:ext>
+            </a:extLst>
+          </p:cNvPr>
+          <p:cNvSpPr txBox="1"/>
+          <p:nvPr/>
+        </p:nvSpPr>
+        <p:spPr>
+          <a:xfrm>
+            <a:off x="10938914" y="6204382"/>
+            <a:ext cx="1146596" cy="523220"/>
+          </a:xfrm>
+          <a:prstGeom prst="rect">
+            <a:avLst/>
+          </a:prstGeom>
+          <a:noFill/>
+        </p:spPr>
+        <p:txBody>
+          <a:bodyPr wrap="none" rtlCol="0">
+            <a:spAutoFit/>
+          </a:bodyPr>
+          <a:lstStyle/>
+          <a:p>
+            <a:r>
+              <a:rPr lang="en-US" sz="2800" dirty="0">
+                <a:latin typeface="Aptos Black" panose="020B0004020202020204" pitchFamily="34" charset="0"/>
+              </a:rPr>
+              <a:t>DAY 1</a:t>
+            </a:r>
+            <a:endParaRPr lang="en-PH" sz="2800" dirty="0">
+              <a:latin typeface="Aptos Black" panose="020B0004020202020204" pitchFamily="34" charset="0"/>
+            </a:endParaRPr>
+          </a:p>
+        </p:txBody>
+      </p:sp>
+      <p:sp>
+        <p:nvSpPr>
+          <p:cNvPr id="6" name="TextBox 5">
+            <a:extLst>
+              <a:ext uri="{FF2B5EF4-FFF2-40B4-BE49-F238E27FC236}">
+                <a16:creationId xmlns:a16="http://schemas.microsoft.com/office/drawing/2014/main" id="{3F1718C8-A437-31BB-767C-53F56EBACDF0}"/>
+              </a:ext>
+            </a:extLst>
+          </p:cNvPr>
+          <p:cNvSpPr txBox="1"/>
+          <p:nvPr/>
+        </p:nvSpPr>
+        <p:spPr>
+          <a:xfrm>
+            <a:off x="246888" y="713232"/>
+            <a:ext cx="7162089" cy="646331"/>
+          </a:xfrm>
+          <a:prstGeom prst="rect">
+            <a:avLst/>
+          </a:prstGeom>
+          <a:noFill/>
+        </p:spPr>
+        <p:txBody>
+          <a:bodyPr wrap="none" rtlCol="0">
+            <a:spAutoFit/>
+          </a:bodyPr>
+          <a:lstStyle/>
+          <a:p>
+            <a:r>
+              <a:rPr lang="en-US" sz="3600" dirty="0">
+                <a:latin typeface="Aptos Black" panose="020B0004020202020204" pitchFamily="34" charset="0"/>
+              </a:rPr>
+              <a:t>HANDS-ON </a:t>
+            </a:r>
+            <a:r>
+              <a:rPr lang="en-US" sz="3600" dirty="0">
+                <a:solidFill>
+                  <a:schemeClr val="bg1">
+                    <a:lumMod val="75000"/>
+                  </a:schemeClr>
+                </a:solidFill>
+                <a:latin typeface="Aptos Black" panose="020B0004020202020204" pitchFamily="34" charset="0"/>
+              </a:rPr>
+              <a:t>REACT APPLICATION</a:t>
+            </a:r>
+            <a:endParaRPr lang="en-PH" sz="3600" dirty="0">
+              <a:solidFill>
+                <a:schemeClr val="bg1">
+                  <a:lumMod val="75000"/>
+                </a:schemeClr>
+              </a:solidFill>
+              <a:latin typeface="Aptos Black" panose="020B0004020202020204" pitchFamily="34" charset="0"/>
+            </a:endParaRPr>
+          </a:p>
+        </p:txBody>
+      </p:sp>
+      <p:sp>
+        <p:nvSpPr>
+          <p:cNvPr id="7" name="TextBox 6">
+            <a:extLst>
+              <a:ext uri="{FF2B5EF4-FFF2-40B4-BE49-F238E27FC236}">
+                <a16:creationId xmlns:a16="http://schemas.microsoft.com/office/drawing/2014/main" id="{C02F2E04-200A-83F7-AA3A-027B649FA331}"/>
+              </a:ext>
+            </a:extLst>
+          </p:cNvPr>
+          <p:cNvSpPr txBox="1"/>
+          <p:nvPr/>
+        </p:nvSpPr>
+        <p:spPr>
+          <a:xfrm>
+            <a:off x="246888" y="1272349"/>
+            <a:ext cx="4422301" cy="369332"/>
+          </a:xfrm>
+          <a:prstGeom prst="rect">
+            <a:avLst/>
+          </a:prstGeom>
+          <a:noFill/>
+        </p:spPr>
+        <p:txBody>
+          <a:bodyPr wrap="none" rtlCol="0">
+            <a:spAutoFit/>
+          </a:bodyPr>
+          <a:lstStyle/>
+          <a:p>
+            <a:r>
+              <a:rPr lang="en-US" dirty="0">
+                <a:solidFill>
+                  <a:schemeClr val="tx2">
+                    <a:lumMod val="75000"/>
+                    <a:lumOff val="25000"/>
+                  </a:schemeClr>
+                </a:solidFill>
+                <a:latin typeface="Aptos Black" panose="020B0004020202020204" pitchFamily="34" charset="0"/>
+              </a:rPr>
+              <a:t>CODE WORKSHOP (FRONTEND) – DAY 1</a:t>
+            </a:r>
+            <a:endParaRPr lang="en-PH" dirty="0">
+              <a:solidFill>
+                <a:schemeClr val="tx2">
+                  <a:lumMod val="75000"/>
+                  <a:lumOff val="25000"/>
+                </a:schemeClr>
+              </a:solidFill>
+              <a:latin typeface="Aptos Black" panose="020B0004020202020204" pitchFamily="34" charset="0"/>
+            </a:endParaRPr>
+          </a:p>
+        </p:txBody>
+      </p:sp>
+      <p:cxnSp>
+        <p:nvCxnSpPr>
+          <p:cNvPr id="8" name="Straight Connector 7">
+            <a:extLst>
+              <a:ext uri="{FF2B5EF4-FFF2-40B4-BE49-F238E27FC236}">
+                <a16:creationId xmlns:a16="http://schemas.microsoft.com/office/drawing/2014/main" id="{6794FE33-12BC-031B-5E9F-D1BC85DDF19F}"/>
+              </a:ext>
+            </a:extLst>
+          </p:cNvPr>
+          <p:cNvCxnSpPr>
+            <a:cxnSpLocks/>
+          </p:cNvCxnSpPr>
+          <p:nvPr/>
+        </p:nvCxnSpPr>
+        <p:spPr>
+          <a:xfrm>
+            <a:off x="246888" y="1669196"/>
+            <a:ext cx="10991088" cy="0"/>
+          </a:xfrm>
+          <a:prstGeom prst="line">
+            <a:avLst/>
+          </a:prstGeom>
+        </p:spPr>
+        <p:style>
+          <a:lnRef idx="2">
+            <a:schemeClr val="accent1"/>
+          </a:lnRef>
+          <a:fillRef idx="0">
+            <a:schemeClr val="accent1"/>
+          </a:fillRef>
+          <a:effectRef idx="1">
+            <a:schemeClr val="accent1"/>
+          </a:effectRef>
+          <a:fontRef idx="minor">
+            <a:schemeClr val="tx1"/>
+          </a:fontRef>
+        </p:style>
+      </p:cxnSp>
+      <p:pic>
+        <p:nvPicPr>
+          <p:cNvPr id="14" name="Picture 13">
+            <a:extLst>
+              <a:ext uri="{FF2B5EF4-FFF2-40B4-BE49-F238E27FC236}">
+                <a16:creationId xmlns:a16="http://schemas.microsoft.com/office/drawing/2014/main" id="{BA81590E-7B11-B7CE-E149-FDA1646087A7}"/>
+              </a:ext>
+            </a:extLst>
+          </p:cNvPr>
+          <p:cNvPicPr>
+            <a:picLocks noChangeAspect="1"/>
+          </p:cNvPicPr>
+          <p:nvPr/>
+        </p:nvPicPr>
+        <p:blipFill>
+          <a:blip r:embed="rId3">
+            <a:extLst>
+              <a:ext uri="{28A0092B-C50C-407E-A947-70E740481C1C}">
+                <a14:useLocalDpi xmlns:a14="http://schemas.microsoft.com/office/drawing/2010/main" val="0"/>
+              </a:ext>
+            </a:extLst>
+          </a:blip>
+          <a:stretch>
+            <a:fillRect/>
+          </a:stretch>
+        </p:blipFill>
+        <p:spPr>
+          <a:xfrm>
+            <a:off x="106490" y="1410730"/>
+            <a:ext cx="3584448" cy="2018270"/>
+          </a:xfrm>
+          <a:prstGeom prst="rect">
+            <a:avLst/>
+          </a:prstGeom>
+        </p:spPr>
+      </p:pic>
+      <p:sp>
+        <p:nvSpPr>
+          <p:cNvPr id="9" name="TextBox 8">
+            <a:extLst>
+              <a:ext uri="{FF2B5EF4-FFF2-40B4-BE49-F238E27FC236}">
+                <a16:creationId xmlns:a16="http://schemas.microsoft.com/office/drawing/2014/main" id="{84A6C33B-5758-4A9A-CBFE-B963F6A33DA2}"/>
+              </a:ext>
+            </a:extLst>
+          </p:cNvPr>
+          <p:cNvSpPr txBox="1"/>
+          <p:nvPr/>
+        </p:nvSpPr>
+        <p:spPr>
+          <a:xfrm>
+            <a:off x="5890674" y="3058286"/>
+            <a:ext cx="6400800" cy="1754326"/>
+          </a:xfrm>
+          <a:prstGeom prst="rect">
+            <a:avLst/>
+          </a:prstGeom>
+          <a:noFill/>
+        </p:spPr>
+        <p:txBody>
+          <a:bodyPr wrap="square" rtlCol="0">
+            <a:spAutoFit/>
+          </a:bodyPr>
+          <a:lstStyle/>
+          <a:p>
+            <a:r>
+              <a:rPr lang="en-US" dirty="0"/>
+              <a:t>Please do note that our activity is </a:t>
+            </a:r>
+            <a:r>
+              <a:rPr lang="en-US" b="1" dirty="0"/>
+              <a:t>open</a:t>
+            </a:r>
+            <a:r>
+              <a:rPr lang="en-US" dirty="0"/>
+              <a:t> and </a:t>
+            </a:r>
+            <a:r>
+              <a:rPr lang="en-US" b="1" dirty="0"/>
+              <a:t>free</a:t>
+            </a:r>
+            <a:r>
+              <a:rPr lang="en-US" dirty="0"/>
+              <a:t> to download.</a:t>
+            </a:r>
+            <a:r>
+              <a:rPr lang="en-PH" dirty="0"/>
+              <a:t> Everything you need will be in this </a:t>
+            </a:r>
+            <a:r>
+              <a:rPr lang="en-PH" dirty="0" err="1"/>
+              <a:t>github</a:t>
+            </a:r>
+            <a:r>
+              <a:rPr lang="en-PH" dirty="0"/>
+              <a:t> repository:</a:t>
+            </a:r>
+          </a:p>
+          <a:p>
+            <a:endParaRPr lang="en-PH" dirty="0"/>
+          </a:p>
+          <a:p>
+            <a:r>
+              <a:rPr lang="en-US" dirty="0">
+                <a:hlinkClick r:id="rId4"/>
+              </a:rPr>
+              <a:t>https://github.com/Cpm-X-Dev/ViteReactDemo</a:t>
+            </a:r>
+            <a:r>
+              <a:rPr lang="en-US" dirty="0"/>
+              <a:t> </a:t>
+            </a:r>
+          </a:p>
+          <a:p>
+            <a:endParaRPr lang="en-US" dirty="0"/>
+          </a:p>
+          <a:p>
+            <a:r>
+              <a:rPr lang="en-US" dirty="0"/>
+              <a:t>Clone command:</a:t>
+            </a:r>
+          </a:p>
+        </p:txBody>
+      </p:sp>
+      <p:sp>
+        <p:nvSpPr>
+          <p:cNvPr id="11" name="TextBox 10">
+            <a:extLst>
+              <a:ext uri="{FF2B5EF4-FFF2-40B4-BE49-F238E27FC236}">
+                <a16:creationId xmlns:a16="http://schemas.microsoft.com/office/drawing/2014/main" id="{39AA4CB0-8B5A-0C06-5752-69EEFB0B4445}"/>
+              </a:ext>
+            </a:extLst>
+          </p:cNvPr>
+          <p:cNvSpPr txBox="1"/>
+          <p:nvPr/>
+        </p:nvSpPr>
+        <p:spPr>
+          <a:xfrm>
+            <a:off x="5918106" y="4776036"/>
+            <a:ext cx="6057171" cy="369332"/>
+          </a:xfrm>
+          <a:prstGeom prst="rect">
+            <a:avLst/>
+          </a:prstGeom>
+          <a:solidFill>
+            <a:schemeClr val="accent1"/>
+          </a:solidFill>
+          <a:ln>
+            <a:noFill/>
+          </a:ln>
+        </p:spPr>
+        <p:style>
+          <a:lnRef idx="0">
+            <a:scrgbClr r="0" g="0" b="0"/>
+          </a:lnRef>
+          <a:fillRef idx="0">
+            <a:scrgbClr r="0" g="0" b="0"/>
+          </a:fillRef>
+          <a:effectRef idx="0">
+            <a:scrgbClr r="0" g="0" b="0"/>
+          </a:effectRef>
+          <a:fontRef idx="minor">
+            <a:schemeClr val="lt1"/>
+          </a:fontRef>
+        </p:style>
+        <p:txBody>
+          <a:bodyPr wrap="none" rtlCol="0">
+            <a:spAutoFit/>
+          </a:bodyPr>
+          <a:lstStyle/>
+          <a:p>
+            <a:r>
+              <a:rPr lang="en-PH" dirty="0"/>
+              <a:t>git clone https://github.com/Cpm-X-Dev/ViteReactDemo.git</a:t>
+            </a:r>
+          </a:p>
+        </p:txBody>
+      </p:sp>
+      <p:pic>
+        <p:nvPicPr>
+          <p:cNvPr id="15" name="Picture 14">
+            <a:extLst>
+              <a:ext uri="{FF2B5EF4-FFF2-40B4-BE49-F238E27FC236}">
+                <a16:creationId xmlns:a16="http://schemas.microsoft.com/office/drawing/2014/main" id="{025F3E04-B87C-95C3-1472-BED844537823}"/>
+              </a:ext>
+            </a:extLst>
+          </p:cNvPr>
+          <p:cNvPicPr>
+            <a:picLocks noChangeAspect="1"/>
+          </p:cNvPicPr>
+          <p:nvPr/>
+        </p:nvPicPr>
+        <p:blipFill>
+          <a:blip r:embed="rId5"/>
+          <a:stretch>
+            <a:fillRect/>
+          </a:stretch>
+        </p:blipFill>
+        <p:spPr>
+          <a:xfrm>
+            <a:off x="321007" y="3017694"/>
+            <a:ext cx="5459127" cy="3556831"/>
+          </a:xfrm>
+          <a:prstGeom prst="rect">
+            <a:avLst/>
+          </a:prstGeom>
+        </p:spPr>
+      </p:pic>
+    </p:spTree>
+    <p:extLst>
+      <p:ext uri="{BB962C8B-B14F-4D97-AF65-F5344CB8AC3E}">
+        <p14:creationId xmlns:p14="http://schemas.microsoft.com/office/powerpoint/2010/main" val="86565824"/>
+      </p:ext>
+    </p:extLst>
+  </p:cSld>
+  <p:clrMapOvr>
+    <a:masterClrMapping/>
+  </p:clrMapOvr>
+</p:sld>
+</file>
+
 <file path=ppt/slides/slide2.xml><?xml version="1.0" encoding="utf-8"?>
 <p:sld xmlns:a="http://schemas.openxmlformats.org/drawingml/2006/main" xmlns:r="http://schemas.openxmlformats.org/officeDocument/2006/relationships" xmlns:p="http://schemas.openxmlformats.org/presentationml/2006/main">
   <p:cSld>
@@ -3934,7 +4922,7 @@
           <p:nvPr>
             <p:extLst>
               <p:ext uri="{D42A27DB-BD31-4B8C-83A1-F6EECF244321}">
-                <p14:modId xmlns:p14="http://schemas.microsoft.com/office/powerpoint/2010/main" val="942828860"/>
+                <p14:modId xmlns:p14="http://schemas.microsoft.com/office/powerpoint/2010/main" val="2781961691"/>
               </p:ext>
             </p:extLst>
           </p:nvPr>
@@ -3988,7 +4976,7 @@
                       <a:pPr algn="ctr"/>
                       <a:r>
                         <a:rPr lang="en-US" sz="1400" b="1" dirty="0"/>
-                        <a:t>DAY 1 (MARCH 15, 2026)</a:t>
+                        <a:t>FIRST HALF (FRONTEND)</a:t>
                       </a:r>
                       <a:endParaRPr lang="en-PH" sz="1400" b="1" dirty="0"/>
                     </a:p>
@@ -4018,7 +5006,7 @@
                       <a:pPr algn="ctr"/>
                       <a:r>
                         <a:rPr lang="en-US" sz="1400" b="1" dirty="0"/>
-                        <a:t>DAY 2 (MARCH 22, 2026)</a:t>
+                        <a:t>SECOND HALF (BACKEND)</a:t>
                       </a:r>
                       <a:endParaRPr lang="en-PH" sz="1400" b="1" dirty="0"/>
                     </a:p>
@@ -5314,6 +6302,6921 @@
         <p:cNvPr id="1" name="">
           <a:extLst>
             <a:ext uri="{FF2B5EF4-FFF2-40B4-BE49-F238E27FC236}">
+              <a16:creationId xmlns:a16="http://schemas.microsoft.com/office/drawing/2014/main" id="{7BA7DFE6-C5F0-8E22-715D-0DA86146C50C}"/>
+            </a:ext>
+          </a:extLst>
+        </p:cNvPr>
+        <p:cNvGrpSpPr/>
+        <p:nvPr/>
+      </p:nvGrpSpPr>
+      <p:grpSpPr>
+        <a:xfrm>
+          <a:off x="0" y="0"/>
+          <a:ext cx="0" cy="0"/>
+          <a:chOff x="0" y="0"/>
+          <a:chExt cx="0" cy="0"/>
+        </a:xfrm>
+      </p:grpSpPr>
+      <p:sp>
+        <p:nvSpPr>
+          <p:cNvPr id="2" name="TextBox 1">
+            <a:extLst>
+              <a:ext uri="{FF2B5EF4-FFF2-40B4-BE49-F238E27FC236}">
+                <a16:creationId xmlns:a16="http://schemas.microsoft.com/office/drawing/2014/main" id="{64A97CD0-6138-DEF1-DB53-B2ACC32FCF96}"/>
+              </a:ext>
+            </a:extLst>
+          </p:cNvPr>
+          <p:cNvSpPr txBox="1"/>
+          <p:nvPr/>
+        </p:nvSpPr>
+        <p:spPr>
+          <a:xfrm>
+            <a:off x="106490" y="126682"/>
+            <a:ext cx="1444370" cy="276999"/>
+          </a:xfrm>
+          <a:prstGeom prst="rect">
+            <a:avLst/>
+          </a:prstGeom>
+          <a:noFill/>
+        </p:spPr>
+        <p:txBody>
+          <a:bodyPr wrap="none" rtlCol="0">
+            <a:spAutoFit/>
+          </a:bodyPr>
+          <a:lstStyle/>
+          <a:p>
+            <a:r>
+              <a:rPr lang="en-US" sz="1200" dirty="0">
+                <a:latin typeface="+mj-lt"/>
+              </a:rPr>
+              <a:t>REACT WORKSHOP</a:t>
+            </a:r>
+            <a:endParaRPr lang="en-PH" sz="1200" dirty="0">
+              <a:latin typeface="+mj-lt"/>
+            </a:endParaRPr>
+          </a:p>
+        </p:txBody>
+      </p:sp>
+      <p:pic>
+        <p:nvPicPr>
+          <p:cNvPr id="4" name="Picture 3">
+            <a:extLst>
+              <a:ext uri="{FF2B5EF4-FFF2-40B4-BE49-F238E27FC236}">
+                <a16:creationId xmlns:a16="http://schemas.microsoft.com/office/drawing/2014/main" id="{423498DB-D94D-8424-6829-E44550672F71}"/>
+              </a:ext>
+            </a:extLst>
+          </p:cNvPr>
+          <p:cNvPicPr>
+            <a:picLocks noChangeAspect="1"/>
+          </p:cNvPicPr>
+          <p:nvPr/>
+        </p:nvPicPr>
+        <p:blipFill>
+          <a:blip r:embed="rId2">
+            <a:extLst>
+              <a:ext uri="{28A0092B-C50C-407E-A947-70E740481C1C}">
+                <a14:useLocalDpi xmlns:a14="http://schemas.microsoft.com/office/drawing/2010/main" val="0"/>
+              </a:ext>
+            </a:extLst>
+          </a:blip>
+          <a:stretch>
+            <a:fillRect/>
+          </a:stretch>
+        </p:blipFill>
+        <p:spPr>
+          <a:xfrm>
+            <a:off x="11305222" y="130398"/>
+            <a:ext cx="780288" cy="723333"/>
+          </a:xfrm>
+          <a:prstGeom prst="rect">
+            <a:avLst/>
+          </a:prstGeom>
+        </p:spPr>
+      </p:pic>
+      <p:sp>
+        <p:nvSpPr>
+          <p:cNvPr id="5" name="TextBox 4">
+            <a:extLst>
+              <a:ext uri="{FF2B5EF4-FFF2-40B4-BE49-F238E27FC236}">
+                <a16:creationId xmlns:a16="http://schemas.microsoft.com/office/drawing/2014/main" id="{04EB4B54-99BF-BDDF-A34D-823C594CA366}"/>
+              </a:ext>
+            </a:extLst>
+          </p:cNvPr>
+          <p:cNvSpPr txBox="1"/>
+          <p:nvPr/>
+        </p:nvSpPr>
+        <p:spPr>
+          <a:xfrm>
+            <a:off x="4079358" y="126682"/>
+            <a:ext cx="4033284" cy="461665"/>
+          </a:xfrm>
+          <a:prstGeom prst="rect">
+            <a:avLst/>
+          </a:prstGeom>
+          <a:noFill/>
+        </p:spPr>
+        <p:txBody>
+          <a:bodyPr wrap="none" rtlCol="0">
+            <a:spAutoFit/>
+          </a:bodyPr>
+          <a:lstStyle/>
+          <a:p>
+            <a:pPr algn="ctr"/>
+            <a:r>
+              <a:rPr lang="en-US" sz="1200" b="1" dirty="0">
+                <a:latin typeface="+mj-lt"/>
+              </a:rPr>
+              <a:t>REACT ESSENTIALS:</a:t>
+            </a:r>
+          </a:p>
+          <a:p>
+            <a:pPr algn="ctr"/>
+            <a:r>
+              <a:rPr lang="en-US" sz="1200" b="1" dirty="0">
+                <a:latin typeface="+mj-lt"/>
+              </a:rPr>
+              <a:t>BUILDING INTERACTIVE WEB APPLICATIONS WITH APIs</a:t>
+            </a:r>
+            <a:endParaRPr lang="en-PH" sz="1200" b="1" dirty="0">
+              <a:latin typeface="+mj-lt"/>
+            </a:endParaRPr>
+          </a:p>
+        </p:txBody>
+      </p:sp>
+      <p:cxnSp>
+        <p:nvCxnSpPr>
+          <p:cNvPr id="10" name="Straight Connector 9">
+            <a:extLst>
+              <a:ext uri="{FF2B5EF4-FFF2-40B4-BE49-F238E27FC236}">
+                <a16:creationId xmlns:a16="http://schemas.microsoft.com/office/drawing/2014/main" id="{705BFC11-3C93-E760-2F82-0C47B785FCC6}"/>
+              </a:ext>
+            </a:extLst>
+          </p:cNvPr>
+          <p:cNvCxnSpPr>
+            <a:cxnSpLocks/>
+          </p:cNvCxnSpPr>
+          <p:nvPr/>
+        </p:nvCxnSpPr>
+        <p:spPr>
+          <a:xfrm>
+            <a:off x="246888" y="615779"/>
+            <a:ext cx="10991088" cy="0"/>
+          </a:xfrm>
+          <a:prstGeom prst="line">
+            <a:avLst/>
+          </a:prstGeom>
+        </p:spPr>
+        <p:style>
+          <a:lnRef idx="2">
+            <a:schemeClr val="accent1"/>
+          </a:lnRef>
+          <a:fillRef idx="0">
+            <a:schemeClr val="accent1"/>
+          </a:fillRef>
+          <a:effectRef idx="1">
+            <a:schemeClr val="accent1"/>
+          </a:effectRef>
+          <a:fontRef idx="minor">
+            <a:schemeClr val="tx1"/>
+          </a:fontRef>
+        </p:style>
+      </p:cxnSp>
+      <p:sp>
+        <p:nvSpPr>
+          <p:cNvPr id="15" name="TextBox 14">
+            <a:extLst>
+              <a:ext uri="{FF2B5EF4-FFF2-40B4-BE49-F238E27FC236}">
+                <a16:creationId xmlns:a16="http://schemas.microsoft.com/office/drawing/2014/main" id="{C6D4A946-431C-1551-ABE6-8801D3CFD7AA}"/>
+              </a:ext>
+            </a:extLst>
+          </p:cNvPr>
+          <p:cNvSpPr txBox="1"/>
+          <p:nvPr/>
+        </p:nvSpPr>
+        <p:spPr>
+          <a:xfrm>
+            <a:off x="246888" y="711791"/>
+            <a:ext cx="3280322" cy="461665"/>
+          </a:xfrm>
+          <a:prstGeom prst="rect">
+            <a:avLst/>
+          </a:prstGeom>
+          <a:noFill/>
+        </p:spPr>
+        <p:txBody>
+          <a:bodyPr wrap="none" rtlCol="0">
+            <a:spAutoFit/>
+          </a:bodyPr>
+          <a:lstStyle/>
+          <a:p>
+            <a:r>
+              <a:rPr lang="en-US" sz="2400" dirty="0">
+                <a:latin typeface="Aptos Black" panose="020B0004020202020204" pitchFamily="34" charset="0"/>
+              </a:rPr>
+              <a:t>WORKSHOP </a:t>
+            </a:r>
+            <a:r>
+              <a:rPr lang="en-US" sz="2400" dirty="0">
+                <a:solidFill>
+                  <a:schemeClr val="tx1">
+                    <a:lumMod val="50000"/>
+                    <a:lumOff val="50000"/>
+                  </a:schemeClr>
+                </a:solidFill>
+                <a:latin typeface="Aptos Black" panose="020B0004020202020204" pitchFamily="34" charset="0"/>
+              </a:rPr>
+              <a:t>OUTLINE</a:t>
+            </a:r>
+            <a:endParaRPr lang="en-PH" sz="2400" dirty="0">
+              <a:solidFill>
+                <a:schemeClr val="tx1">
+                  <a:lumMod val="50000"/>
+                  <a:lumOff val="50000"/>
+                </a:schemeClr>
+              </a:solidFill>
+              <a:latin typeface="Aptos Black" panose="020B0004020202020204" pitchFamily="34" charset="0"/>
+            </a:endParaRPr>
+          </a:p>
+        </p:txBody>
+      </p:sp>
+      <p:sp>
+        <p:nvSpPr>
+          <p:cNvPr id="20" name="TextBox 19">
+            <a:extLst>
+              <a:ext uri="{FF2B5EF4-FFF2-40B4-BE49-F238E27FC236}">
+                <a16:creationId xmlns:a16="http://schemas.microsoft.com/office/drawing/2014/main" id="{C7C1CEA5-B5EB-F5EC-A814-2A369D346F05}"/>
+              </a:ext>
+            </a:extLst>
+          </p:cNvPr>
+          <p:cNvSpPr txBox="1"/>
+          <p:nvPr/>
+        </p:nvSpPr>
+        <p:spPr>
+          <a:xfrm>
+            <a:off x="9328872" y="129474"/>
+            <a:ext cx="2025426" cy="276999"/>
+          </a:xfrm>
+          <a:prstGeom prst="rect">
+            <a:avLst/>
+          </a:prstGeom>
+          <a:noFill/>
+        </p:spPr>
+        <p:txBody>
+          <a:bodyPr wrap="none" rtlCol="0">
+            <a:spAutoFit/>
+          </a:bodyPr>
+          <a:lstStyle/>
+          <a:p>
+            <a:r>
+              <a:rPr lang="en-US" sz="1200" dirty="0">
+                <a:latin typeface="+mj-lt"/>
+              </a:rPr>
+              <a:t>First City Providential College </a:t>
+            </a:r>
+            <a:endParaRPr lang="en-PH" sz="1200" dirty="0">
+              <a:latin typeface="+mj-lt"/>
+            </a:endParaRPr>
+          </a:p>
+        </p:txBody>
+      </p:sp>
+      <p:sp>
+        <p:nvSpPr>
+          <p:cNvPr id="108" name="Shape 4">
+            <a:extLst>
+              <a:ext uri="{FF2B5EF4-FFF2-40B4-BE49-F238E27FC236}">
+                <a16:creationId xmlns:a16="http://schemas.microsoft.com/office/drawing/2014/main" id="{4DF1CA84-82FC-2A96-768A-E3A9F3060DF6}"/>
+              </a:ext>
+            </a:extLst>
+          </p:cNvPr>
+          <p:cNvSpPr/>
+          <p:nvPr/>
+        </p:nvSpPr>
+        <p:spPr>
+          <a:xfrm>
+            <a:off x="246888" y="1123163"/>
+            <a:ext cx="11521440" cy="438912"/>
+          </a:xfrm>
+          <a:prstGeom prst="rect">
+            <a:avLst/>
+          </a:prstGeom>
+          <a:solidFill>
+            <a:srgbClr val="1B3D2F"/>
+          </a:solidFill>
+          <a:ln w="12700">
+            <a:solidFill>
+              <a:srgbClr val="1B3D2F"/>
+            </a:solidFill>
+            <a:prstDash val="solid"/>
+          </a:ln>
+        </p:spPr>
+        <p:txBody>
+          <a:bodyPr/>
+          <a:lstStyle/>
+          <a:p>
+            <a:endParaRPr lang="en-PH" dirty="0"/>
+          </a:p>
+        </p:txBody>
+      </p:sp>
+      <p:sp>
+        <p:nvSpPr>
+          <p:cNvPr id="109" name="Shape 5">
+            <a:extLst>
+              <a:ext uri="{FF2B5EF4-FFF2-40B4-BE49-F238E27FC236}">
+                <a16:creationId xmlns:a16="http://schemas.microsoft.com/office/drawing/2014/main" id="{B89FDC3F-B8CD-71C0-C012-F645BF22C349}"/>
+              </a:ext>
+            </a:extLst>
+          </p:cNvPr>
+          <p:cNvSpPr/>
+          <p:nvPr/>
+        </p:nvSpPr>
+        <p:spPr>
+          <a:xfrm>
+            <a:off x="246888" y="1123163"/>
+            <a:ext cx="64008" cy="438912"/>
+          </a:xfrm>
+          <a:prstGeom prst="rect">
+            <a:avLst/>
+          </a:prstGeom>
+          <a:solidFill>
+            <a:srgbClr val="4CAF82"/>
+          </a:solidFill>
+          <a:ln w="12700">
+            <a:solidFill>
+              <a:srgbClr val="4CAF82"/>
+            </a:solidFill>
+            <a:prstDash val="solid"/>
+          </a:ln>
+        </p:spPr>
+        <p:txBody>
+          <a:bodyPr/>
+          <a:lstStyle/>
+          <a:p>
+            <a:endParaRPr lang="en-PH"/>
+          </a:p>
+        </p:txBody>
+      </p:sp>
+      <p:sp>
+        <p:nvSpPr>
+          <p:cNvPr id="110" name="Text 6">
+            <a:extLst>
+              <a:ext uri="{FF2B5EF4-FFF2-40B4-BE49-F238E27FC236}">
+                <a16:creationId xmlns:a16="http://schemas.microsoft.com/office/drawing/2014/main" id="{E09A1444-D671-DB56-5598-6A1FF200602B}"/>
+              </a:ext>
+            </a:extLst>
+          </p:cNvPr>
+          <p:cNvSpPr/>
+          <p:nvPr/>
+        </p:nvSpPr>
+        <p:spPr>
+          <a:xfrm>
+            <a:off x="356616" y="1123163"/>
+            <a:ext cx="502920" cy="438912"/>
+          </a:xfrm>
+          <a:prstGeom prst="rect">
+            <a:avLst/>
+          </a:prstGeom>
+          <a:noFill/>
+          <a:ln/>
+        </p:spPr>
+        <p:txBody>
+          <a:bodyPr wrap="square" lIns="0" tIns="0" rIns="0" bIns="0" rtlCol="0" anchor="ctr"/>
+          <a:lstStyle/>
+          <a:p>
+            <a:pPr marL="0" indent="0" algn="ctr">
+              <a:buNone/>
+            </a:pPr>
+            <a:r>
+              <a:rPr lang="en-US" sz="2600" b="1" dirty="0">
+                <a:solidFill>
+                  <a:srgbClr val="FFFFFF">
+                    <a:alpha val="35000"/>
+                  </a:srgbClr>
+                </a:solidFill>
+                <a:latin typeface="Georgia" pitchFamily="34" charset="0"/>
+                <a:ea typeface="Georgia" pitchFamily="34" charset="-122"/>
+                <a:cs typeface="Georgia" pitchFamily="34" charset="-120"/>
+              </a:rPr>
+              <a:t>I</a:t>
+            </a:r>
+            <a:endParaRPr lang="en-US" sz="2600" dirty="0"/>
+          </a:p>
+        </p:txBody>
+      </p:sp>
+      <p:sp>
+        <p:nvSpPr>
+          <p:cNvPr id="111" name="Text 7">
+            <a:extLst>
+              <a:ext uri="{FF2B5EF4-FFF2-40B4-BE49-F238E27FC236}">
+                <a16:creationId xmlns:a16="http://schemas.microsoft.com/office/drawing/2014/main" id="{C65BBCDD-BC0C-6BC5-D3DC-31EFE0658A6C}"/>
+              </a:ext>
+            </a:extLst>
+          </p:cNvPr>
+          <p:cNvSpPr/>
+          <p:nvPr/>
+        </p:nvSpPr>
+        <p:spPr>
+          <a:xfrm>
+            <a:off x="905256" y="1214603"/>
+            <a:ext cx="5486400" cy="256032"/>
+          </a:xfrm>
+          <a:prstGeom prst="rect">
+            <a:avLst/>
+          </a:prstGeom>
+          <a:noFill/>
+          <a:ln/>
+        </p:spPr>
+        <p:txBody>
+          <a:bodyPr wrap="square" lIns="0" tIns="0" rIns="0" bIns="0" rtlCol="0" anchor="b"/>
+          <a:lstStyle/>
+          <a:p>
+            <a:pPr marL="0" indent="0">
+              <a:buNone/>
+            </a:pPr>
+            <a:r>
+              <a:rPr lang="en-US" sz="1400" b="1" dirty="0">
+                <a:solidFill>
+                  <a:srgbClr val="FFFFFF"/>
+                </a:solidFill>
+                <a:latin typeface="Calibri" pitchFamily="34" charset="0"/>
+                <a:ea typeface="Calibri" pitchFamily="34" charset="-122"/>
+                <a:cs typeface="Calibri" pitchFamily="34" charset="-120"/>
+              </a:rPr>
+              <a:t>Frontend Development</a:t>
+            </a:r>
+            <a:endParaRPr lang="en-US" sz="1400" dirty="0"/>
+          </a:p>
+        </p:txBody>
+      </p:sp>
+      <p:sp>
+        <p:nvSpPr>
+          <p:cNvPr id="113" name="Shape 9">
+            <a:extLst>
+              <a:ext uri="{FF2B5EF4-FFF2-40B4-BE49-F238E27FC236}">
+                <a16:creationId xmlns:a16="http://schemas.microsoft.com/office/drawing/2014/main" id="{6033E2DA-EA14-80AD-9B68-A998E3FEE87B}"/>
+              </a:ext>
+            </a:extLst>
+          </p:cNvPr>
+          <p:cNvSpPr/>
+          <p:nvPr/>
+        </p:nvSpPr>
+        <p:spPr>
+          <a:xfrm>
+            <a:off x="10122408" y="1214603"/>
+            <a:ext cx="1508760" cy="246888"/>
+          </a:xfrm>
+          <a:prstGeom prst="rect">
+            <a:avLst/>
+          </a:prstGeom>
+          <a:solidFill>
+            <a:srgbClr val="4CAF82"/>
+          </a:solidFill>
+          <a:ln w="12700">
+            <a:solidFill>
+              <a:srgbClr val="4CAF82"/>
+            </a:solidFill>
+            <a:prstDash val="solid"/>
+          </a:ln>
+        </p:spPr>
+        <p:txBody>
+          <a:bodyPr/>
+          <a:lstStyle/>
+          <a:p>
+            <a:endParaRPr lang="en-PH"/>
+          </a:p>
+        </p:txBody>
+      </p:sp>
+      <p:sp>
+        <p:nvSpPr>
+          <p:cNvPr id="114" name="Text 10">
+            <a:extLst>
+              <a:ext uri="{FF2B5EF4-FFF2-40B4-BE49-F238E27FC236}">
+                <a16:creationId xmlns:a16="http://schemas.microsoft.com/office/drawing/2014/main" id="{ED5BEAA1-A492-54CB-4500-C43D1EF85880}"/>
+              </a:ext>
+            </a:extLst>
+          </p:cNvPr>
+          <p:cNvSpPr/>
+          <p:nvPr/>
+        </p:nvSpPr>
+        <p:spPr>
+          <a:xfrm>
+            <a:off x="10122408" y="1214603"/>
+            <a:ext cx="1508760" cy="246888"/>
+          </a:xfrm>
+          <a:prstGeom prst="rect">
+            <a:avLst/>
+          </a:prstGeom>
+          <a:noFill/>
+          <a:ln/>
+        </p:spPr>
+        <p:txBody>
+          <a:bodyPr wrap="square" lIns="0" tIns="0" rIns="0" bIns="0" rtlCol="0" anchor="ctr"/>
+          <a:lstStyle/>
+          <a:p>
+            <a:pPr marL="0" indent="0" algn="ctr">
+              <a:buNone/>
+            </a:pPr>
+            <a:r>
+              <a:rPr lang="en-US" sz="900" b="1" dirty="0">
+                <a:solidFill>
+                  <a:srgbClr val="1B3D2F"/>
+                </a:solidFill>
+                <a:latin typeface="Calibri" pitchFamily="34" charset="0"/>
+                <a:ea typeface="Calibri" pitchFamily="34" charset="-122"/>
+                <a:cs typeface="Calibri" pitchFamily="34" charset="-120"/>
+              </a:rPr>
+              <a:t>~2 HOURS</a:t>
+            </a:r>
+            <a:endParaRPr lang="en-US" sz="900" dirty="0"/>
+          </a:p>
+        </p:txBody>
+      </p:sp>
+      <p:sp>
+        <p:nvSpPr>
+          <p:cNvPr id="115" name="Shape 11">
+            <a:extLst>
+              <a:ext uri="{FF2B5EF4-FFF2-40B4-BE49-F238E27FC236}">
+                <a16:creationId xmlns:a16="http://schemas.microsoft.com/office/drawing/2014/main" id="{AADD591D-4453-C93E-C97F-94DBE2BA520E}"/>
+              </a:ext>
+            </a:extLst>
+          </p:cNvPr>
+          <p:cNvSpPr/>
+          <p:nvPr/>
+        </p:nvSpPr>
+        <p:spPr>
+          <a:xfrm>
+            <a:off x="246888" y="1653515"/>
+            <a:ext cx="11521440" cy="201168"/>
+          </a:xfrm>
+          <a:prstGeom prst="rect">
+            <a:avLst/>
+          </a:prstGeom>
+          <a:solidFill>
+            <a:srgbClr val="254D3A"/>
+          </a:solidFill>
+          <a:ln w="12700">
+            <a:solidFill>
+              <a:srgbClr val="254D3A"/>
+            </a:solidFill>
+            <a:prstDash val="solid"/>
+          </a:ln>
+        </p:spPr>
+        <p:txBody>
+          <a:bodyPr/>
+          <a:lstStyle/>
+          <a:p>
+            <a:endParaRPr lang="en-PH"/>
+          </a:p>
+        </p:txBody>
+      </p:sp>
+      <p:sp>
+        <p:nvSpPr>
+          <p:cNvPr id="116" name="Text 12">
+            <a:extLst>
+              <a:ext uri="{FF2B5EF4-FFF2-40B4-BE49-F238E27FC236}">
+                <a16:creationId xmlns:a16="http://schemas.microsoft.com/office/drawing/2014/main" id="{64138747-728F-FC91-4054-8E107A5DB0A7}"/>
+              </a:ext>
+            </a:extLst>
+          </p:cNvPr>
+          <p:cNvSpPr/>
+          <p:nvPr/>
+        </p:nvSpPr>
+        <p:spPr>
+          <a:xfrm>
+            <a:off x="384048" y="1653515"/>
+            <a:ext cx="9144000" cy="201168"/>
+          </a:xfrm>
+          <a:prstGeom prst="rect">
+            <a:avLst/>
+          </a:prstGeom>
+          <a:noFill/>
+          <a:ln/>
+        </p:spPr>
+        <p:txBody>
+          <a:bodyPr wrap="square" lIns="0" tIns="0" rIns="0" bIns="0" rtlCol="0" anchor="ctr"/>
+          <a:lstStyle/>
+          <a:p>
+            <a:pPr marL="0" indent="0">
+              <a:buNone/>
+            </a:pPr>
+            <a:r>
+              <a:rPr lang="en-US" sz="750" b="1" kern="0" spc="250" dirty="0">
+                <a:solidFill>
+                  <a:srgbClr val="C0DDD0"/>
+                </a:solidFill>
+                <a:latin typeface="Calibri" pitchFamily="34" charset="0"/>
+                <a:ea typeface="Calibri" pitchFamily="34" charset="-122"/>
+                <a:cs typeface="Calibri" pitchFamily="34" charset="-120"/>
+              </a:rPr>
+              <a:t>ACTIVITY</a:t>
+            </a:r>
+            <a:endParaRPr lang="en-US" sz="750" dirty="0"/>
+          </a:p>
+        </p:txBody>
+      </p:sp>
+      <p:sp>
+        <p:nvSpPr>
+          <p:cNvPr id="117" name="Text 13">
+            <a:extLst>
+              <a:ext uri="{FF2B5EF4-FFF2-40B4-BE49-F238E27FC236}">
+                <a16:creationId xmlns:a16="http://schemas.microsoft.com/office/drawing/2014/main" id="{D6977599-5DD4-97E4-DF7A-55B452D5423E}"/>
+              </a:ext>
+            </a:extLst>
+          </p:cNvPr>
+          <p:cNvSpPr/>
+          <p:nvPr/>
+        </p:nvSpPr>
+        <p:spPr>
+          <a:xfrm>
+            <a:off x="9619488" y="1653515"/>
+            <a:ext cx="2011680" cy="201168"/>
+          </a:xfrm>
+          <a:prstGeom prst="rect">
+            <a:avLst/>
+          </a:prstGeom>
+          <a:noFill/>
+          <a:ln/>
+        </p:spPr>
+        <p:txBody>
+          <a:bodyPr wrap="square" lIns="0" tIns="0" rIns="0" bIns="0" rtlCol="0" anchor="ctr"/>
+          <a:lstStyle/>
+          <a:p>
+            <a:pPr marL="0" indent="0" algn="r">
+              <a:buNone/>
+            </a:pPr>
+            <a:r>
+              <a:rPr lang="en-US" sz="750" b="1" kern="0" spc="150" dirty="0">
+                <a:solidFill>
+                  <a:srgbClr val="C0DDD0"/>
+                </a:solidFill>
+                <a:latin typeface="Calibri" pitchFamily="34" charset="0"/>
+                <a:ea typeface="Calibri" pitchFamily="34" charset="-122"/>
+                <a:cs typeface="Calibri" pitchFamily="34" charset="-120"/>
+              </a:rPr>
+              <a:t>EST. DURATION</a:t>
+            </a:r>
+            <a:endParaRPr lang="en-US" sz="750" dirty="0"/>
+          </a:p>
+        </p:txBody>
+      </p:sp>
+      <p:sp>
+        <p:nvSpPr>
+          <p:cNvPr id="118" name="Shape 14">
+            <a:extLst>
+              <a:ext uri="{FF2B5EF4-FFF2-40B4-BE49-F238E27FC236}">
+                <a16:creationId xmlns:a16="http://schemas.microsoft.com/office/drawing/2014/main" id="{6CD1F496-EBD8-5D4B-3D8B-796AE4D0FFA0}"/>
+              </a:ext>
+            </a:extLst>
+          </p:cNvPr>
+          <p:cNvSpPr/>
+          <p:nvPr/>
+        </p:nvSpPr>
+        <p:spPr>
+          <a:xfrm>
+            <a:off x="246888" y="1854683"/>
+            <a:ext cx="11521440" cy="246888"/>
+          </a:xfrm>
+          <a:prstGeom prst="rect">
+            <a:avLst/>
+          </a:prstGeom>
+          <a:solidFill>
+            <a:srgbClr val="EEF2EE"/>
+          </a:solidFill>
+          <a:ln w="6350">
+            <a:solidFill>
+              <a:srgbClr val="E8E8E8"/>
+            </a:solidFill>
+            <a:prstDash val="solid"/>
+          </a:ln>
+        </p:spPr>
+        <p:txBody>
+          <a:bodyPr/>
+          <a:lstStyle/>
+          <a:p>
+            <a:endParaRPr lang="en-PH"/>
+          </a:p>
+        </p:txBody>
+      </p:sp>
+      <p:sp>
+        <p:nvSpPr>
+          <p:cNvPr id="119" name="Shape 15">
+            <a:extLst>
+              <a:ext uri="{FF2B5EF4-FFF2-40B4-BE49-F238E27FC236}">
+                <a16:creationId xmlns:a16="http://schemas.microsoft.com/office/drawing/2014/main" id="{F985F5DD-5F11-BD2D-3883-62FDBBA30AAA}"/>
+              </a:ext>
+            </a:extLst>
+          </p:cNvPr>
+          <p:cNvSpPr/>
+          <p:nvPr/>
+        </p:nvSpPr>
+        <p:spPr>
+          <a:xfrm>
+            <a:off x="347472" y="1895831"/>
+            <a:ext cx="164592" cy="164592"/>
+          </a:xfrm>
+          <a:prstGeom prst="ellipse">
+            <a:avLst/>
+          </a:prstGeom>
+          <a:solidFill>
+            <a:srgbClr val="2D6247"/>
+          </a:solidFill>
+          <a:ln w="12700">
+            <a:solidFill>
+              <a:srgbClr val="2D6247"/>
+            </a:solidFill>
+            <a:prstDash val="solid"/>
+          </a:ln>
+        </p:spPr>
+        <p:txBody>
+          <a:bodyPr/>
+          <a:lstStyle/>
+          <a:p>
+            <a:endParaRPr lang="en-PH"/>
+          </a:p>
+        </p:txBody>
+      </p:sp>
+      <p:sp>
+        <p:nvSpPr>
+          <p:cNvPr id="120" name="Text 16">
+            <a:extLst>
+              <a:ext uri="{FF2B5EF4-FFF2-40B4-BE49-F238E27FC236}">
+                <a16:creationId xmlns:a16="http://schemas.microsoft.com/office/drawing/2014/main" id="{27B60542-7D0B-F18F-82C3-17A89CE54994}"/>
+              </a:ext>
+            </a:extLst>
+          </p:cNvPr>
+          <p:cNvSpPr/>
+          <p:nvPr/>
+        </p:nvSpPr>
+        <p:spPr>
+          <a:xfrm>
+            <a:off x="347472" y="1895831"/>
+            <a:ext cx="164592" cy="164592"/>
+          </a:xfrm>
+          <a:prstGeom prst="rect">
+            <a:avLst/>
+          </a:prstGeom>
+          <a:noFill/>
+          <a:ln/>
+        </p:spPr>
+        <p:txBody>
+          <a:bodyPr wrap="square" lIns="0" tIns="0" rIns="0" bIns="0" rtlCol="0" anchor="ctr"/>
+          <a:lstStyle/>
+          <a:p>
+            <a:pPr marL="0" indent="0" algn="ctr">
+              <a:buNone/>
+            </a:pPr>
+            <a:r>
+              <a:rPr lang="en-US" sz="700" b="1" dirty="0">
+                <a:solidFill>
+                  <a:srgbClr val="FFFFFF"/>
+                </a:solidFill>
+                <a:latin typeface="Calibri" pitchFamily="34" charset="0"/>
+                <a:ea typeface="Calibri" pitchFamily="34" charset="-122"/>
+                <a:cs typeface="Calibri" pitchFamily="34" charset="-120"/>
+              </a:rPr>
+              <a:t>1</a:t>
+            </a:r>
+            <a:endParaRPr lang="en-US" sz="700" dirty="0"/>
+          </a:p>
+        </p:txBody>
+      </p:sp>
+      <p:sp>
+        <p:nvSpPr>
+          <p:cNvPr id="121" name="Text 17">
+            <a:extLst>
+              <a:ext uri="{FF2B5EF4-FFF2-40B4-BE49-F238E27FC236}">
+                <a16:creationId xmlns:a16="http://schemas.microsoft.com/office/drawing/2014/main" id="{E547B2A8-11B7-0159-DA06-A62DE44454F2}"/>
+              </a:ext>
+            </a:extLst>
+          </p:cNvPr>
+          <p:cNvSpPr/>
+          <p:nvPr/>
+        </p:nvSpPr>
+        <p:spPr>
+          <a:xfrm>
+            <a:off x="585216" y="1854683"/>
+            <a:ext cx="8961120" cy="246888"/>
+          </a:xfrm>
+          <a:prstGeom prst="rect">
+            <a:avLst/>
+          </a:prstGeom>
+          <a:noFill/>
+          <a:ln/>
+        </p:spPr>
+        <p:txBody>
+          <a:bodyPr wrap="square" lIns="0" tIns="0" rIns="0" bIns="0" rtlCol="0" anchor="ctr"/>
+          <a:lstStyle/>
+          <a:p>
+            <a:pPr marL="0" indent="0">
+              <a:buNone/>
+            </a:pPr>
+            <a:r>
+              <a:rPr lang="en-US" sz="950" b="1" dirty="0">
+                <a:solidFill>
+                  <a:srgbClr val="111111"/>
+                </a:solidFill>
+                <a:latin typeface="Calibri" pitchFamily="34" charset="0"/>
+                <a:ea typeface="Calibri" pitchFamily="34" charset="-122"/>
+                <a:cs typeface="Calibri" pitchFamily="34" charset="-120"/>
+              </a:rPr>
+              <a:t>Environment Setup for FRONTEND</a:t>
+            </a:r>
+            <a:endParaRPr lang="en-US" sz="950" dirty="0"/>
+          </a:p>
+        </p:txBody>
+      </p:sp>
+      <p:sp>
+        <p:nvSpPr>
+          <p:cNvPr id="122" name="Text 18">
+            <a:extLst>
+              <a:ext uri="{FF2B5EF4-FFF2-40B4-BE49-F238E27FC236}">
+                <a16:creationId xmlns:a16="http://schemas.microsoft.com/office/drawing/2014/main" id="{F4B73B3C-F99B-E9C8-DF1B-FA748E36B283}"/>
+              </a:ext>
+            </a:extLst>
+          </p:cNvPr>
+          <p:cNvSpPr/>
+          <p:nvPr/>
+        </p:nvSpPr>
+        <p:spPr>
+          <a:xfrm>
+            <a:off x="9619488" y="1854683"/>
+            <a:ext cx="2011680" cy="246888"/>
+          </a:xfrm>
+          <a:prstGeom prst="rect">
+            <a:avLst/>
+          </a:prstGeom>
+          <a:noFill/>
+          <a:ln/>
+        </p:spPr>
+        <p:txBody>
+          <a:bodyPr wrap="square" lIns="0" tIns="0" rIns="0" bIns="0" rtlCol="0" anchor="ctr"/>
+          <a:lstStyle/>
+          <a:p>
+            <a:pPr marL="0" indent="0" algn="r">
+              <a:buNone/>
+            </a:pPr>
+            <a:r>
+              <a:rPr lang="en-US" sz="900" b="1" dirty="0">
+                <a:solidFill>
+                  <a:srgbClr val="2D6247"/>
+                </a:solidFill>
+                <a:latin typeface="Calibri" pitchFamily="34" charset="0"/>
+                <a:ea typeface="Calibri" pitchFamily="34" charset="-122"/>
+                <a:cs typeface="Calibri" pitchFamily="34" charset="-120"/>
+              </a:rPr>
+              <a:t>~20 min</a:t>
+            </a:r>
+            <a:endParaRPr lang="en-US" sz="900" dirty="0"/>
+          </a:p>
+        </p:txBody>
+      </p:sp>
+      <p:sp>
+        <p:nvSpPr>
+          <p:cNvPr id="123" name="Shape 19">
+            <a:extLst>
+              <a:ext uri="{FF2B5EF4-FFF2-40B4-BE49-F238E27FC236}">
+                <a16:creationId xmlns:a16="http://schemas.microsoft.com/office/drawing/2014/main" id="{A360DD93-0B10-67A6-3168-C81BCD778536}"/>
+              </a:ext>
+            </a:extLst>
+          </p:cNvPr>
+          <p:cNvSpPr/>
+          <p:nvPr/>
+        </p:nvSpPr>
+        <p:spPr>
+          <a:xfrm>
+            <a:off x="246888" y="2101571"/>
+            <a:ext cx="11521440" cy="196596"/>
+          </a:xfrm>
+          <a:prstGeom prst="rect">
+            <a:avLst/>
+          </a:prstGeom>
+          <a:solidFill>
+            <a:srgbClr val="FFFFFF"/>
+          </a:solidFill>
+          <a:ln w="6350">
+            <a:solidFill>
+              <a:srgbClr val="E8E8E8"/>
+            </a:solidFill>
+            <a:prstDash val="solid"/>
+          </a:ln>
+        </p:spPr>
+        <p:txBody>
+          <a:bodyPr/>
+          <a:lstStyle/>
+          <a:p>
+            <a:endParaRPr lang="en-PH"/>
+          </a:p>
+        </p:txBody>
+      </p:sp>
+      <p:sp>
+        <p:nvSpPr>
+          <p:cNvPr id="124" name="Shape 20">
+            <a:extLst>
+              <a:ext uri="{FF2B5EF4-FFF2-40B4-BE49-F238E27FC236}">
+                <a16:creationId xmlns:a16="http://schemas.microsoft.com/office/drawing/2014/main" id="{638B9E27-E4C0-3A31-4809-7608DBE9CA2D}"/>
+              </a:ext>
+            </a:extLst>
+          </p:cNvPr>
+          <p:cNvSpPr/>
+          <p:nvPr/>
+        </p:nvSpPr>
+        <p:spPr>
+          <a:xfrm>
+            <a:off x="694944" y="2166036"/>
+            <a:ext cx="67666" cy="67666"/>
+          </a:xfrm>
+          <a:prstGeom prst="ellipse">
+            <a:avLst/>
+          </a:prstGeom>
+          <a:solidFill>
+            <a:srgbClr val="4CAF82"/>
+          </a:solidFill>
+          <a:ln w="12700">
+            <a:solidFill>
+              <a:srgbClr val="4CAF82"/>
+            </a:solidFill>
+            <a:prstDash val="solid"/>
+          </a:ln>
+        </p:spPr>
+        <p:txBody>
+          <a:bodyPr/>
+          <a:lstStyle/>
+          <a:p>
+            <a:endParaRPr lang="en-PH"/>
+          </a:p>
+        </p:txBody>
+      </p:sp>
+      <p:sp>
+        <p:nvSpPr>
+          <p:cNvPr id="125" name="Text 21">
+            <a:extLst>
+              <a:ext uri="{FF2B5EF4-FFF2-40B4-BE49-F238E27FC236}">
+                <a16:creationId xmlns:a16="http://schemas.microsoft.com/office/drawing/2014/main" id="{799E2CC2-36E2-FCB2-752B-C0A5CE80ACFF}"/>
+              </a:ext>
+            </a:extLst>
+          </p:cNvPr>
+          <p:cNvSpPr/>
+          <p:nvPr/>
+        </p:nvSpPr>
+        <p:spPr>
+          <a:xfrm>
+            <a:off x="822960" y="2101571"/>
+            <a:ext cx="10424160" cy="196596"/>
+          </a:xfrm>
+          <a:prstGeom prst="rect">
+            <a:avLst/>
+          </a:prstGeom>
+          <a:noFill/>
+          <a:ln/>
+        </p:spPr>
+        <p:txBody>
+          <a:bodyPr wrap="square" lIns="0" tIns="0" rIns="0" bIns="0" rtlCol="0" anchor="ctr"/>
+          <a:lstStyle/>
+          <a:p>
+            <a:pPr marL="0" indent="0">
+              <a:buNone/>
+            </a:pPr>
+            <a:r>
+              <a:rPr lang="en-US" sz="850" i="1" dirty="0">
+                <a:solidFill>
+                  <a:srgbClr val="333333"/>
+                </a:solidFill>
+                <a:latin typeface="Calibri" pitchFamily="34" charset="0"/>
+                <a:ea typeface="Calibri" pitchFamily="34" charset="-122"/>
+                <a:cs typeface="Calibri" pitchFamily="34" charset="-120"/>
+              </a:rPr>
+              <a:t>Installation of Node JS &amp; Node Package Manager (NPM)</a:t>
+            </a:r>
+            <a:endParaRPr lang="en-US" sz="850" dirty="0"/>
+          </a:p>
+        </p:txBody>
+      </p:sp>
+      <p:sp>
+        <p:nvSpPr>
+          <p:cNvPr id="126" name="Shape 22">
+            <a:extLst>
+              <a:ext uri="{FF2B5EF4-FFF2-40B4-BE49-F238E27FC236}">
+                <a16:creationId xmlns:a16="http://schemas.microsoft.com/office/drawing/2014/main" id="{BB4310F9-6E40-EC15-1137-A899BD15205E}"/>
+              </a:ext>
+            </a:extLst>
+          </p:cNvPr>
+          <p:cNvSpPr/>
+          <p:nvPr/>
+        </p:nvSpPr>
+        <p:spPr>
+          <a:xfrm>
+            <a:off x="246888" y="2298167"/>
+            <a:ext cx="11521440" cy="196596"/>
+          </a:xfrm>
+          <a:prstGeom prst="rect">
+            <a:avLst/>
+          </a:prstGeom>
+          <a:solidFill>
+            <a:srgbClr val="FAFAFA"/>
+          </a:solidFill>
+          <a:ln w="6350">
+            <a:solidFill>
+              <a:srgbClr val="E8E8E8"/>
+            </a:solidFill>
+            <a:prstDash val="solid"/>
+          </a:ln>
+        </p:spPr>
+        <p:txBody>
+          <a:bodyPr/>
+          <a:lstStyle/>
+          <a:p>
+            <a:endParaRPr lang="en-PH"/>
+          </a:p>
+        </p:txBody>
+      </p:sp>
+      <p:sp>
+        <p:nvSpPr>
+          <p:cNvPr id="127" name="Shape 23">
+            <a:extLst>
+              <a:ext uri="{FF2B5EF4-FFF2-40B4-BE49-F238E27FC236}">
+                <a16:creationId xmlns:a16="http://schemas.microsoft.com/office/drawing/2014/main" id="{97A81F81-AFA0-9E29-9855-8BB7E9BF7BD7}"/>
+              </a:ext>
+            </a:extLst>
+          </p:cNvPr>
+          <p:cNvSpPr/>
+          <p:nvPr/>
+        </p:nvSpPr>
+        <p:spPr>
+          <a:xfrm>
+            <a:off x="694944" y="2362632"/>
+            <a:ext cx="67666" cy="67666"/>
+          </a:xfrm>
+          <a:prstGeom prst="ellipse">
+            <a:avLst/>
+          </a:prstGeom>
+          <a:solidFill>
+            <a:srgbClr val="4CAF82"/>
+          </a:solidFill>
+          <a:ln w="12700">
+            <a:solidFill>
+              <a:srgbClr val="4CAF82"/>
+            </a:solidFill>
+            <a:prstDash val="solid"/>
+          </a:ln>
+        </p:spPr>
+        <p:txBody>
+          <a:bodyPr/>
+          <a:lstStyle/>
+          <a:p>
+            <a:endParaRPr lang="en-PH"/>
+          </a:p>
+        </p:txBody>
+      </p:sp>
+      <p:sp>
+        <p:nvSpPr>
+          <p:cNvPr id="128" name="Text 24">
+            <a:extLst>
+              <a:ext uri="{FF2B5EF4-FFF2-40B4-BE49-F238E27FC236}">
+                <a16:creationId xmlns:a16="http://schemas.microsoft.com/office/drawing/2014/main" id="{EC4931EC-DB00-804B-F20C-FEBA594E689F}"/>
+              </a:ext>
+            </a:extLst>
+          </p:cNvPr>
+          <p:cNvSpPr/>
+          <p:nvPr/>
+        </p:nvSpPr>
+        <p:spPr>
+          <a:xfrm>
+            <a:off x="822960" y="2298167"/>
+            <a:ext cx="10424160" cy="196596"/>
+          </a:xfrm>
+          <a:prstGeom prst="rect">
+            <a:avLst/>
+          </a:prstGeom>
+          <a:noFill/>
+          <a:ln/>
+        </p:spPr>
+        <p:txBody>
+          <a:bodyPr wrap="square" lIns="0" tIns="0" rIns="0" bIns="0" rtlCol="0" anchor="ctr"/>
+          <a:lstStyle/>
+          <a:p>
+            <a:pPr marL="0" indent="0">
+              <a:buNone/>
+            </a:pPr>
+            <a:r>
+              <a:rPr lang="en-US" sz="850" i="1" dirty="0">
+                <a:solidFill>
+                  <a:srgbClr val="333333"/>
+                </a:solidFill>
+                <a:latin typeface="Calibri" pitchFamily="34" charset="0"/>
+                <a:ea typeface="Calibri" pitchFamily="34" charset="-122"/>
+                <a:cs typeface="Calibri" pitchFamily="34" charset="-120"/>
+              </a:rPr>
+              <a:t>React App Creation (using Vite)</a:t>
+            </a:r>
+            <a:endParaRPr lang="en-US" sz="850" dirty="0"/>
+          </a:p>
+        </p:txBody>
+      </p:sp>
+      <p:sp>
+        <p:nvSpPr>
+          <p:cNvPr id="129" name="Shape 25">
+            <a:extLst>
+              <a:ext uri="{FF2B5EF4-FFF2-40B4-BE49-F238E27FC236}">
+                <a16:creationId xmlns:a16="http://schemas.microsoft.com/office/drawing/2014/main" id="{5BC21FB3-EC7C-B083-F8F6-D3D4246A7565}"/>
+              </a:ext>
+            </a:extLst>
+          </p:cNvPr>
+          <p:cNvSpPr/>
+          <p:nvPr/>
+        </p:nvSpPr>
+        <p:spPr>
+          <a:xfrm>
+            <a:off x="246888" y="2494763"/>
+            <a:ext cx="11521440" cy="246888"/>
+          </a:xfrm>
+          <a:prstGeom prst="rect">
+            <a:avLst/>
+          </a:prstGeom>
+          <a:solidFill>
+            <a:srgbClr val="EAF0EA"/>
+          </a:solidFill>
+          <a:ln w="6350">
+            <a:solidFill>
+              <a:srgbClr val="E8E8E8"/>
+            </a:solidFill>
+            <a:prstDash val="solid"/>
+          </a:ln>
+        </p:spPr>
+        <p:txBody>
+          <a:bodyPr/>
+          <a:lstStyle/>
+          <a:p>
+            <a:endParaRPr lang="en-PH"/>
+          </a:p>
+        </p:txBody>
+      </p:sp>
+      <p:sp>
+        <p:nvSpPr>
+          <p:cNvPr id="130" name="Shape 26">
+            <a:extLst>
+              <a:ext uri="{FF2B5EF4-FFF2-40B4-BE49-F238E27FC236}">
+                <a16:creationId xmlns:a16="http://schemas.microsoft.com/office/drawing/2014/main" id="{00D3107C-AB76-AB52-2187-B9FEB238DAE5}"/>
+              </a:ext>
+            </a:extLst>
+          </p:cNvPr>
+          <p:cNvSpPr/>
+          <p:nvPr/>
+        </p:nvSpPr>
+        <p:spPr>
+          <a:xfrm>
+            <a:off x="347472" y="2535911"/>
+            <a:ext cx="164592" cy="164592"/>
+          </a:xfrm>
+          <a:prstGeom prst="ellipse">
+            <a:avLst/>
+          </a:prstGeom>
+          <a:solidFill>
+            <a:srgbClr val="2D6247"/>
+          </a:solidFill>
+          <a:ln w="12700">
+            <a:solidFill>
+              <a:srgbClr val="2D6247"/>
+            </a:solidFill>
+            <a:prstDash val="solid"/>
+          </a:ln>
+        </p:spPr>
+        <p:txBody>
+          <a:bodyPr/>
+          <a:lstStyle/>
+          <a:p>
+            <a:endParaRPr lang="en-PH"/>
+          </a:p>
+        </p:txBody>
+      </p:sp>
+      <p:sp>
+        <p:nvSpPr>
+          <p:cNvPr id="131" name="Text 27">
+            <a:extLst>
+              <a:ext uri="{FF2B5EF4-FFF2-40B4-BE49-F238E27FC236}">
+                <a16:creationId xmlns:a16="http://schemas.microsoft.com/office/drawing/2014/main" id="{694DCFF7-1C90-7840-4F60-CD22787738CE}"/>
+              </a:ext>
+            </a:extLst>
+          </p:cNvPr>
+          <p:cNvSpPr/>
+          <p:nvPr/>
+        </p:nvSpPr>
+        <p:spPr>
+          <a:xfrm>
+            <a:off x="347472" y="2535911"/>
+            <a:ext cx="164592" cy="164592"/>
+          </a:xfrm>
+          <a:prstGeom prst="rect">
+            <a:avLst/>
+          </a:prstGeom>
+          <a:noFill/>
+          <a:ln/>
+        </p:spPr>
+        <p:txBody>
+          <a:bodyPr wrap="square" lIns="0" tIns="0" rIns="0" bIns="0" rtlCol="0" anchor="ctr"/>
+          <a:lstStyle/>
+          <a:p>
+            <a:pPr marL="0" indent="0" algn="ctr">
+              <a:buNone/>
+            </a:pPr>
+            <a:r>
+              <a:rPr lang="en-US" sz="700" b="1" dirty="0">
+                <a:solidFill>
+                  <a:srgbClr val="FFFFFF"/>
+                </a:solidFill>
+                <a:latin typeface="Calibri" pitchFamily="34" charset="0"/>
+                <a:ea typeface="Calibri" pitchFamily="34" charset="-122"/>
+                <a:cs typeface="Calibri" pitchFamily="34" charset="-120"/>
+              </a:rPr>
+              <a:t>2</a:t>
+            </a:r>
+            <a:endParaRPr lang="en-US" sz="700" dirty="0"/>
+          </a:p>
+        </p:txBody>
+      </p:sp>
+      <p:sp>
+        <p:nvSpPr>
+          <p:cNvPr id="132" name="Text 28">
+            <a:extLst>
+              <a:ext uri="{FF2B5EF4-FFF2-40B4-BE49-F238E27FC236}">
+                <a16:creationId xmlns:a16="http://schemas.microsoft.com/office/drawing/2014/main" id="{885FFB1E-CABA-71A6-567E-9EB53A8A2D50}"/>
+              </a:ext>
+            </a:extLst>
+          </p:cNvPr>
+          <p:cNvSpPr/>
+          <p:nvPr/>
+        </p:nvSpPr>
+        <p:spPr>
+          <a:xfrm>
+            <a:off x="585216" y="2494763"/>
+            <a:ext cx="8961120" cy="246888"/>
+          </a:xfrm>
+          <a:prstGeom prst="rect">
+            <a:avLst/>
+          </a:prstGeom>
+          <a:noFill/>
+          <a:ln/>
+        </p:spPr>
+        <p:txBody>
+          <a:bodyPr wrap="square" lIns="0" tIns="0" rIns="0" bIns="0" rtlCol="0" anchor="ctr"/>
+          <a:lstStyle/>
+          <a:p>
+            <a:pPr marL="0" indent="0">
+              <a:buNone/>
+            </a:pPr>
+            <a:r>
+              <a:rPr lang="en-US" sz="950" b="1" dirty="0">
+                <a:solidFill>
+                  <a:srgbClr val="111111"/>
+                </a:solidFill>
+                <a:latin typeface="Calibri" pitchFamily="34" charset="0"/>
+                <a:ea typeface="Calibri" pitchFamily="34" charset="-122"/>
+                <a:cs typeface="Calibri" pitchFamily="34" charset="-120"/>
+              </a:rPr>
+              <a:t>Introduction to React</a:t>
+            </a:r>
+            <a:endParaRPr lang="en-US" sz="950" dirty="0"/>
+          </a:p>
+        </p:txBody>
+      </p:sp>
+      <p:sp>
+        <p:nvSpPr>
+          <p:cNvPr id="133" name="Text 29">
+            <a:extLst>
+              <a:ext uri="{FF2B5EF4-FFF2-40B4-BE49-F238E27FC236}">
+                <a16:creationId xmlns:a16="http://schemas.microsoft.com/office/drawing/2014/main" id="{4ACBE694-4DAF-CE19-13F5-D80C30F53441}"/>
+              </a:ext>
+            </a:extLst>
+          </p:cNvPr>
+          <p:cNvSpPr/>
+          <p:nvPr/>
+        </p:nvSpPr>
+        <p:spPr>
+          <a:xfrm>
+            <a:off x="9619488" y="2494763"/>
+            <a:ext cx="2011680" cy="246888"/>
+          </a:xfrm>
+          <a:prstGeom prst="rect">
+            <a:avLst/>
+          </a:prstGeom>
+          <a:noFill/>
+          <a:ln/>
+        </p:spPr>
+        <p:txBody>
+          <a:bodyPr wrap="square" lIns="0" tIns="0" rIns="0" bIns="0" rtlCol="0" anchor="ctr"/>
+          <a:lstStyle/>
+          <a:p>
+            <a:pPr marL="0" indent="0" algn="r">
+              <a:buNone/>
+            </a:pPr>
+            <a:r>
+              <a:rPr lang="en-US" sz="900" b="1" dirty="0">
+                <a:solidFill>
+                  <a:srgbClr val="2D6247"/>
+                </a:solidFill>
+                <a:latin typeface="Calibri" pitchFamily="34" charset="0"/>
+                <a:ea typeface="Calibri" pitchFamily="34" charset="-122"/>
+                <a:cs typeface="Calibri" pitchFamily="34" charset="-120"/>
+              </a:rPr>
+              <a:t>~25 min</a:t>
+            </a:r>
+            <a:endParaRPr lang="en-US" sz="900" dirty="0"/>
+          </a:p>
+        </p:txBody>
+      </p:sp>
+      <p:sp>
+        <p:nvSpPr>
+          <p:cNvPr id="134" name="Shape 30">
+            <a:extLst>
+              <a:ext uri="{FF2B5EF4-FFF2-40B4-BE49-F238E27FC236}">
+                <a16:creationId xmlns:a16="http://schemas.microsoft.com/office/drawing/2014/main" id="{3FE9951A-7537-446F-0B53-A92F7357A222}"/>
+              </a:ext>
+            </a:extLst>
+          </p:cNvPr>
+          <p:cNvSpPr/>
+          <p:nvPr/>
+        </p:nvSpPr>
+        <p:spPr>
+          <a:xfrm>
+            <a:off x="246888" y="2741651"/>
+            <a:ext cx="11521440" cy="219456"/>
+          </a:xfrm>
+          <a:prstGeom prst="rect">
+            <a:avLst/>
+          </a:prstGeom>
+          <a:solidFill>
+            <a:srgbClr val="F8FAF8"/>
+          </a:solidFill>
+          <a:ln w="6350">
+            <a:solidFill>
+              <a:srgbClr val="E8E8E8"/>
+            </a:solidFill>
+            <a:prstDash val="solid"/>
+          </a:ln>
+        </p:spPr>
+        <p:txBody>
+          <a:bodyPr/>
+          <a:lstStyle/>
+          <a:p>
+            <a:endParaRPr lang="en-PH"/>
+          </a:p>
+        </p:txBody>
+      </p:sp>
+      <p:sp>
+        <p:nvSpPr>
+          <p:cNvPr id="135" name="Shape 31">
+            <a:extLst>
+              <a:ext uri="{FF2B5EF4-FFF2-40B4-BE49-F238E27FC236}">
+                <a16:creationId xmlns:a16="http://schemas.microsoft.com/office/drawing/2014/main" id="{7E75E9DB-7D1B-9C05-B53F-B3B056B7A1B9}"/>
+              </a:ext>
+            </a:extLst>
+          </p:cNvPr>
+          <p:cNvSpPr/>
+          <p:nvPr/>
+        </p:nvSpPr>
+        <p:spPr>
+          <a:xfrm>
+            <a:off x="603504" y="2814803"/>
+            <a:ext cx="91440" cy="64008"/>
+          </a:xfrm>
+          <a:prstGeom prst="rect">
+            <a:avLst/>
+          </a:prstGeom>
+          <a:solidFill>
+            <a:srgbClr val="4CAF82"/>
+          </a:solidFill>
+          <a:ln w="12700">
+            <a:solidFill>
+              <a:srgbClr val="4CAF82"/>
+            </a:solidFill>
+            <a:prstDash val="solid"/>
+          </a:ln>
+        </p:spPr>
+        <p:txBody>
+          <a:bodyPr/>
+          <a:lstStyle/>
+          <a:p>
+            <a:endParaRPr lang="en-PH"/>
+          </a:p>
+        </p:txBody>
+      </p:sp>
+      <p:sp>
+        <p:nvSpPr>
+          <p:cNvPr id="136" name="Text 32">
+            <a:extLst>
+              <a:ext uri="{FF2B5EF4-FFF2-40B4-BE49-F238E27FC236}">
+                <a16:creationId xmlns:a16="http://schemas.microsoft.com/office/drawing/2014/main" id="{2A977AFC-D9F7-99A6-43EA-C52393994F5C}"/>
+              </a:ext>
+            </a:extLst>
+          </p:cNvPr>
+          <p:cNvSpPr/>
+          <p:nvPr/>
+        </p:nvSpPr>
+        <p:spPr>
+          <a:xfrm>
+            <a:off x="749808" y="2741651"/>
+            <a:ext cx="10515600" cy="219456"/>
+          </a:xfrm>
+          <a:prstGeom prst="rect">
+            <a:avLst/>
+          </a:prstGeom>
+          <a:noFill/>
+          <a:ln/>
+        </p:spPr>
+        <p:txBody>
+          <a:bodyPr wrap="square" lIns="0" tIns="0" rIns="0" bIns="0" rtlCol="0" anchor="ctr"/>
+          <a:lstStyle/>
+          <a:p>
+            <a:pPr marL="0" indent="0">
+              <a:buNone/>
+            </a:pPr>
+            <a:r>
+              <a:rPr lang="en-US" sz="900" b="1" i="1" dirty="0">
+                <a:solidFill>
+                  <a:srgbClr val="1A1A1A"/>
+                </a:solidFill>
+                <a:latin typeface="Calibri" pitchFamily="34" charset="0"/>
+                <a:ea typeface="Calibri" pitchFamily="34" charset="-122"/>
+                <a:cs typeface="Calibri" pitchFamily="34" charset="-120"/>
+              </a:rPr>
+              <a:t>Project Structure</a:t>
+            </a:r>
+            <a:endParaRPr lang="en-US" sz="900" dirty="0"/>
+          </a:p>
+        </p:txBody>
+      </p:sp>
+      <p:sp>
+        <p:nvSpPr>
+          <p:cNvPr id="137" name="Shape 33">
+            <a:extLst>
+              <a:ext uri="{FF2B5EF4-FFF2-40B4-BE49-F238E27FC236}">
+                <a16:creationId xmlns:a16="http://schemas.microsoft.com/office/drawing/2014/main" id="{3AC4B0B7-662D-4736-691E-BD692B4DD3E3}"/>
+              </a:ext>
+            </a:extLst>
+          </p:cNvPr>
+          <p:cNvSpPr/>
+          <p:nvPr/>
+        </p:nvSpPr>
+        <p:spPr>
+          <a:xfrm>
+            <a:off x="246888" y="2961107"/>
+            <a:ext cx="11521440" cy="196596"/>
+          </a:xfrm>
+          <a:prstGeom prst="rect">
+            <a:avLst/>
+          </a:prstGeom>
+          <a:solidFill>
+            <a:srgbClr val="FDFDFD"/>
+          </a:solidFill>
+          <a:ln w="6350">
+            <a:solidFill>
+              <a:srgbClr val="E8E8E8"/>
+            </a:solidFill>
+            <a:prstDash val="solid"/>
+          </a:ln>
+        </p:spPr>
+        <p:txBody>
+          <a:bodyPr/>
+          <a:lstStyle/>
+          <a:p>
+            <a:endParaRPr lang="en-PH"/>
+          </a:p>
+        </p:txBody>
+      </p:sp>
+      <p:sp>
+        <p:nvSpPr>
+          <p:cNvPr id="138" name="Shape 34">
+            <a:extLst>
+              <a:ext uri="{FF2B5EF4-FFF2-40B4-BE49-F238E27FC236}">
+                <a16:creationId xmlns:a16="http://schemas.microsoft.com/office/drawing/2014/main" id="{6B724C4F-0CFD-89BD-8969-643B4BA3E317}"/>
+              </a:ext>
+            </a:extLst>
+          </p:cNvPr>
+          <p:cNvSpPr/>
+          <p:nvPr/>
+        </p:nvSpPr>
+        <p:spPr>
+          <a:xfrm>
+            <a:off x="969264" y="3031973"/>
+            <a:ext cx="54864" cy="54864"/>
+          </a:xfrm>
+          <a:prstGeom prst="rect">
+            <a:avLst/>
+          </a:prstGeom>
+          <a:solidFill>
+            <a:srgbClr val="BBBBBB"/>
+          </a:solidFill>
+          <a:ln w="12700">
+            <a:solidFill>
+              <a:srgbClr val="BBBBBB"/>
+            </a:solidFill>
+            <a:prstDash val="solid"/>
+          </a:ln>
+        </p:spPr>
+        <p:txBody>
+          <a:bodyPr/>
+          <a:lstStyle/>
+          <a:p>
+            <a:endParaRPr lang="en-PH"/>
+          </a:p>
+        </p:txBody>
+      </p:sp>
+      <p:sp>
+        <p:nvSpPr>
+          <p:cNvPr id="139" name="Text 35">
+            <a:extLst>
+              <a:ext uri="{FF2B5EF4-FFF2-40B4-BE49-F238E27FC236}">
+                <a16:creationId xmlns:a16="http://schemas.microsoft.com/office/drawing/2014/main" id="{78F9CC6A-83EF-9AFC-8FE7-6AD2E3678FEF}"/>
+              </a:ext>
+            </a:extLst>
+          </p:cNvPr>
+          <p:cNvSpPr/>
+          <p:nvPr/>
+        </p:nvSpPr>
+        <p:spPr>
+          <a:xfrm>
+            <a:off x="1078992" y="2961107"/>
+            <a:ext cx="10149840" cy="196596"/>
+          </a:xfrm>
+          <a:prstGeom prst="rect">
+            <a:avLst/>
+          </a:prstGeom>
+          <a:noFill/>
+          <a:ln/>
+        </p:spPr>
+        <p:txBody>
+          <a:bodyPr wrap="square" lIns="0" tIns="0" rIns="0" bIns="0" rtlCol="0" anchor="ctr"/>
+          <a:lstStyle/>
+          <a:p>
+            <a:pPr marL="0" indent="0">
+              <a:buNone/>
+            </a:pPr>
+            <a:r>
+              <a:rPr lang="en-US" sz="800" i="1" dirty="0">
+                <a:solidFill>
+                  <a:srgbClr val="555555"/>
+                </a:solidFill>
+                <a:latin typeface="Calibri" pitchFamily="34" charset="0"/>
+                <a:ea typeface="Calibri" pitchFamily="34" charset="-122"/>
+                <a:cs typeface="Calibri" pitchFamily="34" charset="-120"/>
+              </a:rPr>
+              <a:t>Tour of the different files &amp; folders</a:t>
+            </a:r>
+            <a:endParaRPr lang="en-US" sz="800" dirty="0"/>
+          </a:p>
+        </p:txBody>
+      </p:sp>
+      <p:sp>
+        <p:nvSpPr>
+          <p:cNvPr id="140" name="Shape 36">
+            <a:extLst>
+              <a:ext uri="{FF2B5EF4-FFF2-40B4-BE49-F238E27FC236}">
+                <a16:creationId xmlns:a16="http://schemas.microsoft.com/office/drawing/2014/main" id="{F01F0170-F239-8707-AFE6-6C787AF68139}"/>
+              </a:ext>
+            </a:extLst>
+          </p:cNvPr>
+          <p:cNvSpPr/>
+          <p:nvPr/>
+        </p:nvSpPr>
+        <p:spPr>
+          <a:xfrm>
+            <a:off x="246888" y="3157703"/>
+            <a:ext cx="11521440" cy="196596"/>
+          </a:xfrm>
+          <a:prstGeom prst="rect">
+            <a:avLst/>
+          </a:prstGeom>
+          <a:solidFill>
+            <a:srgbClr val="F9F9F9"/>
+          </a:solidFill>
+          <a:ln w="6350">
+            <a:solidFill>
+              <a:srgbClr val="E8E8E8"/>
+            </a:solidFill>
+            <a:prstDash val="solid"/>
+          </a:ln>
+        </p:spPr>
+        <p:txBody>
+          <a:bodyPr/>
+          <a:lstStyle/>
+          <a:p>
+            <a:endParaRPr lang="en-PH"/>
+          </a:p>
+        </p:txBody>
+      </p:sp>
+      <p:sp>
+        <p:nvSpPr>
+          <p:cNvPr id="141" name="Shape 37">
+            <a:extLst>
+              <a:ext uri="{FF2B5EF4-FFF2-40B4-BE49-F238E27FC236}">
+                <a16:creationId xmlns:a16="http://schemas.microsoft.com/office/drawing/2014/main" id="{C490153E-D61F-054D-26AD-1EDCD1D44308}"/>
+              </a:ext>
+            </a:extLst>
+          </p:cNvPr>
+          <p:cNvSpPr/>
+          <p:nvPr/>
+        </p:nvSpPr>
+        <p:spPr>
+          <a:xfrm>
+            <a:off x="969264" y="3228569"/>
+            <a:ext cx="54864" cy="54864"/>
+          </a:xfrm>
+          <a:prstGeom prst="rect">
+            <a:avLst/>
+          </a:prstGeom>
+          <a:solidFill>
+            <a:srgbClr val="BBBBBB"/>
+          </a:solidFill>
+          <a:ln w="12700">
+            <a:solidFill>
+              <a:srgbClr val="BBBBBB"/>
+            </a:solidFill>
+            <a:prstDash val="solid"/>
+          </a:ln>
+        </p:spPr>
+        <p:txBody>
+          <a:bodyPr/>
+          <a:lstStyle/>
+          <a:p>
+            <a:endParaRPr lang="en-PH"/>
+          </a:p>
+        </p:txBody>
+      </p:sp>
+      <p:sp>
+        <p:nvSpPr>
+          <p:cNvPr id="142" name="Text 38">
+            <a:extLst>
+              <a:ext uri="{FF2B5EF4-FFF2-40B4-BE49-F238E27FC236}">
+                <a16:creationId xmlns:a16="http://schemas.microsoft.com/office/drawing/2014/main" id="{B61C4CC6-B09F-6D97-683B-4B74A62598EE}"/>
+              </a:ext>
+            </a:extLst>
+          </p:cNvPr>
+          <p:cNvSpPr/>
+          <p:nvPr/>
+        </p:nvSpPr>
+        <p:spPr>
+          <a:xfrm>
+            <a:off x="1078992" y="3157703"/>
+            <a:ext cx="10149840" cy="196596"/>
+          </a:xfrm>
+          <a:prstGeom prst="rect">
+            <a:avLst/>
+          </a:prstGeom>
+          <a:noFill/>
+          <a:ln/>
+        </p:spPr>
+        <p:txBody>
+          <a:bodyPr wrap="square" lIns="0" tIns="0" rIns="0" bIns="0" rtlCol="0" anchor="ctr"/>
+          <a:lstStyle/>
+          <a:p>
+            <a:pPr marL="0" indent="0">
+              <a:buNone/>
+            </a:pPr>
+            <a:r>
+              <a:rPr lang="en-US" sz="800" i="1" dirty="0">
+                <a:solidFill>
+                  <a:srgbClr val="555555"/>
+                </a:solidFill>
+                <a:latin typeface="Calibri" pitchFamily="34" charset="0"/>
+                <a:ea typeface="Calibri" pitchFamily="34" charset="-122"/>
+                <a:cs typeface="Calibri" pitchFamily="34" charset="-120"/>
+              </a:rPr>
+              <a:t>Folder Organization</a:t>
+            </a:r>
+            <a:endParaRPr lang="en-US" sz="800" dirty="0"/>
+          </a:p>
+        </p:txBody>
+      </p:sp>
+      <p:sp>
+        <p:nvSpPr>
+          <p:cNvPr id="143" name="Shape 39">
+            <a:extLst>
+              <a:ext uri="{FF2B5EF4-FFF2-40B4-BE49-F238E27FC236}">
+                <a16:creationId xmlns:a16="http://schemas.microsoft.com/office/drawing/2014/main" id="{F251EA50-6390-04C8-C7E4-6F752E9FECA8}"/>
+              </a:ext>
+            </a:extLst>
+          </p:cNvPr>
+          <p:cNvSpPr/>
+          <p:nvPr/>
+        </p:nvSpPr>
+        <p:spPr>
+          <a:xfrm>
+            <a:off x="246888" y="3354299"/>
+            <a:ext cx="11521440" cy="196596"/>
+          </a:xfrm>
+          <a:prstGeom prst="rect">
+            <a:avLst/>
+          </a:prstGeom>
+          <a:solidFill>
+            <a:srgbClr val="FDFDFD"/>
+          </a:solidFill>
+          <a:ln w="6350">
+            <a:solidFill>
+              <a:srgbClr val="E8E8E8"/>
+            </a:solidFill>
+            <a:prstDash val="solid"/>
+          </a:ln>
+        </p:spPr>
+        <p:txBody>
+          <a:bodyPr/>
+          <a:lstStyle/>
+          <a:p>
+            <a:endParaRPr lang="en-PH"/>
+          </a:p>
+        </p:txBody>
+      </p:sp>
+      <p:sp>
+        <p:nvSpPr>
+          <p:cNvPr id="144" name="Shape 40">
+            <a:extLst>
+              <a:ext uri="{FF2B5EF4-FFF2-40B4-BE49-F238E27FC236}">
+                <a16:creationId xmlns:a16="http://schemas.microsoft.com/office/drawing/2014/main" id="{129D0EF7-040E-9858-1B74-83D7DC1AD602}"/>
+              </a:ext>
+            </a:extLst>
+          </p:cNvPr>
+          <p:cNvSpPr/>
+          <p:nvPr/>
+        </p:nvSpPr>
+        <p:spPr>
+          <a:xfrm>
+            <a:off x="969264" y="3425165"/>
+            <a:ext cx="54864" cy="54864"/>
+          </a:xfrm>
+          <a:prstGeom prst="rect">
+            <a:avLst/>
+          </a:prstGeom>
+          <a:solidFill>
+            <a:srgbClr val="BBBBBB"/>
+          </a:solidFill>
+          <a:ln w="12700">
+            <a:solidFill>
+              <a:srgbClr val="BBBBBB"/>
+            </a:solidFill>
+            <a:prstDash val="solid"/>
+          </a:ln>
+        </p:spPr>
+        <p:txBody>
+          <a:bodyPr/>
+          <a:lstStyle/>
+          <a:p>
+            <a:endParaRPr lang="en-PH"/>
+          </a:p>
+        </p:txBody>
+      </p:sp>
+      <p:sp>
+        <p:nvSpPr>
+          <p:cNvPr id="145" name="Text 41">
+            <a:extLst>
+              <a:ext uri="{FF2B5EF4-FFF2-40B4-BE49-F238E27FC236}">
+                <a16:creationId xmlns:a16="http://schemas.microsoft.com/office/drawing/2014/main" id="{4AE56FA7-12C9-B559-8720-2A08ED03BEAE}"/>
+              </a:ext>
+            </a:extLst>
+          </p:cNvPr>
+          <p:cNvSpPr/>
+          <p:nvPr/>
+        </p:nvSpPr>
+        <p:spPr>
+          <a:xfrm>
+            <a:off x="1078992" y="3354299"/>
+            <a:ext cx="10149840" cy="196596"/>
+          </a:xfrm>
+          <a:prstGeom prst="rect">
+            <a:avLst/>
+          </a:prstGeom>
+          <a:noFill/>
+          <a:ln/>
+        </p:spPr>
+        <p:txBody>
+          <a:bodyPr wrap="square" lIns="0" tIns="0" rIns="0" bIns="0" rtlCol="0" anchor="ctr"/>
+          <a:lstStyle/>
+          <a:p>
+            <a:pPr marL="0" indent="0">
+              <a:buNone/>
+            </a:pPr>
+            <a:r>
+              <a:rPr lang="en-US" sz="800" i="1" dirty="0">
+                <a:solidFill>
+                  <a:srgbClr val="555555"/>
+                </a:solidFill>
+                <a:latin typeface="Calibri" pitchFamily="34" charset="0"/>
+                <a:ea typeface="Calibri" pitchFamily="34" charset="-122"/>
+                <a:cs typeface="Calibri" pitchFamily="34" charset="-120"/>
+              </a:rPr>
+              <a:t>Hands-on coding, basic syntax, JSX (TSX) overview</a:t>
+            </a:r>
+            <a:endParaRPr lang="en-US" sz="800" dirty="0"/>
+          </a:p>
+        </p:txBody>
+      </p:sp>
+      <p:sp>
+        <p:nvSpPr>
+          <p:cNvPr id="146" name="Shape 42">
+            <a:extLst>
+              <a:ext uri="{FF2B5EF4-FFF2-40B4-BE49-F238E27FC236}">
+                <a16:creationId xmlns:a16="http://schemas.microsoft.com/office/drawing/2014/main" id="{D999C842-BBEA-C143-A1B7-867958256C53}"/>
+              </a:ext>
+            </a:extLst>
+          </p:cNvPr>
+          <p:cNvSpPr/>
+          <p:nvPr/>
+        </p:nvSpPr>
+        <p:spPr>
+          <a:xfrm>
+            <a:off x="246888" y="3550895"/>
+            <a:ext cx="11521440" cy="246888"/>
+          </a:xfrm>
+          <a:prstGeom prst="rect">
+            <a:avLst/>
+          </a:prstGeom>
+          <a:solidFill>
+            <a:srgbClr val="EEF2EE"/>
+          </a:solidFill>
+          <a:ln w="6350">
+            <a:solidFill>
+              <a:srgbClr val="E8E8E8"/>
+            </a:solidFill>
+            <a:prstDash val="solid"/>
+          </a:ln>
+        </p:spPr>
+        <p:txBody>
+          <a:bodyPr/>
+          <a:lstStyle/>
+          <a:p>
+            <a:endParaRPr lang="en-PH"/>
+          </a:p>
+        </p:txBody>
+      </p:sp>
+      <p:sp>
+        <p:nvSpPr>
+          <p:cNvPr id="147" name="Shape 43">
+            <a:extLst>
+              <a:ext uri="{FF2B5EF4-FFF2-40B4-BE49-F238E27FC236}">
+                <a16:creationId xmlns:a16="http://schemas.microsoft.com/office/drawing/2014/main" id="{49CAAB2D-F099-5104-1A11-C6F60F58F5CD}"/>
+              </a:ext>
+            </a:extLst>
+          </p:cNvPr>
+          <p:cNvSpPr/>
+          <p:nvPr/>
+        </p:nvSpPr>
+        <p:spPr>
+          <a:xfrm>
+            <a:off x="347472" y="3592043"/>
+            <a:ext cx="164592" cy="164592"/>
+          </a:xfrm>
+          <a:prstGeom prst="ellipse">
+            <a:avLst/>
+          </a:prstGeom>
+          <a:solidFill>
+            <a:srgbClr val="2D6247"/>
+          </a:solidFill>
+          <a:ln w="12700">
+            <a:solidFill>
+              <a:srgbClr val="2D6247"/>
+            </a:solidFill>
+            <a:prstDash val="solid"/>
+          </a:ln>
+        </p:spPr>
+        <p:txBody>
+          <a:bodyPr/>
+          <a:lstStyle/>
+          <a:p>
+            <a:endParaRPr lang="en-PH"/>
+          </a:p>
+        </p:txBody>
+      </p:sp>
+      <p:sp>
+        <p:nvSpPr>
+          <p:cNvPr id="148" name="Text 44">
+            <a:extLst>
+              <a:ext uri="{FF2B5EF4-FFF2-40B4-BE49-F238E27FC236}">
+                <a16:creationId xmlns:a16="http://schemas.microsoft.com/office/drawing/2014/main" id="{D4E2AC54-649C-5724-8507-48E877541F7A}"/>
+              </a:ext>
+            </a:extLst>
+          </p:cNvPr>
+          <p:cNvSpPr/>
+          <p:nvPr/>
+        </p:nvSpPr>
+        <p:spPr>
+          <a:xfrm>
+            <a:off x="347472" y="3592043"/>
+            <a:ext cx="164592" cy="164592"/>
+          </a:xfrm>
+          <a:prstGeom prst="rect">
+            <a:avLst/>
+          </a:prstGeom>
+          <a:noFill/>
+          <a:ln/>
+        </p:spPr>
+        <p:txBody>
+          <a:bodyPr wrap="square" lIns="0" tIns="0" rIns="0" bIns="0" rtlCol="0" anchor="ctr"/>
+          <a:lstStyle/>
+          <a:p>
+            <a:pPr marL="0" indent="0" algn="ctr">
+              <a:buNone/>
+            </a:pPr>
+            <a:r>
+              <a:rPr lang="en-US" sz="700" b="1" dirty="0">
+                <a:solidFill>
+                  <a:srgbClr val="FFFFFF"/>
+                </a:solidFill>
+                <a:latin typeface="Calibri" pitchFamily="34" charset="0"/>
+                <a:ea typeface="Calibri" pitchFamily="34" charset="-122"/>
+                <a:cs typeface="Calibri" pitchFamily="34" charset="-120"/>
+              </a:rPr>
+              <a:t>3</a:t>
+            </a:r>
+            <a:endParaRPr lang="en-US" sz="700" dirty="0"/>
+          </a:p>
+        </p:txBody>
+      </p:sp>
+      <p:sp>
+        <p:nvSpPr>
+          <p:cNvPr id="149" name="Text 45">
+            <a:extLst>
+              <a:ext uri="{FF2B5EF4-FFF2-40B4-BE49-F238E27FC236}">
+                <a16:creationId xmlns:a16="http://schemas.microsoft.com/office/drawing/2014/main" id="{119E70EC-33B4-6376-2AF7-4DD0B7220E3A}"/>
+              </a:ext>
+            </a:extLst>
+          </p:cNvPr>
+          <p:cNvSpPr/>
+          <p:nvPr/>
+        </p:nvSpPr>
+        <p:spPr>
+          <a:xfrm>
+            <a:off x="585216" y="3550895"/>
+            <a:ext cx="8961120" cy="246888"/>
+          </a:xfrm>
+          <a:prstGeom prst="rect">
+            <a:avLst/>
+          </a:prstGeom>
+          <a:noFill/>
+          <a:ln/>
+        </p:spPr>
+        <p:txBody>
+          <a:bodyPr wrap="square" lIns="0" tIns="0" rIns="0" bIns="0" rtlCol="0" anchor="ctr"/>
+          <a:lstStyle/>
+          <a:p>
+            <a:pPr marL="0" indent="0">
+              <a:buNone/>
+            </a:pPr>
+            <a:r>
+              <a:rPr lang="en-US" sz="950" b="1" dirty="0">
+                <a:solidFill>
+                  <a:srgbClr val="111111"/>
+                </a:solidFill>
+                <a:latin typeface="Calibri" pitchFamily="34" charset="0"/>
+                <a:ea typeface="Calibri" pitchFamily="34" charset="-122"/>
+                <a:cs typeface="Calibri" pitchFamily="34" charset="-120"/>
+              </a:rPr>
+              <a:t>Understanding the Concept of Components</a:t>
+            </a:r>
+            <a:endParaRPr lang="en-US" sz="950" dirty="0"/>
+          </a:p>
+        </p:txBody>
+      </p:sp>
+      <p:sp>
+        <p:nvSpPr>
+          <p:cNvPr id="150" name="Text 46">
+            <a:extLst>
+              <a:ext uri="{FF2B5EF4-FFF2-40B4-BE49-F238E27FC236}">
+                <a16:creationId xmlns:a16="http://schemas.microsoft.com/office/drawing/2014/main" id="{5121AB65-B6CB-AD53-737B-59C27B60B63F}"/>
+              </a:ext>
+            </a:extLst>
+          </p:cNvPr>
+          <p:cNvSpPr/>
+          <p:nvPr/>
+        </p:nvSpPr>
+        <p:spPr>
+          <a:xfrm>
+            <a:off x="9619488" y="3550895"/>
+            <a:ext cx="2011680" cy="246888"/>
+          </a:xfrm>
+          <a:prstGeom prst="rect">
+            <a:avLst/>
+          </a:prstGeom>
+          <a:noFill/>
+          <a:ln/>
+        </p:spPr>
+        <p:txBody>
+          <a:bodyPr wrap="square" lIns="0" tIns="0" rIns="0" bIns="0" rtlCol="0" anchor="ctr"/>
+          <a:lstStyle/>
+          <a:p>
+            <a:pPr marL="0" indent="0" algn="r">
+              <a:buNone/>
+            </a:pPr>
+            <a:r>
+              <a:rPr lang="en-US" sz="900" b="1" dirty="0">
+                <a:solidFill>
+                  <a:srgbClr val="2D6247"/>
+                </a:solidFill>
+                <a:latin typeface="Calibri" pitchFamily="34" charset="0"/>
+                <a:ea typeface="Calibri" pitchFamily="34" charset="-122"/>
+                <a:cs typeface="Calibri" pitchFamily="34" charset="-120"/>
+              </a:rPr>
+              <a:t>~20 min</a:t>
+            </a:r>
+            <a:endParaRPr lang="en-US" sz="900" dirty="0"/>
+          </a:p>
+        </p:txBody>
+      </p:sp>
+      <p:sp>
+        <p:nvSpPr>
+          <p:cNvPr id="151" name="Shape 47">
+            <a:extLst>
+              <a:ext uri="{FF2B5EF4-FFF2-40B4-BE49-F238E27FC236}">
+                <a16:creationId xmlns:a16="http://schemas.microsoft.com/office/drawing/2014/main" id="{43FCB07F-388F-891B-411D-035FBC1F6983}"/>
+              </a:ext>
+            </a:extLst>
+          </p:cNvPr>
+          <p:cNvSpPr/>
+          <p:nvPr/>
+        </p:nvSpPr>
+        <p:spPr>
+          <a:xfrm>
+            <a:off x="246888" y="3797783"/>
+            <a:ext cx="11521440" cy="196596"/>
+          </a:xfrm>
+          <a:prstGeom prst="rect">
+            <a:avLst/>
+          </a:prstGeom>
+          <a:solidFill>
+            <a:srgbClr val="FFFFFF"/>
+          </a:solidFill>
+          <a:ln w="6350">
+            <a:solidFill>
+              <a:srgbClr val="E8E8E8"/>
+            </a:solidFill>
+            <a:prstDash val="solid"/>
+          </a:ln>
+        </p:spPr>
+        <p:txBody>
+          <a:bodyPr/>
+          <a:lstStyle/>
+          <a:p>
+            <a:endParaRPr lang="en-PH"/>
+          </a:p>
+        </p:txBody>
+      </p:sp>
+      <p:sp>
+        <p:nvSpPr>
+          <p:cNvPr id="152" name="Shape 48">
+            <a:extLst>
+              <a:ext uri="{FF2B5EF4-FFF2-40B4-BE49-F238E27FC236}">
+                <a16:creationId xmlns:a16="http://schemas.microsoft.com/office/drawing/2014/main" id="{D2522EA1-4B30-3448-E8E8-33EBC800AB83}"/>
+              </a:ext>
+            </a:extLst>
+          </p:cNvPr>
+          <p:cNvSpPr/>
+          <p:nvPr/>
+        </p:nvSpPr>
+        <p:spPr>
+          <a:xfrm>
+            <a:off x="694944" y="3862248"/>
+            <a:ext cx="67666" cy="67666"/>
+          </a:xfrm>
+          <a:prstGeom prst="ellipse">
+            <a:avLst/>
+          </a:prstGeom>
+          <a:solidFill>
+            <a:srgbClr val="4CAF82"/>
+          </a:solidFill>
+          <a:ln w="12700">
+            <a:solidFill>
+              <a:srgbClr val="4CAF82"/>
+            </a:solidFill>
+            <a:prstDash val="solid"/>
+          </a:ln>
+        </p:spPr>
+        <p:txBody>
+          <a:bodyPr/>
+          <a:lstStyle/>
+          <a:p>
+            <a:endParaRPr lang="en-PH"/>
+          </a:p>
+        </p:txBody>
+      </p:sp>
+      <p:sp>
+        <p:nvSpPr>
+          <p:cNvPr id="153" name="Text 49">
+            <a:extLst>
+              <a:ext uri="{FF2B5EF4-FFF2-40B4-BE49-F238E27FC236}">
+                <a16:creationId xmlns:a16="http://schemas.microsoft.com/office/drawing/2014/main" id="{628DEB3C-E63E-E9B7-41E4-A962D51B50F6}"/>
+              </a:ext>
+            </a:extLst>
+          </p:cNvPr>
+          <p:cNvSpPr/>
+          <p:nvPr/>
+        </p:nvSpPr>
+        <p:spPr>
+          <a:xfrm>
+            <a:off x="822960" y="3797783"/>
+            <a:ext cx="10424160" cy="196596"/>
+          </a:xfrm>
+          <a:prstGeom prst="rect">
+            <a:avLst/>
+          </a:prstGeom>
+          <a:noFill/>
+          <a:ln/>
+        </p:spPr>
+        <p:txBody>
+          <a:bodyPr wrap="square" lIns="0" tIns="0" rIns="0" bIns="0" rtlCol="0" anchor="ctr"/>
+          <a:lstStyle/>
+          <a:p>
+            <a:pPr marL="0" indent="0">
+              <a:buNone/>
+            </a:pPr>
+            <a:r>
+              <a:rPr lang="en-US" sz="850" i="1" dirty="0">
+                <a:solidFill>
+                  <a:srgbClr val="333333"/>
+                </a:solidFill>
+                <a:latin typeface="Calibri" pitchFamily="34" charset="0"/>
+                <a:ea typeface="Calibri" pitchFamily="34" charset="-122"/>
+                <a:cs typeface="Calibri" pitchFamily="34" charset="-120"/>
+              </a:rPr>
+              <a:t>How to create &amp; use components</a:t>
+            </a:r>
+            <a:endParaRPr lang="en-US" sz="850" dirty="0"/>
+          </a:p>
+        </p:txBody>
+      </p:sp>
+      <p:sp>
+        <p:nvSpPr>
+          <p:cNvPr id="154" name="Shape 50">
+            <a:extLst>
+              <a:ext uri="{FF2B5EF4-FFF2-40B4-BE49-F238E27FC236}">
+                <a16:creationId xmlns:a16="http://schemas.microsoft.com/office/drawing/2014/main" id="{DDA69D14-2790-BA90-912C-D57BAAD79210}"/>
+              </a:ext>
+            </a:extLst>
+          </p:cNvPr>
+          <p:cNvSpPr/>
+          <p:nvPr/>
+        </p:nvSpPr>
+        <p:spPr>
+          <a:xfrm>
+            <a:off x="246888" y="3994379"/>
+            <a:ext cx="11521440" cy="196596"/>
+          </a:xfrm>
+          <a:prstGeom prst="rect">
+            <a:avLst/>
+          </a:prstGeom>
+          <a:solidFill>
+            <a:srgbClr val="FAFAFA"/>
+          </a:solidFill>
+          <a:ln w="6350">
+            <a:solidFill>
+              <a:srgbClr val="E8E8E8"/>
+            </a:solidFill>
+            <a:prstDash val="solid"/>
+          </a:ln>
+        </p:spPr>
+        <p:txBody>
+          <a:bodyPr/>
+          <a:lstStyle/>
+          <a:p>
+            <a:endParaRPr lang="en-PH"/>
+          </a:p>
+        </p:txBody>
+      </p:sp>
+      <p:sp>
+        <p:nvSpPr>
+          <p:cNvPr id="155" name="Shape 51">
+            <a:extLst>
+              <a:ext uri="{FF2B5EF4-FFF2-40B4-BE49-F238E27FC236}">
+                <a16:creationId xmlns:a16="http://schemas.microsoft.com/office/drawing/2014/main" id="{87A40157-2786-48DF-4764-A90BC415B7B9}"/>
+              </a:ext>
+            </a:extLst>
+          </p:cNvPr>
+          <p:cNvSpPr/>
+          <p:nvPr/>
+        </p:nvSpPr>
+        <p:spPr>
+          <a:xfrm>
+            <a:off x="694944" y="4058844"/>
+            <a:ext cx="67666" cy="67666"/>
+          </a:xfrm>
+          <a:prstGeom prst="ellipse">
+            <a:avLst/>
+          </a:prstGeom>
+          <a:solidFill>
+            <a:srgbClr val="4CAF82"/>
+          </a:solidFill>
+          <a:ln w="12700">
+            <a:solidFill>
+              <a:srgbClr val="4CAF82"/>
+            </a:solidFill>
+            <a:prstDash val="solid"/>
+          </a:ln>
+        </p:spPr>
+        <p:txBody>
+          <a:bodyPr/>
+          <a:lstStyle/>
+          <a:p>
+            <a:endParaRPr lang="en-PH"/>
+          </a:p>
+        </p:txBody>
+      </p:sp>
+      <p:sp>
+        <p:nvSpPr>
+          <p:cNvPr id="156" name="Text 52">
+            <a:extLst>
+              <a:ext uri="{FF2B5EF4-FFF2-40B4-BE49-F238E27FC236}">
+                <a16:creationId xmlns:a16="http://schemas.microsoft.com/office/drawing/2014/main" id="{206E7DAC-F91E-941E-B444-BE188F517695}"/>
+              </a:ext>
+            </a:extLst>
+          </p:cNvPr>
+          <p:cNvSpPr/>
+          <p:nvPr/>
+        </p:nvSpPr>
+        <p:spPr>
+          <a:xfrm>
+            <a:off x="822960" y="3994379"/>
+            <a:ext cx="10424160" cy="196596"/>
+          </a:xfrm>
+          <a:prstGeom prst="rect">
+            <a:avLst/>
+          </a:prstGeom>
+          <a:noFill/>
+          <a:ln/>
+        </p:spPr>
+        <p:txBody>
+          <a:bodyPr wrap="square" lIns="0" tIns="0" rIns="0" bIns="0" rtlCol="0" anchor="ctr"/>
+          <a:lstStyle/>
+          <a:p>
+            <a:pPr marL="0" indent="0">
+              <a:buNone/>
+            </a:pPr>
+            <a:r>
+              <a:rPr lang="en-US" sz="850" i="1" dirty="0">
+                <a:solidFill>
+                  <a:srgbClr val="333333"/>
+                </a:solidFill>
+                <a:latin typeface="Calibri" pitchFamily="34" charset="0"/>
+                <a:ea typeface="Calibri" pitchFamily="34" charset="-122"/>
+                <a:cs typeface="Calibri" pitchFamily="34" charset="-120"/>
+              </a:rPr>
+              <a:t>Using props in components</a:t>
+            </a:r>
+            <a:endParaRPr lang="en-US" sz="850" dirty="0"/>
+          </a:p>
+        </p:txBody>
+      </p:sp>
+      <p:sp>
+        <p:nvSpPr>
+          <p:cNvPr id="157" name="Shape 53">
+            <a:extLst>
+              <a:ext uri="{FF2B5EF4-FFF2-40B4-BE49-F238E27FC236}">
+                <a16:creationId xmlns:a16="http://schemas.microsoft.com/office/drawing/2014/main" id="{278FA84C-26CC-8BC5-5AE3-CD7AC6BE7F2A}"/>
+              </a:ext>
+            </a:extLst>
+          </p:cNvPr>
+          <p:cNvSpPr/>
+          <p:nvPr/>
+        </p:nvSpPr>
+        <p:spPr>
+          <a:xfrm>
+            <a:off x="246888" y="4190975"/>
+            <a:ext cx="11521440" cy="246888"/>
+          </a:xfrm>
+          <a:prstGeom prst="rect">
+            <a:avLst/>
+          </a:prstGeom>
+          <a:solidFill>
+            <a:srgbClr val="EAF0EA"/>
+          </a:solidFill>
+          <a:ln w="6350">
+            <a:solidFill>
+              <a:srgbClr val="E8E8E8"/>
+            </a:solidFill>
+            <a:prstDash val="solid"/>
+          </a:ln>
+        </p:spPr>
+        <p:txBody>
+          <a:bodyPr/>
+          <a:lstStyle/>
+          <a:p>
+            <a:endParaRPr lang="en-PH"/>
+          </a:p>
+        </p:txBody>
+      </p:sp>
+      <p:sp>
+        <p:nvSpPr>
+          <p:cNvPr id="158" name="Shape 54">
+            <a:extLst>
+              <a:ext uri="{FF2B5EF4-FFF2-40B4-BE49-F238E27FC236}">
+                <a16:creationId xmlns:a16="http://schemas.microsoft.com/office/drawing/2014/main" id="{BCD18B8F-F87C-C4C8-D789-BECCE1E9C2E4}"/>
+              </a:ext>
+            </a:extLst>
+          </p:cNvPr>
+          <p:cNvSpPr/>
+          <p:nvPr/>
+        </p:nvSpPr>
+        <p:spPr>
+          <a:xfrm>
+            <a:off x="347472" y="4232123"/>
+            <a:ext cx="164592" cy="164592"/>
+          </a:xfrm>
+          <a:prstGeom prst="ellipse">
+            <a:avLst/>
+          </a:prstGeom>
+          <a:solidFill>
+            <a:srgbClr val="2D6247"/>
+          </a:solidFill>
+          <a:ln w="12700">
+            <a:solidFill>
+              <a:srgbClr val="2D6247"/>
+            </a:solidFill>
+            <a:prstDash val="solid"/>
+          </a:ln>
+        </p:spPr>
+        <p:txBody>
+          <a:bodyPr/>
+          <a:lstStyle/>
+          <a:p>
+            <a:endParaRPr lang="en-PH"/>
+          </a:p>
+        </p:txBody>
+      </p:sp>
+      <p:sp>
+        <p:nvSpPr>
+          <p:cNvPr id="159" name="Text 55">
+            <a:extLst>
+              <a:ext uri="{FF2B5EF4-FFF2-40B4-BE49-F238E27FC236}">
+                <a16:creationId xmlns:a16="http://schemas.microsoft.com/office/drawing/2014/main" id="{68AFFB2A-9B23-00A0-0277-D92F9F6587AB}"/>
+              </a:ext>
+            </a:extLst>
+          </p:cNvPr>
+          <p:cNvSpPr/>
+          <p:nvPr/>
+        </p:nvSpPr>
+        <p:spPr>
+          <a:xfrm>
+            <a:off x="347472" y="4232123"/>
+            <a:ext cx="164592" cy="164592"/>
+          </a:xfrm>
+          <a:prstGeom prst="rect">
+            <a:avLst/>
+          </a:prstGeom>
+          <a:noFill/>
+          <a:ln/>
+        </p:spPr>
+        <p:txBody>
+          <a:bodyPr wrap="square" lIns="0" tIns="0" rIns="0" bIns="0" rtlCol="0" anchor="ctr"/>
+          <a:lstStyle/>
+          <a:p>
+            <a:pPr marL="0" indent="0" algn="ctr">
+              <a:buNone/>
+            </a:pPr>
+            <a:r>
+              <a:rPr lang="en-US" sz="700" b="1" dirty="0">
+                <a:solidFill>
+                  <a:srgbClr val="FFFFFF"/>
+                </a:solidFill>
+                <a:latin typeface="Calibri" pitchFamily="34" charset="0"/>
+                <a:ea typeface="Calibri" pitchFamily="34" charset="-122"/>
+                <a:cs typeface="Calibri" pitchFamily="34" charset="-120"/>
+              </a:rPr>
+              <a:t>4</a:t>
+            </a:r>
+            <a:endParaRPr lang="en-US" sz="700" dirty="0"/>
+          </a:p>
+        </p:txBody>
+      </p:sp>
+      <p:sp>
+        <p:nvSpPr>
+          <p:cNvPr id="160" name="Text 56">
+            <a:extLst>
+              <a:ext uri="{FF2B5EF4-FFF2-40B4-BE49-F238E27FC236}">
+                <a16:creationId xmlns:a16="http://schemas.microsoft.com/office/drawing/2014/main" id="{7041CC87-88B0-5420-F8BE-BD073FB95910}"/>
+              </a:ext>
+            </a:extLst>
+          </p:cNvPr>
+          <p:cNvSpPr/>
+          <p:nvPr/>
+        </p:nvSpPr>
+        <p:spPr>
+          <a:xfrm>
+            <a:off x="585216" y="4190975"/>
+            <a:ext cx="8961120" cy="246888"/>
+          </a:xfrm>
+          <a:prstGeom prst="rect">
+            <a:avLst/>
+          </a:prstGeom>
+          <a:noFill/>
+          <a:ln/>
+        </p:spPr>
+        <p:txBody>
+          <a:bodyPr wrap="square" lIns="0" tIns="0" rIns="0" bIns="0" rtlCol="0" anchor="ctr"/>
+          <a:lstStyle/>
+          <a:p>
+            <a:pPr marL="0" indent="0">
+              <a:buNone/>
+            </a:pPr>
+            <a:r>
+              <a:rPr lang="en-US" sz="950" b="1" dirty="0">
+                <a:solidFill>
+                  <a:srgbClr val="111111"/>
+                </a:solidFill>
+                <a:latin typeface="Calibri" pitchFamily="34" charset="0"/>
+                <a:ea typeface="Calibri" pitchFamily="34" charset="-122"/>
+                <a:cs typeface="Calibri" pitchFamily="34" charset="-120"/>
+              </a:rPr>
+              <a:t>Interactivity on React Websites</a:t>
+            </a:r>
+            <a:endParaRPr lang="en-US" sz="950" dirty="0"/>
+          </a:p>
+        </p:txBody>
+      </p:sp>
+      <p:sp>
+        <p:nvSpPr>
+          <p:cNvPr id="161" name="Text 57">
+            <a:extLst>
+              <a:ext uri="{FF2B5EF4-FFF2-40B4-BE49-F238E27FC236}">
+                <a16:creationId xmlns:a16="http://schemas.microsoft.com/office/drawing/2014/main" id="{9E695D4B-6892-8D14-8DE3-1C633360862B}"/>
+              </a:ext>
+            </a:extLst>
+          </p:cNvPr>
+          <p:cNvSpPr/>
+          <p:nvPr/>
+        </p:nvSpPr>
+        <p:spPr>
+          <a:xfrm>
+            <a:off x="9619488" y="4190975"/>
+            <a:ext cx="2011680" cy="246888"/>
+          </a:xfrm>
+          <a:prstGeom prst="rect">
+            <a:avLst/>
+          </a:prstGeom>
+          <a:noFill/>
+          <a:ln/>
+        </p:spPr>
+        <p:txBody>
+          <a:bodyPr wrap="square" lIns="0" tIns="0" rIns="0" bIns="0" rtlCol="0" anchor="ctr"/>
+          <a:lstStyle/>
+          <a:p>
+            <a:pPr marL="0" indent="0" algn="r">
+              <a:buNone/>
+            </a:pPr>
+            <a:r>
+              <a:rPr lang="en-US" sz="900" b="1" dirty="0">
+                <a:solidFill>
+                  <a:srgbClr val="2D6247"/>
+                </a:solidFill>
+                <a:latin typeface="Calibri" pitchFamily="34" charset="0"/>
+                <a:ea typeface="Calibri" pitchFamily="34" charset="-122"/>
+                <a:cs typeface="Calibri" pitchFamily="34" charset="-120"/>
+              </a:rPr>
+              <a:t>~35 min</a:t>
+            </a:r>
+            <a:endParaRPr lang="en-US" sz="900" dirty="0"/>
+          </a:p>
+        </p:txBody>
+      </p:sp>
+      <p:sp>
+        <p:nvSpPr>
+          <p:cNvPr id="162" name="Shape 58">
+            <a:extLst>
+              <a:ext uri="{FF2B5EF4-FFF2-40B4-BE49-F238E27FC236}">
+                <a16:creationId xmlns:a16="http://schemas.microsoft.com/office/drawing/2014/main" id="{11336536-47D8-2958-AA13-BF80AD65C0EA}"/>
+              </a:ext>
+            </a:extLst>
+          </p:cNvPr>
+          <p:cNvSpPr/>
+          <p:nvPr/>
+        </p:nvSpPr>
+        <p:spPr>
+          <a:xfrm>
+            <a:off x="246888" y="4437863"/>
+            <a:ext cx="11521440" cy="196596"/>
+          </a:xfrm>
+          <a:prstGeom prst="rect">
+            <a:avLst/>
+          </a:prstGeom>
+          <a:solidFill>
+            <a:srgbClr val="FAFAFA"/>
+          </a:solidFill>
+          <a:ln w="6350">
+            <a:solidFill>
+              <a:srgbClr val="E8E8E8"/>
+            </a:solidFill>
+            <a:prstDash val="solid"/>
+          </a:ln>
+        </p:spPr>
+        <p:txBody>
+          <a:bodyPr/>
+          <a:lstStyle/>
+          <a:p>
+            <a:endParaRPr lang="en-PH"/>
+          </a:p>
+        </p:txBody>
+      </p:sp>
+      <p:sp>
+        <p:nvSpPr>
+          <p:cNvPr id="163" name="Shape 59">
+            <a:extLst>
+              <a:ext uri="{FF2B5EF4-FFF2-40B4-BE49-F238E27FC236}">
+                <a16:creationId xmlns:a16="http://schemas.microsoft.com/office/drawing/2014/main" id="{8DEA29D3-F0EC-8C49-0D4F-2BAB08B8FDAC}"/>
+              </a:ext>
+            </a:extLst>
+          </p:cNvPr>
+          <p:cNvSpPr/>
+          <p:nvPr/>
+        </p:nvSpPr>
+        <p:spPr>
+          <a:xfrm>
+            <a:off x="694944" y="4502328"/>
+            <a:ext cx="67666" cy="67666"/>
+          </a:xfrm>
+          <a:prstGeom prst="ellipse">
+            <a:avLst/>
+          </a:prstGeom>
+          <a:solidFill>
+            <a:srgbClr val="4CAF82"/>
+          </a:solidFill>
+          <a:ln w="12700">
+            <a:solidFill>
+              <a:srgbClr val="4CAF82"/>
+            </a:solidFill>
+            <a:prstDash val="solid"/>
+          </a:ln>
+        </p:spPr>
+        <p:txBody>
+          <a:bodyPr/>
+          <a:lstStyle/>
+          <a:p>
+            <a:endParaRPr lang="en-PH"/>
+          </a:p>
+        </p:txBody>
+      </p:sp>
+      <p:sp>
+        <p:nvSpPr>
+          <p:cNvPr id="164" name="Text 60">
+            <a:extLst>
+              <a:ext uri="{FF2B5EF4-FFF2-40B4-BE49-F238E27FC236}">
+                <a16:creationId xmlns:a16="http://schemas.microsoft.com/office/drawing/2014/main" id="{D5758906-D7B1-32DF-6100-4D6D5768CF7A}"/>
+              </a:ext>
+            </a:extLst>
+          </p:cNvPr>
+          <p:cNvSpPr/>
+          <p:nvPr/>
+        </p:nvSpPr>
+        <p:spPr>
+          <a:xfrm>
+            <a:off x="822960" y="4437863"/>
+            <a:ext cx="10424160" cy="196596"/>
+          </a:xfrm>
+          <a:prstGeom prst="rect">
+            <a:avLst/>
+          </a:prstGeom>
+          <a:noFill/>
+          <a:ln/>
+        </p:spPr>
+        <p:txBody>
+          <a:bodyPr wrap="square" lIns="0" tIns="0" rIns="0" bIns="0" rtlCol="0" anchor="ctr"/>
+          <a:lstStyle/>
+          <a:p>
+            <a:pPr marL="0" indent="0">
+              <a:buNone/>
+            </a:pPr>
+            <a:r>
+              <a:rPr lang="en-US" sz="850" i="1" dirty="0">
+                <a:solidFill>
+                  <a:srgbClr val="333333"/>
+                </a:solidFill>
+                <a:latin typeface="Calibri" pitchFamily="34" charset="0"/>
+                <a:ea typeface="Calibri" pitchFamily="34" charset="-122"/>
+                <a:cs typeface="Calibri" pitchFamily="34" charset="-120"/>
+              </a:rPr>
+              <a:t>Fundamentals for event handling</a:t>
+            </a:r>
+            <a:endParaRPr lang="en-US" sz="850" dirty="0"/>
+          </a:p>
+        </p:txBody>
+      </p:sp>
+      <p:sp>
+        <p:nvSpPr>
+          <p:cNvPr id="165" name="Shape 61">
+            <a:extLst>
+              <a:ext uri="{FF2B5EF4-FFF2-40B4-BE49-F238E27FC236}">
+                <a16:creationId xmlns:a16="http://schemas.microsoft.com/office/drawing/2014/main" id="{247E3BC8-40AA-7F28-C90E-BAD4F5495332}"/>
+              </a:ext>
+            </a:extLst>
+          </p:cNvPr>
+          <p:cNvSpPr/>
+          <p:nvPr/>
+        </p:nvSpPr>
+        <p:spPr>
+          <a:xfrm>
+            <a:off x="246888" y="4634459"/>
+            <a:ext cx="11521440" cy="219456"/>
+          </a:xfrm>
+          <a:prstGeom prst="rect">
+            <a:avLst/>
+          </a:prstGeom>
+          <a:solidFill>
+            <a:srgbClr val="F4F7F4"/>
+          </a:solidFill>
+          <a:ln w="6350">
+            <a:solidFill>
+              <a:srgbClr val="E8E8E8"/>
+            </a:solidFill>
+            <a:prstDash val="solid"/>
+          </a:ln>
+        </p:spPr>
+        <p:txBody>
+          <a:bodyPr/>
+          <a:lstStyle/>
+          <a:p>
+            <a:endParaRPr lang="en-PH"/>
+          </a:p>
+        </p:txBody>
+      </p:sp>
+      <p:sp>
+        <p:nvSpPr>
+          <p:cNvPr id="166" name="Shape 62">
+            <a:extLst>
+              <a:ext uri="{FF2B5EF4-FFF2-40B4-BE49-F238E27FC236}">
+                <a16:creationId xmlns:a16="http://schemas.microsoft.com/office/drawing/2014/main" id="{AA60E714-E962-1DB2-E032-F787D8A6D73A}"/>
+              </a:ext>
+            </a:extLst>
+          </p:cNvPr>
+          <p:cNvSpPr/>
+          <p:nvPr/>
+        </p:nvSpPr>
+        <p:spPr>
+          <a:xfrm>
+            <a:off x="603504" y="4707611"/>
+            <a:ext cx="91440" cy="64008"/>
+          </a:xfrm>
+          <a:prstGeom prst="rect">
+            <a:avLst/>
+          </a:prstGeom>
+          <a:solidFill>
+            <a:srgbClr val="4CAF82"/>
+          </a:solidFill>
+          <a:ln w="12700">
+            <a:solidFill>
+              <a:srgbClr val="4CAF82"/>
+            </a:solidFill>
+            <a:prstDash val="solid"/>
+          </a:ln>
+        </p:spPr>
+        <p:txBody>
+          <a:bodyPr/>
+          <a:lstStyle/>
+          <a:p>
+            <a:endParaRPr lang="en-PH"/>
+          </a:p>
+        </p:txBody>
+      </p:sp>
+      <p:sp>
+        <p:nvSpPr>
+          <p:cNvPr id="167" name="Text 63">
+            <a:extLst>
+              <a:ext uri="{FF2B5EF4-FFF2-40B4-BE49-F238E27FC236}">
+                <a16:creationId xmlns:a16="http://schemas.microsoft.com/office/drawing/2014/main" id="{84E728E9-B12A-375A-3577-4D0AF02438D2}"/>
+              </a:ext>
+            </a:extLst>
+          </p:cNvPr>
+          <p:cNvSpPr/>
+          <p:nvPr/>
+        </p:nvSpPr>
+        <p:spPr>
+          <a:xfrm>
+            <a:off x="749808" y="4634459"/>
+            <a:ext cx="10515600" cy="219456"/>
+          </a:xfrm>
+          <a:prstGeom prst="rect">
+            <a:avLst/>
+          </a:prstGeom>
+          <a:noFill/>
+          <a:ln/>
+        </p:spPr>
+        <p:txBody>
+          <a:bodyPr wrap="square" lIns="0" tIns="0" rIns="0" bIns="0" rtlCol="0" anchor="ctr"/>
+          <a:lstStyle/>
+          <a:p>
+            <a:pPr marL="0" indent="0">
+              <a:buNone/>
+            </a:pPr>
+            <a:r>
+              <a:rPr lang="en-US" sz="900" b="1" i="1" dirty="0">
+                <a:solidFill>
+                  <a:srgbClr val="1A1A1A"/>
+                </a:solidFill>
+                <a:latin typeface="Calibri" pitchFamily="34" charset="0"/>
+                <a:ea typeface="Calibri" pitchFamily="34" charset="-122"/>
+                <a:cs typeface="Calibri" pitchFamily="34" charset="-120"/>
+              </a:rPr>
+              <a:t>Introduction to React Hooks</a:t>
+            </a:r>
+            <a:endParaRPr lang="en-US" sz="900" dirty="0"/>
+          </a:p>
+        </p:txBody>
+      </p:sp>
+      <p:sp>
+        <p:nvSpPr>
+          <p:cNvPr id="168" name="Shape 64">
+            <a:extLst>
+              <a:ext uri="{FF2B5EF4-FFF2-40B4-BE49-F238E27FC236}">
+                <a16:creationId xmlns:a16="http://schemas.microsoft.com/office/drawing/2014/main" id="{42B111BB-2422-62F4-E02A-35F2E21C337D}"/>
+              </a:ext>
+            </a:extLst>
+          </p:cNvPr>
+          <p:cNvSpPr/>
+          <p:nvPr/>
+        </p:nvSpPr>
+        <p:spPr>
+          <a:xfrm>
+            <a:off x="246888" y="4853915"/>
+            <a:ext cx="11521440" cy="196596"/>
+          </a:xfrm>
+          <a:prstGeom prst="rect">
+            <a:avLst/>
+          </a:prstGeom>
+          <a:solidFill>
+            <a:srgbClr val="F9F9F9"/>
+          </a:solidFill>
+          <a:ln w="6350">
+            <a:solidFill>
+              <a:srgbClr val="E8E8E8"/>
+            </a:solidFill>
+            <a:prstDash val="solid"/>
+          </a:ln>
+        </p:spPr>
+        <p:txBody>
+          <a:bodyPr/>
+          <a:lstStyle/>
+          <a:p>
+            <a:endParaRPr lang="en-PH"/>
+          </a:p>
+        </p:txBody>
+      </p:sp>
+      <p:sp>
+        <p:nvSpPr>
+          <p:cNvPr id="169" name="Shape 65">
+            <a:extLst>
+              <a:ext uri="{FF2B5EF4-FFF2-40B4-BE49-F238E27FC236}">
+                <a16:creationId xmlns:a16="http://schemas.microsoft.com/office/drawing/2014/main" id="{B31682C6-D860-40C3-B90E-042D0CBC932D}"/>
+              </a:ext>
+            </a:extLst>
+          </p:cNvPr>
+          <p:cNvSpPr/>
+          <p:nvPr/>
+        </p:nvSpPr>
+        <p:spPr>
+          <a:xfrm>
+            <a:off x="969264" y="4924781"/>
+            <a:ext cx="54864" cy="54864"/>
+          </a:xfrm>
+          <a:prstGeom prst="rect">
+            <a:avLst/>
+          </a:prstGeom>
+          <a:solidFill>
+            <a:srgbClr val="BBBBBB"/>
+          </a:solidFill>
+          <a:ln w="12700">
+            <a:solidFill>
+              <a:srgbClr val="BBBBBB"/>
+            </a:solidFill>
+            <a:prstDash val="solid"/>
+          </a:ln>
+        </p:spPr>
+        <p:txBody>
+          <a:bodyPr/>
+          <a:lstStyle/>
+          <a:p>
+            <a:endParaRPr lang="en-PH"/>
+          </a:p>
+        </p:txBody>
+      </p:sp>
+      <p:sp>
+        <p:nvSpPr>
+          <p:cNvPr id="170" name="Text 66">
+            <a:extLst>
+              <a:ext uri="{FF2B5EF4-FFF2-40B4-BE49-F238E27FC236}">
+                <a16:creationId xmlns:a16="http://schemas.microsoft.com/office/drawing/2014/main" id="{33808A26-E518-5EF4-D57F-66190EE0843F}"/>
+              </a:ext>
+            </a:extLst>
+          </p:cNvPr>
+          <p:cNvSpPr/>
+          <p:nvPr/>
+        </p:nvSpPr>
+        <p:spPr>
+          <a:xfrm>
+            <a:off x="1078992" y="4853915"/>
+            <a:ext cx="10149840" cy="196596"/>
+          </a:xfrm>
+          <a:prstGeom prst="rect">
+            <a:avLst/>
+          </a:prstGeom>
+          <a:noFill/>
+          <a:ln/>
+        </p:spPr>
+        <p:txBody>
+          <a:bodyPr wrap="square" lIns="0" tIns="0" rIns="0" bIns="0" rtlCol="0" anchor="ctr"/>
+          <a:lstStyle/>
+          <a:p>
+            <a:pPr marL="0" indent="0">
+              <a:buNone/>
+            </a:pPr>
+            <a:r>
+              <a:rPr lang="en-US" sz="800" i="1" dirty="0">
+                <a:solidFill>
+                  <a:srgbClr val="555555"/>
+                </a:solidFill>
+                <a:latin typeface="Calibri" pitchFamily="34" charset="0"/>
+                <a:ea typeface="Calibri" pitchFamily="34" charset="-122"/>
+                <a:cs typeface="Calibri" pitchFamily="34" charset="-120"/>
+              </a:rPr>
+              <a:t>Handling states and mutating them using useState</a:t>
+            </a:r>
+            <a:endParaRPr lang="en-US" sz="800" dirty="0"/>
+          </a:p>
+        </p:txBody>
+      </p:sp>
+      <p:sp>
+        <p:nvSpPr>
+          <p:cNvPr id="171" name="Shape 67">
+            <a:extLst>
+              <a:ext uri="{FF2B5EF4-FFF2-40B4-BE49-F238E27FC236}">
+                <a16:creationId xmlns:a16="http://schemas.microsoft.com/office/drawing/2014/main" id="{D852F389-A95C-3A0D-B4CA-060CC928E295}"/>
+              </a:ext>
+            </a:extLst>
+          </p:cNvPr>
+          <p:cNvSpPr/>
+          <p:nvPr/>
+        </p:nvSpPr>
+        <p:spPr>
+          <a:xfrm>
+            <a:off x="246888" y="5050511"/>
+            <a:ext cx="11521440" cy="196596"/>
+          </a:xfrm>
+          <a:prstGeom prst="rect">
+            <a:avLst/>
+          </a:prstGeom>
+          <a:solidFill>
+            <a:srgbClr val="FDFDFD"/>
+          </a:solidFill>
+          <a:ln w="6350">
+            <a:solidFill>
+              <a:srgbClr val="E8E8E8"/>
+            </a:solidFill>
+            <a:prstDash val="solid"/>
+          </a:ln>
+        </p:spPr>
+        <p:txBody>
+          <a:bodyPr/>
+          <a:lstStyle/>
+          <a:p>
+            <a:endParaRPr lang="en-PH"/>
+          </a:p>
+        </p:txBody>
+      </p:sp>
+      <p:sp>
+        <p:nvSpPr>
+          <p:cNvPr id="172" name="Shape 68">
+            <a:extLst>
+              <a:ext uri="{FF2B5EF4-FFF2-40B4-BE49-F238E27FC236}">
+                <a16:creationId xmlns:a16="http://schemas.microsoft.com/office/drawing/2014/main" id="{FBD607CD-A056-CF0D-34DA-1FD79BFBC74E}"/>
+              </a:ext>
+            </a:extLst>
+          </p:cNvPr>
+          <p:cNvSpPr/>
+          <p:nvPr/>
+        </p:nvSpPr>
+        <p:spPr>
+          <a:xfrm>
+            <a:off x="969264" y="5121377"/>
+            <a:ext cx="54864" cy="54864"/>
+          </a:xfrm>
+          <a:prstGeom prst="rect">
+            <a:avLst/>
+          </a:prstGeom>
+          <a:solidFill>
+            <a:srgbClr val="BBBBBB"/>
+          </a:solidFill>
+          <a:ln w="12700">
+            <a:solidFill>
+              <a:srgbClr val="BBBBBB"/>
+            </a:solidFill>
+            <a:prstDash val="solid"/>
+          </a:ln>
+        </p:spPr>
+        <p:txBody>
+          <a:bodyPr/>
+          <a:lstStyle/>
+          <a:p>
+            <a:endParaRPr lang="en-PH"/>
+          </a:p>
+        </p:txBody>
+      </p:sp>
+      <p:sp>
+        <p:nvSpPr>
+          <p:cNvPr id="173" name="Text 69">
+            <a:extLst>
+              <a:ext uri="{FF2B5EF4-FFF2-40B4-BE49-F238E27FC236}">
+                <a16:creationId xmlns:a16="http://schemas.microsoft.com/office/drawing/2014/main" id="{0B78CA45-B827-B3C2-0356-5FEDA5CFBDE2}"/>
+              </a:ext>
+            </a:extLst>
+          </p:cNvPr>
+          <p:cNvSpPr/>
+          <p:nvPr/>
+        </p:nvSpPr>
+        <p:spPr>
+          <a:xfrm>
+            <a:off x="1078992" y="5050511"/>
+            <a:ext cx="10149840" cy="196596"/>
+          </a:xfrm>
+          <a:prstGeom prst="rect">
+            <a:avLst/>
+          </a:prstGeom>
+          <a:noFill/>
+          <a:ln/>
+        </p:spPr>
+        <p:txBody>
+          <a:bodyPr wrap="square" lIns="0" tIns="0" rIns="0" bIns="0" rtlCol="0" anchor="ctr"/>
+          <a:lstStyle/>
+          <a:p>
+            <a:pPr marL="0" indent="0">
+              <a:buNone/>
+            </a:pPr>
+            <a:r>
+              <a:rPr lang="en-US" sz="800" i="1" dirty="0">
+                <a:solidFill>
+                  <a:srgbClr val="555555"/>
+                </a:solidFill>
+                <a:latin typeface="Calibri" pitchFamily="34" charset="0"/>
+                <a:ea typeface="Calibri" pitchFamily="34" charset="-122"/>
+                <a:cs typeface="Calibri" pitchFamily="34" charset="-120"/>
+              </a:rPr>
+              <a:t>Conditional rendering</a:t>
+            </a:r>
+            <a:endParaRPr lang="en-US" sz="800" dirty="0"/>
+          </a:p>
+        </p:txBody>
+      </p:sp>
+      <p:sp>
+        <p:nvSpPr>
+          <p:cNvPr id="174" name="Shape 70">
+            <a:extLst>
+              <a:ext uri="{FF2B5EF4-FFF2-40B4-BE49-F238E27FC236}">
+                <a16:creationId xmlns:a16="http://schemas.microsoft.com/office/drawing/2014/main" id="{33B104FC-2B8E-1C61-E203-EF23D06788F2}"/>
+              </a:ext>
+            </a:extLst>
+          </p:cNvPr>
+          <p:cNvSpPr/>
+          <p:nvPr/>
+        </p:nvSpPr>
+        <p:spPr>
+          <a:xfrm>
+            <a:off x="246888" y="5247107"/>
+            <a:ext cx="11521440" cy="196596"/>
+          </a:xfrm>
+          <a:prstGeom prst="rect">
+            <a:avLst/>
+          </a:prstGeom>
+          <a:solidFill>
+            <a:srgbClr val="F9F9F9"/>
+          </a:solidFill>
+          <a:ln w="6350">
+            <a:solidFill>
+              <a:srgbClr val="E8E8E8"/>
+            </a:solidFill>
+            <a:prstDash val="solid"/>
+          </a:ln>
+        </p:spPr>
+        <p:txBody>
+          <a:bodyPr/>
+          <a:lstStyle/>
+          <a:p>
+            <a:endParaRPr lang="en-PH"/>
+          </a:p>
+        </p:txBody>
+      </p:sp>
+      <p:sp>
+        <p:nvSpPr>
+          <p:cNvPr id="175" name="Shape 71">
+            <a:extLst>
+              <a:ext uri="{FF2B5EF4-FFF2-40B4-BE49-F238E27FC236}">
+                <a16:creationId xmlns:a16="http://schemas.microsoft.com/office/drawing/2014/main" id="{F1B4A25B-B2F3-6CAF-12BC-B29AC9F03093}"/>
+              </a:ext>
+            </a:extLst>
+          </p:cNvPr>
+          <p:cNvSpPr/>
+          <p:nvPr/>
+        </p:nvSpPr>
+        <p:spPr>
+          <a:xfrm>
+            <a:off x="969264" y="5317973"/>
+            <a:ext cx="54864" cy="54864"/>
+          </a:xfrm>
+          <a:prstGeom prst="rect">
+            <a:avLst/>
+          </a:prstGeom>
+          <a:solidFill>
+            <a:srgbClr val="BBBBBB"/>
+          </a:solidFill>
+          <a:ln w="12700">
+            <a:solidFill>
+              <a:srgbClr val="BBBBBB"/>
+            </a:solidFill>
+            <a:prstDash val="solid"/>
+          </a:ln>
+        </p:spPr>
+        <p:txBody>
+          <a:bodyPr/>
+          <a:lstStyle/>
+          <a:p>
+            <a:endParaRPr lang="en-PH"/>
+          </a:p>
+        </p:txBody>
+      </p:sp>
+      <p:sp>
+        <p:nvSpPr>
+          <p:cNvPr id="176" name="Text 72">
+            <a:extLst>
+              <a:ext uri="{FF2B5EF4-FFF2-40B4-BE49-F238E27FC236}">
+                <a16:creationId xmlns:a16="http://schemas.microsoft.com/office/drawing/2014/main" id="{F9DDC76B-B785-86CC-E2E1-E00975CF2528}"/>
+              </a:ext>
+            </a:extLst>
+          </p:cNvPr>
+          <p:cNvSpPr/>
+          <p:nvPr/>
+        </p:nvSpPr>
+        <p:spPr>
+          <a:xfrm>
+            <a:off x="1078992" y="5247107"/>
+            <a:ext cx="10149840" cy="196596"/>
+          </a:xfrm>
+          <a:prstGeom prst="rect">
+            <a:avLst/>
+          </a:prstGeom>
+          <a:noFill/>
+          <a:ln/>
+        </p:spPr>
+        <p:txBody>
+          <a:bodyPr wrap="square" lIns="0" tIns="0" rIns="0" bIns="0" rtlCol="0" anchor="ctr"/>
+          <a:lstStyle/>
+          <a:p>
+            <a:pPr marL="0" indent="0">
+              <a:buNone/>
+            </a:pPr>
+            <a:r>
+              <a:rPr lang="en-US" sz="800" i="1" dirty="0">
+                <a:solidFill>
+                  <a:srgbClr val="555555"/>
+                </a:solidFill>
+                <a:latin typeface="Calibri" pitchFamily="34" charset="0"/>
+                <a:ea typeface="Calibri" pitchFamily="34" charset="-122"/>
+                <a:cs typeface="Calibri" pitchFamily="34" charset="-120"/>
+              </a:rPr>
+              <a:t>Uses for useEffect</a:t>
+            </a:r>
+            <a:endParaRPr lang="en-US" sz="800" dirty="0"/>
+          </a:p>
+        </p:txBody>
+      </p:sp>
+      <p:sp>
+        <p:nvSpPr>
+          <p:cNvPr id="177" name="Shape 73">
+            <a:extLst>
+              <a:ext uri="{FF2B5EF4-FFF2-40B4-BE49-F238E27FC236}">
+                <a16:creationId xmlns:a16="http://schemas.microsoft.com/office/drawing/2014/main" id="{6B307578-8ECF-EEED-6651-D892D981825B}"/>
+              </a:ext>
+            </a:extLst>
+          </p:cNvPr>
+          <p:cNvSpPr/>
+          <p:nvPr/>
+        </p:nvSpPr>
+        <p:spPr>
+          <a:xfrm>
+            <a:off x="246888" y="5443703"/>
+            <a:ext cx="11521440" cy="196596"/>
+          </a:xfrm>
+          <a:prstGeom prst="rect">
+            <a:avLst/>
+          </a:prstGeom>
+          <a:solidFill>
+            <a:srgbClr val="FDFDFD"/>
+          </a:solidFill>
+          <a:ln w="6350">
+            <a:solidFill>
+              <a:srgbClr val="E8E8E8"/>
+            </a:solidFill>
+            <a:prstDash val="solid"/>
+          </a:ln>
+        </p:spPr>
+        <p:txBody>
+          <a:bodyPr/>
+          <a:lstStyle/>
+          <a:p>
+            <a:endParaRPr lang="en-PH"/>
+          </a:p>
+        </p:txBody>
+      </p:sp>
+      <p:sp>
+        <p:nvSpPr>
+          <p:cNvPr id="178" name="Shape 74">
+            <a:extLst>
+              <a:ext uri="{FF2B5EF4-FFF2-40B4-BE49-F238E27FC236}">
+                <a16:creationId xmlns:a16="http://schemas.microsoft.com/office/drawing/2014/main" id="{818F7BCF-99C0-59A7-01D8-6B598CA4924D}"/>
+              </a:ext>
+            </a:extLst>
+          </p:cNvPr>
+          <p:cNvSpPr/>
+          <p:nvPr/>
+        </p:nvSpPr>
+        <p:spPr>
+          <a:xfrm>
+            <a:off x="969264" y="5514569"/>
+            <a:ext cx="54864" cy="54864"/>
+          </a:xfrm>
+          <a:prstGeom prst="rect">
+            <a:avLst/>
+          </a:prstGeom>
+          <a:solidFill>
+            <a:srgbClr val="BBBBBB"/>
+          </a:solidFill>
+          <a:ln w="12700">
+            <a:solidFill>
+              <a:srgbClr val="BBBBBB"/>
+            </a:solidFill>
+            <a:prstDash val="solid"/>
+          </a:ln>
+        </p:spPr>
+        <p:txBody>
+          <a:bodyPr/>
+          <a:lstStyle/>
+          <a:p>
+            <a:endParaRPr lang="en-PH"/>
+          </a:p>
+        </p:txBody>
+      </p:sp>
+      <p:sp>
+        <p:nvSpPr>
+          <p:cNvPr id="179" name="Text 75">
+            <a:extLst>
+              <a:ext uri="{FF2B5EF4-FFF2-40B4-BE49-F238E27FC236}">
+                <a16:creationId xmlns:a16="http://schemas.microsoft.com/office/drawing/2014/main" id="{2148BCB3-23FD-2990-0BD9-87D88A48FB41}"/>
+              </a:ext>
+            </a:extLst>
+          </p:cNvPr>
+          <p:cNvSpPr/>
+          <p:nvPr/>
+        </p:nvSpPr>
+        <p:spPr>
+          <a:xfrm>
+            <a:off x="1078992" y="5443703"/>
+            <a:ext cx="10149840" cy="196596"/>
+          </a:xfrm>
+          <a:prstGeom prst="rect">
+            <a:avLst/>
+          </a:prstGeom>
+          <a:noFill/>
+          <a:ln/>
+        </p:spPr>
+        <p:txBody>
+          <a:bodyPr wrap="square" lIns="0" tIns="0" rIns="0" bIns="0" rtlCol="0" anchor="ctr"/>
+          <a:lstStyle/>
+          <a:p>
+            <a:pPr marL="0" indent="0">
+              <a:buNone/>
+            </a:pPr>
+            <a:r>
+              <a:rPr lang="en-US" sz="800" i="1" dirty="0">
+                <a:solidFill>
+                  <a:srgbClr val="555555"/>
+                </a:solidFill>
+                <a:latin typeface="Calibri" pitchFamily="34" charset="0"/>
+                <a:ea typeface="Calibri" pitchFamily="34" charset="-122"/>
+                <a:cs typeface="Calibri" pitchFamily="34" charset="-120"/>
+              </a:rPr>
+              <a:t>Other React Hooks</a:t>
+            </a:r>
+            <a:endParaRPr lang="en-US" sz="800" dirty="0"/>
+          </a:p>
+        </p:txBody>
+      </p:sp>
+      <p:sp>
+        <p:nvSpPr>
+          <p:cNvPr id="180" name="Shape 76">
+            <a:extLst>
+              <a:ext uri="{FF2B5EF4-FFF2-40B4-BE49-F238E27FC236}">
+                <a16:creationId xmlns:a16="http://schemas.microsoft.com/office/drawing/2014/main" id="{E9ACA042-7151-37C9-84B7-881C195023B2}"/>
+              </a:ext>
+            </a:extLst>
+          </p:cNvPr>
+          <p:cNvSpPr/>
+          <p:nvPr/>
+        </p:nvSpPr>
+        <p:spPr>
+          <a:xfrm>
+            <a:off x="246888" y="5640299"/>
+            <a:ext cx="11521440" cy="246888"/>
+          </a:xfrm>
+          <a:prstGeom prst="rect">
+            <a:avLst/>
+          </a:prstGeom>
+          <a:solidFill>
+            <a:srgbClr val="EEF2EE"/>
+          </a:solidFill>
+          <a:ln w="6350">
+            <a:solidFill>
+              <a:srgbClr val="E8E8E8"/>
+            </a:solidFill>
+            <a:prstDash val="solid"/>
+          </a:ln>
+        </p:spPr>
+        <p:txBody>
+          <a:bodyPr/>
+          <a:lstStyle/>
+          <a:p>
+            <a:endParaRPr lang="en-PH"/>
+          </a:p>
+        </p:txBody>
+      </p:sp>
+      <p:sp>
+        <p:nvSpPr>
+          <p:cNvPr id="181" name="Shape 77">
+            <a:extLst>
+              <a:ext uri="{FF2B5EF4-FFF2-40B4-BE49-F238E27FC236}">
+                <a16:creationId xmlns:a16="http://schemas.microsoft.com/office/drawing/2014/main" id="{936E5C65-5024-3F4F-B660-4E971C5DF49B}"/>
+              </a:ext>
+            </a:extLst>
+          </p:cNvPr>
+          <p:cNvSpPr/>
+          <p:nvPr/>
+        </p:nvSpPr>
+        <p:spPr>
+          <a:xfrm>
+            <a:off x="347472" y="5681447"/>
+            <a:ext cx="164592" cy="164592"/>
+          </a:xfrm>
+          <a:prstGeom prst="ellipse">
+            <a:avLst/>
+          </a:prstGeom>
+          <a:solidFill>
+            <a:srgbClr val="2D6247"/>
+          </a:solidFill>
+          <a:ln w="12700">
+            <a:solidFill>
+              <a:srgbClr val="2D6247"/>
+            </a:solidFill>
+            <a:prstDash val="solid"/>
+          </a:ln>
+        </p:spPr>
+        <p:txBody>
+          <a:bodyPr/>
+          <a:lstStyle/>
+          <a:p>
+            <a:endParaRPr lang="en-PH"/>
+          </a:p>
+        </p:txBody>
+      </p:sp>
+      <p:sp>
+        <p:nvSpPr>
+          <p:cNvPr id="182" name="Text 78">
+            <a:extLst>
+              <a:ext uri="{FF2B5EF4-FFF2-40B4-BE49-F238E27FC236}">
+                <a16:creationId xmlns:a16="http://schemas.microsoft.com/office/drawing/2014/main" id="{F834BCF2-E9F7-11A7-DED2-5C1809E64097}"/>
+              </a:ext>
+            </a:extLst>
+          </p:cNvPr>
+          <p:cNvSpPr/>
+          <p:nvPr/>
+        </p:nvSpPr>
+        <p:spPr>
+          <a:xfrm>
+            <a:off x="347472" y="5681447"/>
+            <a:ext cx="164592" cy="164592"/>
+          </a:xfrm>
+          <a:prstGeom prst="rect">
+            <a:avLst/>
+          </a:prstGeom>
+          <a:noFill/>
+          <a:ln/>
+        </p:spPr>
+        <p:txBody>
+          <a:bodyPr wrap="square" lIns="0" tIns="0" rIns="0" bIns="0" rtlCol="0" anchor="ctr"/>
+          <a:lstStyle/>
+          <a:p>
+            <a:pPr marL="0" indent="0" algn="ctr">
+              <a:buNone/>
+            </a:pPr>
+            <a:r>
+              <a:rPr lang="en-US" sz="700" b="1" dirty="0">
+                <a:solidFill>
+                  <a:srgbClr val="FFFFFF"/>
+                </a:solidFill>
+                <a:latin typeface="Calibri" pitchFamily="34" charset="0"/>
+                <a:ea typeface="Calibri" pitchFamily="34" charset="-122"/>
+                <a:cs typeface="Calibri" pitchFamily="34" charset="-120"/>
+              </a:rPr>
+              <a:t>5</a:t>
+            </a:r>
+            <a:endParaRPr lang="en-US" sz="700" dirty="0"/>
+          </a:p>
+        </p:txBody>
+      </p:sp>
+      <p:sp>
+        <p:nvSpPr>
+          <p:cNvPr id="183" name="Text 79">
+            <a:extLst>
+              <a:ext uri="{FF2B5EF4-FFF2-40B4-BE49-F238E27FC236}">
+                <a16:creationId xmlns:a16="http://schemas.microsoft.com/office/drawing/2014/main" id="{E4F06ADB-7BF0-3D12-58CC-97FB59F94B8A}"/>
+              </a:ext>
+            </a:extLst>
+          </p:cNvPr>
+          <p:cNvSpPr/>
+          <p:nvPr/>
+        </p:nvSpPr>
+        <p:spPr>
+          <a:xfrm>
+            <a:off x="585216" y="5640299"/>
+            <a:ext cx="8961120" cy="246888"/>
+          </a:xfrm>
+          <a:prstGeom prst="rect">
+            <a:avLst/>
+          </a:prstGeom>
+          <a:noFill/>
+          <a:ln/>
+        </p:spPr>
+        <p:txBody>
+          <a:bodyPr wrap="square" lIns="0" tIns="0" rIns="0" bIns="0" rtlCol="0" anchor="ctr"/>
+          <a:lstStyle/>
+          <a:p>
+            <a:pPr marL="0" indent="0">
+              <a:buNone/>
+            </a:pPr>
+            <a:r>
+              <a:rPr lang="en-US" sz="950" b="1" dirty="0">
+                <a:solidFill>
+                  <a:srgbClr val="111111"/>
+                </a:solidFill>
+                <a:latin typeface="Calibri" pitchFamily="34" charset="0"/>
+                <a:ea typeface="Calibri" pitchFamily="34" charset="-122"/>
+                <a:cs typeface="Calibri" pitchFamily="34" charset="-120"/>
+              </a:rPr>
+              <a:t>The Concept of SPA – Navigating Around using React Router</a:t>
+            </a:r>
+            <a:endParaRPr lang="en-US" sz="950" dirty="0"/>
+          </a:p>
+        </p:txBody>
+      </p:sp>
+      <p:sp>
+        <p:nvSpPr>
+          <p:cNvPr id="184" name="Text 80">
+            <a:extLst>
+              <a:ext uri="{FF2B5EF4-FFF2-40B4-BE49-F238E27FC236}">
+                <a16:creationId xmlns:a16="http://schemas.microsoft.com/office/drawing/2014/main" id="{2BAA7B8B-8E3C-F0D6-0646-6236319D915C}"/>
+              </a:ext>
+            </a:extLst>
+          </p:cNvPr>
+          <p:cNvSpPr/>
+          <p:nvPr/>
+        </p:nvSpPr>
+        <p:spPr>
+          <a:xfrm>
+            <a:off x="9619488" y="5640299"/>
+            <a:ext cx="2011680" cy="246888"/>
+          </a:xfrm>
+          <a:prstGeom prst="rect">
+            <a:avLst/>
+          </a:prstGeom>
+          <a:noFill/>
+          <a:ln/>
+        </p:spPr>
+        <p:txBody>
+          <a:bodyPr wrap="square" lIns="0" tIns="0" rIns="0" bIns="0" rtlCol="0" anchor="ctr"/>
+          <a:lstStyle/>
+          <a:p>
+            <a:pPr marL="0" indent="0" algn="r">
+              <a:buNone/>
+            </a:pPr>
+            <a:r>
+              <a:rPr lang="en-US" sz="900" b="1" dirty="0">
+                <a:solidFill>
+                  <a:srgbClr val="2D6247"/>
+                </a:solidFill>
+                <a:latin typeface="Calibri" pitchFamily="34" charset="0"/>
+                <a:ea typeface="Calibri" pitchFamily="34" charset="-122"/>
+                <a:cs typeface="Calibri" pitchFamily="34" charset="-120"/>
+              </a:rPr>
+              <a:t>~10 min</a:t>
+            </a:r>
+            <a:endParaRPr lang="en-US" sz="900" dirty="0"/>
+          </a:p>
+        </p:txBody>
+      </p:sp>
+      <p:sp>
+        <p:nvSpPr>
+          <p:cNvPr id="185" name="Shape 81">
+            <a:extLst>
+              <a:ext uri="{FF2B5EF4-FFF2-40B4-BE49-F238E27FC236}">
+                <a16:creationId xmlns:a16="http://schemas.microsoft.com/office/drawing/2014/main" id="{6B57FD7A-B3DE-B75E-F099-8E3217CCCC11}"/>
+              </a:ext>
+            </a:extLst>
+          </p:cNvPr>
+          <p:cNvSpPr/>
+          <p:nvPr/>
+        </p:nvSpPr>
+        <p:spPr>
+          <a:xfrm>
+            <a:off x="246888" y="5887187"/>
+            <a:ext cx="11521440" cy="246888"/>
+          </a:xfrm>
+          <a:prstGeom prst="rect">
+            <a:avLst/>
+          </a:prstGeom>
+          <a:solidFill>
+            <a:srgbClr val="EAF0EA"/>
+          </a:solidFill>
+          <a:ln w="6350">
+            <a:solidFill>
+              <a:srgbClr val="E8E8E8"/>
+            </a:solidFill>
+            <a:prstDash val="solid"/>
+          </a:ln>
+        </p:spPr>
+        <p:txBody>
+          <a:bodyPr/>
+          <a:lstStyle/>
+          <a:p>
+            <a:endParaRPr lang="en-PH"/>
+          </a:p>
+        </p:txBody>
+      </p:sp>
+      <p:sp>
+        <p:nvSpPr>
+          <p:cNvPr id="186" name="Shape 82">
+            <a:extLst>
+              <a:ext uri="{FF2B5EF4-FFF2-40B4-BE49-F238E27FC236}">
+                <a16:creationId xmlns:a16="http://schemas.microsoft.com/office/drawing/2014/main" id="{C03CA043-C315-AAA8-5AF4-FBB325FDEBA0}"/>
+              </a:ext>
+            </a:extLst>
+          </p:cNvPr>
+          <p:cNvSpPr/>
+          <p:nvPr/>
+        </p:nvSpPr>
+        <p:spPr>
+          <a:xfrm>
+            <a:off x="347472" y="5928335"/>
+            <a:ext cx="164592" cy="164592"/>
+          </a:xfrm>
+          <a:prstGeom prst="ellipse">
+            <a:avLst/>
+          </a:prstGeom>
+          <a:solidFill>
+            <a:srgbClr val="2D6247"/>
+          </a:solidFill>
+          <a:ln w="12700">
+            <a:solidFill>
+              <a:srgbClr val="2D6247"/>
+            </a:solidFill>
+            <a:prstDash val="solid"/>
+          </a:ln>
+        </p:spPr>
+        <p:txBody>
+          <a:bodyPr/>
+          <a:lstStyle/>
+          <a:p>
+            <a:endParaRPr lang="en-PH"/>
+          </a:p>
+        </p:txBody>
+      </p:sp>
+      <p:sp>
+        <p:nvSpPr>
+          <p:cNvPr id="187" name="Text 83">
+            <a:extLst>
+              <a:ext uri="{FF2B5EF4-FFF2-40B4-BE49-F238E27FC236}">
+                <a16:creationId xmlns:a16="http://schemas.microsoft.com/office/drawing/2014/main" id="{234FB2D9-9625-2EF5-0537-240510D36B44}"/>
+              </a:ext>
+            </a:extLst>
+          </p:cNvPr>
+          <p:cNvSpPr/>
+          <p:nvPr/>
+        </p:nvSpPr>
+        <p:spPr>
+          <a:xfrm>
+            <a:off x="347472" y="5928335"/>
+            <a:ext cx="164592" cy="164592"/>
+          </a:xfrm>
+          <a:prstGeom prst="rect">
+            <a:avLst/>
+          </a:prstGeom>
+          <a:noFill/>
+          <a:ln/>
+        </p:spPr>
+        <p:txBody>
+          <a:bodyPr wrap="square" lIns="0" tIns="0" rIns="0" bIns="0" rtlCol="0" anchor="ctr"/>
+          <a:lstStyle/>
+          <a:p>
+            <a:pPr marL="0" indent="0" algn="ctr">
+              <a:buNone/>
+            </a:pPr>
+            <a:r>
+              <a:rPr lang="en-US" sz="700" b="1" dirty="0">
+                <a:solidFill>
+                  <a:srgbClr val="FFFFFF"/>
+                </a:solidFill>
+                <a:latin typeface="Calibri" pitchFamily="34" charset="0"/>
+                <a:ea typeface="Calibri" pitchFamily="34" charset="-122"/>
+                <a:cs typeface="Calibri" pitchFamily="34" charset="-120"/>
+              </a:rPr>
+              <a:t>6</a:t>
+            </a:r>
+            <a:endParaRPr lang="en-US" sz="700" dirty="0"/>
+          </a:p>
+        </p:txBody>
+      </p:sp>
+      <p:sp>
+        <p:nvSpPr>
+          <p:cNvPr id="188" name="Text 84">
+            <a:extLst>
+              <a:ext uri="{FF2B5EF4-FFF2-40B4-BE49-F238E27FC236}">
+                <a16:creationId xmlns:a16="http://schemas.microsoft.com/office/drawing/2014/main" id="{070DB528-0FFF-6DA4-2B12-7489FC1CBD5F}"/>
+              </a:ext>
+            </a:extLst>
+          </p:cNvPr>
+          <p:cNvSpPr/>
+          <p:nvPr/>
+        </p:nvSpPr>
+        <p:spPr>
+          <a:xfrm>
+            <a:off x="585216" y="5887187"/>
+            <a:ext cx="8961120" cy="246888"/>
+          </a:xfrm>
+          <a:prstGeom prst="rect">
+            <a:avLst/>
+          </a:prstGeom>
+          <a:noFill/>
+          <a:ln/>
+        </p:spPr>
+        <p:txBody>
+          <a:bodyPr wrap="square" lIns="0" tIns="0" rIns="0" bIns="0" rtlCol="0" anchor="ctr"/>
+          <a:lstStyle/>
+          <a:p>
+            <a:pPr marL="0" indent="0">
+              <a:buNone/>
+            </a:pPr>
+            <a:r>
+              <a:rPr lang="en-US" sz="950" b="1" dirty="0">
+                <a:solidFill>
+                  <a:srgbClr val="111111"/>
+                </a:solidFill>
+                <a:latin typeface="Calibri" pitchFamily="34" charset="0"/>
+                <a:ea typeface="Calibri" pitchFamily="34" charset="-122"/>
+                <a:cs typeface="Calibri" pitchFamily="34" charset="-120"/>
+              </a:rPr>
+              <a:t>Getting Inputs with Forms</a:t>
+            </a:r>
+            <a:endParaRPr lang="en-US" sz="950" dirty="0"/>
+          </a:p>
+        </p:txBody>
+      </p:sp>
+      <p:sp>
+        <p:nvSpPr>
+          <p:cNvPr id="189" name="Text 85">
+            <a:extLst>
+              <a:ext uri="{FF2B5EF4-FFF2-40B4-BE49-F238E27FC236}">
+                <a16:creationId xmlns:a16="http://schemas.microsoft.com/office/drawing/2014/main" id="{61694661-D827-0223-490F-5DA881CB08B5}"/>
+              </a:ext>
+            </a:extLst>
+          </p:cNvPr>
+          <p:cNvSpPr/>
+          <p:nvPr/>
+        </p:nvSpPr>
+        <p:spPr>
+          <a:xfrm>
+            <a:off x="9619488" y="5887187"/>
+            <a:ext cx="2011680" cy="246888"/>
+          </a:xfrm>
+          <a:prstGeom prst="rect">
+            <a:avLst/>
+          </a:prstGeom>
+          <a:noFill/>
+          <a:ln/>
+        </p:spPr>
+        <p:txBody>
+          <a:bodyPr wrap="square" lIns="0" tIns="0" rIns="0" bIns="0" rtlCol="0" anchor="ctr"/>
+          <a:lstStyle/>
+          <a:p>
+            <a:pPr marL="0" indent="0" algn="r">
+              <a:buNone/>
+            </a:pPr>
+            <a:r>
+              <a:rPr lang="en-US" sz="900" b="1" dirty="0">
+                <a:solidFill>
+                  <a:srgbClr val="2D6247"/>
+                </a:solidFill>
+                <a:latin typeface="Calibri" pitchFamily="34" charset="0"/>
+                <a:ea typeface="Calibri" pitchFamily="34" charset="-122"/>
+                <a:cs typeface="Calibri" pitchFamily="34" charset="-120"/>
+              </a:rPr>
+              <a:t>~10 min</a:t>
+            </a:r>
+            <a:endParaRPr lang="en-US" sz="900" dirty="0"/>
+          </a:p>
+        </p:txBody>
+      </p:sp>
+      <p:sp>
+        <p:nvSpPr>
+          <p:cNvPr id="190" name="Shape 86">
+            <a:extLst>
+              <a:ext uri="{FF2B5EF4-FFF2-40B4-BE49-F238E27FC236}">
+                <a16:creationId xmlns:a16="http://schemas.microsoft.com/office/drawing/2014/main" id="{DAC07EC1-6B8A-3008-CD67-F5D050037D46}"/>
+              </a:ext>
+            </a:extLst>
+          </p:cNvPr>
+          <p:cNvSpPr/>
+          <p:nvPr/>
+        </p:nvSpPr>
+        <p:spPr>
+          <a:xfrm>
+            <a:off x="246888" y="6198083"/>
+            <a:ext cx="11521440" cy="356616"/>
+          </a:xfrm>
+          <a:prstGeom prst="rect">
+            <a:avLst/>
+          </a:prstGeom>
+          <a:solidFill>
+            <a:srgbClr val="FFF3C4"/>
+          </a:solidFill>
+          <a:ln w="19050">
+            <a:solidFill>
+              <a:srgbClr val="E6B800"/>
+            </a:solidFill>
+            <a:prstDash val="solid"/>
+          </a:ln>
+        </p:spPr>
+        <p:txBody>
+          <a:bodyPr/>
+          <a:lstStyle/>
+          <a:p>
+            <a:endParaRPr lang="en-PH"/>
+          </a:p>
+        </p:txBody>
+      </p:sp>
+      <p:sp>
+        <p:nvSpPr>
+          <p:cNvPr id="191" name="Text 87">
+            <a:extLst>
+              <a:ext uri="{FF2B5EF4-FFF2-40B4-BE49-F238E27FC236}">
+                <a16:creationId xmlns:a16="http://schemas.microsoft.com/office/drawing/2014/main" id="{DAF1B15F-CDEC-241B-5417-124E37CFA58E}"/>
+              </a:ext>
+            </a:extLst>
+          </p:cNvPr>
+          <p:cNvSpPr/>
+          <p:nvPr/>
+        </p:nvSpPr>
+        <p:spPr>
+          <a:xfrm>
+            <a:off x="384048" y="6216371"/>
+            <a:ext cx="310896" cy="320040"/>
+          </a:xfrm>
+          <a:prstGeom prst="rect">
+            <a:avLst/>
+          </a:prstGeom>
+          <a:noFill/>
+          <a:ln/>
+        </p:spPr>
+        <p:txBody>
+          <a:bodyPr wrap="square" lIns="0" tIns="0" rIns="0" bIns="0" rtlCol="0" anchor="ctr"/>
+          <a:lstStyle/>
+          <a:p>
+            <a:pPr marL="0" indent="0" algn="ctr">
+              <a:buNone/>
+            </a:pPr>
+            <a:r>
+              <a:rPr lang="en-US" sz="1600" dirty="0">
+                <a:solidFill>
+                  <a:srgbClr val="000000"/>
+                </a:solidFill>
+              </a:rPr>
+              <a:t>☕</a:t>
+            </a:r>
+            <a:endParaRPr lang="en-US" sz="1600" dirty="0"/>
+          </a:p>
+        </p:txBody>
+      </p:sp>
+      <p:sp>
+        <p:nvSpPr>
+          <p:cNvPr id="192" name="Text 88">
+            <a:extLst>
+              <a:ext uri="{FF2B5EF4-FFF2-40B4-BE49-F238E27FC236}">
+                <a16:creationId xmlns:a16="http://schemas.microsoft.com/office/drawing/2014/main" id="{C71FFAE8-B5E9-5029-DDCE-D04322C9660A}"/>
+              </a:ext>
+            </a:extLst>
+          </p:cNvPr>
+          <p:cNvSpPr/>
+          <p:nvPr/>
+        </p:nvSpPr>
+        <p:spPr>
+          <a:xfrm>
+            <a:off x="749808" y="6207227"/>
+            <a:ext cx="4114800" cy="201168"/>
+          </a:xfrm>
+          <a:prstGeom prst="rect">
+            <a:avLst/>
+          </a:prstGeom>
+          <a:noFill/>
+          <a:ln/>
+        </p:spPr>
+        <p:txBody>
+          <a:bodyPr wrap="square" lIns="0" tIns="0" rIns="0" bIns="0" rtlCol="0" anchor="b"/>
+          <a:lstStyle/>
+          <a:p>
+            <a:pPr marL="0" indent="0">
+              <a:buNone/>
+            </a:pPr>
+            <a:r>
+              <a:rPr lang="en-US" sz="1100" b="1" dirty="0">
+                <a:solidFill>
+                  <a:srgbClr val="5A3D00"/>
+                </a:solidFill>
+                <a:latin typeface="Georgia" pitchFamily="34" charset="0"/>
+                <a:ea typeface="Georgia" pitchFamily="34" charset="-122"/>
+                <a:cs typeface="Georgia" pitchFamily="34" charset="-120"/>
+              </a:rPr>
+              <a:t>SHORT BREAK</a:t>
+            </a:r>
+            <a:endParaRPr lang="en-US" sz="1100" dirty="0"/>
+          </a:p>
+        </p:txBody>
+      </p:sp>
+      <p:sp>
+        <p:nvSpPr>
+          <p:cNvPr id="193" name="Text 89">
+            <a:extLst>
+              <a:ext uri="{FF2B5EF4-FFF2-40B4-BE49-F238E27FC236}">
+                <a16:creationId xmlns:a16="http://schemas.microsoft.com/office/drawing/2014/main" id="{3AA6E5AE-CA43-6EF8-8CD8-B28F39838CBB}"/>
+              </a:ext>
+            </a:extLst>
+          </p:cNvPr>
+          <p:cNvSpPr/>
+          <p:nvPr/>
+        </p:nvSpPr>
+        <p:spPr>
+          <a:xfrm>
+            <a:off x="749808" y="6399251"/>
+            <a:ext cx="5486400" cy="137160"/>
+          </a:xfrm>
+          <a:prstGeom prst="rect">
+            <a:avLst/>
+          </a:prstGeom>
+          <a:noFill/>
+          <a:ln/>
+        </p:spPr>
+        <p:txBody>
+          <a:bodyPr wrap="square" lIns="0" tIns="0" rIns="0" bIns="0" rtlCol="0" anchor="t"/>
+          <a:lstStyle/>
+          <a:p>
+            <a:pPr marL="0" indent="0">
+              <a:buNone/>
+            </a:pPr>
+            <a:r>
+              <a:rPr lang="en-US" sz="750" i="1" dirty="0">
+                <a:solidFill>
+                  <a:srgbClr val="8A6010"/>
+                </a:solidFill>
+                <a:latin typeface="Calibri" pitchFamily="34" charset="0"/>
+                <a:ea typeface="Calibri" pitchFamily="34" charset="-122"/>
+                <a:cs typeface="Calibri" pitchFamily="34" charset="-120"/>
+              </a:rPr>
+              <a:t>Refreshments  ·  Restroom  ·  Informal Q&amp;A</a:t>
+            </a:r>
+            <a:endParaRPr lang="en-US" sz="750" dirty="0"/>
+          </a:p>
+        </p:txBody>
+      </p:sp>
+      <p:sp>
+        <p:nvSpPr>
+          <p:cNvPr id="194" name="Text 90">
+            <a:extLst>
+              <a:ext uri="{FF2B5EF4-FFF2-40B4-BE49-F238E27FC236}">
+                <a16:creationId xmlns:a16="http://schemas.microsoft.com/office/drawing/2014/main" id="{32FAB42F-6EB4-DCA0-73A4-88BABC4431F2}"/>
+              </a:ext>
+            </a:extLst>
+          </p:cNvPr>
+          <p:cNvSpPr/>
+          <p:nvPr/>
+        </p:nvSpPr>
+        <p:spPr>
+          <a:xfrm>
+            <a:off x="8613648" y="6198083"/>
+            <a:ext cx="2926080" cy="356616"/>
+          </a:xfrm>
+          <a:prstGeom prst="rect">
+            <a:avLst/>
+          </a:prstGeom>
+          <a:noFill/>
+          <a:ln/>
+        </p:spPr>
+        <p:txBody>
+          <a:bodyPr wrap="square" lIns="0" tIns="0" rIns="0" bIns="0" rtlCol="0" anchor="ctr"/>
+          <a:lstStyle/>
+          <a:p>
+            <a:pPr marL="0" indent="0" algn="r">
+              <a:buNone/>
+            </a:pPr>
+            <a:r>
+              <a:rPr lang="en-US" sz="900" b="1" dirty="0">
+                <a:solidFill>
+                  <a:srgbClr val="5A3D00"/>
+                </a:solidFill>
+                <a:latin typeface="Calibri" pitchFamily="34" charset="0"/>
+                <a:ea typeface="Calibri" pitchFamily="34" charset="-122"/>
+                <a:cs typeface="Calibri" pitchFamily="34" charset="-120"/>
+              </a:rPr>
+              <a:t> ~15 min</a:t>
+            </a:r>
+            <a:endParaRPr lang="en-US" sz="900" dirty="0"/>
+          </a:p>
+        </p:txBody>
+      </p:sp>
+    </p:spTree>
+    <p:extLst>
+      <p:ext uri="{BB962C8B-B14F-4D97-AF65-F5344CB8AC3E}">
+        <p14:creationId xmlns:p14="http://schemas.microsoft.com/office/powerpoint/2010/main" val="45733274"/>
+      </p:ext>
+    </p:extLst>
+  </p:cSld>
+  <p:clrMapOvr>
+    <a:masterClrMapping/>
+  </p:clrMapOvr>
+</p:sld>
+</file>
+
+<file path=ppt/slides/slide4.xml><?xml version="1.0" encoding="utf-8"?>
+<p:sld xmlns:a="http://schemas.openxmlformats.org/drawingml/2006/main" xmlns:r="http://schemas.openxmlformats.org/officeDocument/2006/relationships" xmlns:p="http://schemas.openxmlformats.org/presentationml/2006/main">
+  <p:cSld>
+    <p:spTree>
+      <p:nvGrpSpPr>
+        <p:cNvPr id="1" name="">
+          <a:extLst>
+            <a:ext uri="{FF2B5EF4-FFF2-40B4-BE49-F238E27FC236}">
+              <a16:creationId xmlns:a16="http://schemas.microsoft.com/office/drawing/2014/main" id="{DB52883B-E7C1-9FB4-ECD7-188EBAF98BFD}"/>
+            </a:ext>
+          </a:extLst>
+        </p:cNvPr>
+        <p:cNvGrpSpPr/>
+        <p:nvPr/>
+      </p:nvGrpSpPr>
+      <p:grpSpPr>
+        <a:xfrm>
+          <a:off x="0" y="0"/>
+          <a:ext cx="0" cy="0"/>
+          <a:chOff x="0" y="0"/>
+          <a:chExt cx="0" cy="0"/>
+        </a:xfrm>
+      </p:grpSpPr>
+      <p:sp>
+        <p:nvSpPr>
+          <p:cNvPr id="2" name="TextBox 1">
+            <a:extLst>
+              <a:ext uri="{FF2B5EF4-FFF2-40B4-BE49-F238E27FC236}">
+                <a16:creationId xmlns:a16="http://schemas.microsoft.com/office/drawing/2014/main" id="{7074C19C-D2A3-D01A-03B3-33B59192E557}"/>
+              </a:ext>
+            </a:extLst>
+          </p:cNvPr>
+          <p:cNvSpPr txBox="1"/>
+          <p:nvPr/>
+        </p:nvSpPr>
+        <p:spPr>
+          <a:xfrm>
+            <a:off x="106490" y="126682"/>
+            <a:ext cx="1444370" cy="276999"/>
+          </a:xfrm>
+          <a:prstGeom prst="rect">
+            <a:avLst/>
+          </a:prstGeom>
+          <a:noFill/>
+        </p:spPr>
+        <p:txBody>
+          <a:bodyPr wrap="none" rtlCol="0">
+            <a:spAutoFit/>
+          </a:bodyPr>
+          <a:lstStyle/>
+          <a:p>
+            <a:r>
+              <a:rPr lang="en-US" sz="1200" dirty="0">
+                <a:latin typeface="+mj-lt"/>
+              </a:rPr>
+              <a:t>REACT WORKSHOP</a:t>
+            </a:r>
+            <a:endParaRPr lang="en-PH" sz="1200" dirty="0">
+              <a:latin typeface="+mj-lt"/>
+            </a:endParaRPr>
+          </a:p>
+        </p:txBody>
+      </p:sp>
+      <p:pic>
+        <p:nvPicPr>
+          <p:cNvPr id="4" name="Picture 3">
+            <a:extLst>
+              <a:ext uri="{FF2B5EF4-FFF2-40B4-BE49-F238E27FC236}">
+                <a16:creationId xmlns:a16="http://schemas.microsoft.com/office/drawing/2014/main" id="{75CBE545-6DEE-1EF9-F7C9-BBDA03E465DE}"/>
+              </a:ext>
+            </a:extLst>
+          </p:cNvPr>
+          <p:cNvPicPr>
+            <a:picLocks noChangeAspect="1"/>
+          </p:cNvPicPr>
+          <p:nvPr/>
+        </p:nvPicPr>
+        <p:blipFill>
+          <a:blip r:embed="rId2">
+            <a:extLst>
+              <a:ext uri="{28A0092B-C50C-407E-A947-70E740481C1C}">
+                <a14:useLocalDpi xmlns:a14="http://schemas.microsoft.com/office/drawing/2010/main" val="0"/>
+              </a:ext>
+            </a:extLst>
+          </a:blip>
+          <a:stretch>
+            <a:fillRect/>
+          </a:stretch>
+        </p:blipFill>
+        <p:spPr>
+          <a:xfrm>
+            <a:off x="11305222" y="130398"/>
+            <a:ext cx="780288" cy="723333"/>
+          </a:xfrm>
+          <a:prstGeom prst="rect">
+            <a:avLst/>
+          </a:prstGeom>
+        </p:spPr>
+      </p:pic>
+      <p:sp>
+        <p:nvSpPr>
+          <p:cNvPr id="5" name="TextBox 4">
+            <a:extLst>
+              <a:ext uri="{FF2B5EF4-FFF2-40B4-BE49-F238E27FC236}">
+                <a16:creationId xmlns:a16="http://schemas.microsoft.com/office/drawing/2014/main" id="{68267EF8-C6D6-4FB9-24D3-F521647F0060}"/>
+              </a:ext>
+            </a:extLst>
+          </p:cNvPr>
+          <p:cNvSpPr txBox="1"/>
+          <p:nvPr/>
+        </p:nvSpPr>
+        <p:spPr>
+          <a:xfrm>
+            <a:off x="4079358" y="126682"/>
+            <a:ext cx="4033284" cy="461665"/>
+          </a:xfrm>
+          <a:prstGeom prst="rect">
+            <a:avLst/>
+          </a:prstGeom>
+          <a:noFill/>
+        </p:spPr>
+        <p:txBody>
+          <a:bodyPr wrap="none" rtlCol="0">
+            <a:spAutoFit/>
+          </a:bodyPr>
+          <a:lstStyle/>
+          <a:p>
+            <a:pPr algn="ctr"/>
+            <a:r>
+              <a:rPr lang="en-US" sz="1200" b="1" dirty="0">
+                <a:latin typeface="+mj-lt"/>
+              </a:rPr>
+              <a:t>REACT ESSENTIALS:</a:t>
+            </a:r>
+          </a:p>
+          <a:p>
+            <a:pPr algn="ctr"/>
+            <a:r>
+              <a:rPr lang="en-US" sz="1200" b="1" dirty="0">
+                <a:latin typeface="+mj-lt"/>
+              </a:rPr>
+              <a:t>BUILDING INTERACTIVE WEB APPLICATIONS WITH APIs</a:t>
+            </a:r>
+            <a:endParaRPr lang="en-PH" sz="1200" b="1" dirty="0">
+              <a:latin typeface="+mj-lt"/>
+            </a:endParaRPr>
+          </a:p>
+        </p:txBody>
+      </p:sp>
+      <p:cxnSp>
+        <p:nvCxnSpPr>
+          <p:cNvPr id="10" name="Straight Connector 9">
+            <a:extLst>
+              <a:ext uri="{FF2B5EF4-FFF2-40B4-BE49-F238E27FC236}">
+                <a16:creationId xmlns:a16="http://schemas.microsoft.com/office/drawing/2014/main" id="{3842D37F-0955-B4F1-E30E-FCD10CF7B58A}"/>
+              </a:ext>
+            </a:extLst>
+          </p:cNvPr>
+          <p:cNvCxnSpPr>
+            <a:cxnSpLocks/>
+          </p:cNvCxnSpPr>
+          <p:nvPr/>
+        </p:nvCxnSpPr>
+        <p:spPr>
+          <a:xfrm>
+            <a:off x="246888" y="615779"/>
+            <a:ext cx="10991088" cy="0"/>
+          </a:xfrm>
+          <a:prstGeom prst="line">
+            <a:avLst/>
+          </a:prstGeom>
+        </p:spPr>
+        <p:style>
+          <a:lnRef idx="2">
+            <a:schemeClr val="accent1"/>
+          </a:lnRef>
+          <a:fillRef idx="0">
+            <a:schemeClr val="accent1"/>
+          </a:fillRef>
+          <a:effectRef idx="1">
+            <a:schemeClr val="accent1"/>
+          </a:effectRef>
+          <a:fontRef idx="minor">
+            <a:schemeClr val="tx1"/>
+          </a:fontRef>
+        </p:style>
+      </p:cxnSp>
+      <p:sp>
+        <p:nvSpPr>
+          <p:cNvPr id="15" name="TextBox 14">
+            <a:extLst>
+              <a:ext uri="{FF2B5EF4-FFF2-40B4-BE49-F238E27FC236}">
+                <a16:creationId xmlns:a16="http://schemas.microsoft.com/office/drawing/2014/main" id="{860F5A34-0D69-B079-9AB8-A9C7E3B484BD}"/>
+              </a:ext>
+            </a:extLst>
+          </p:cNvPr>
+          <p:cNvSpPr txBox="1"/>
+          <p:nvPr/>
+        </p:nvSpPr>
+        <p:spPr>
+          <a:xfrm>
+            <a:off x="246888" y="711791"/>
+            <a:ext cx="3280322" cy="461665"/>
+          </a:xfrm>
+          <a:prstGeom prst="rect">
+            <a:avLst/>
+          </a:prstGeom>
+          <a:noFill/>
+        </p:spPr>
+        <p:txBody>
+          <a:bodyPr wrap="none" rtlCol="0">
+            <a:spAutoFit/>
+          </a:bodyPr>
+          <a:lstStyle/>
+          <a:p>
+            <a:r>
+              <a:rPr lang="en-US" sz="2400" dirty="0">
+                <a:latin typeface="Aptos Black" panose="020B0004020202020204" pitchFamily="34" charset="0"/>
+              </a:rPr>
+              <a:t>WORKSHOP </a:t>
+            </a:r>
+            <a:r>
+              <a:rPr lang="en-US" sz="2400" dirty="0">
+                <a:solidFill>
+                  <a:schemeClr val="tx1">
+                    <a:lumMod val="50000"/>
+                    <a:lumOff val="50000"/>
+                  </a:schemeClr>
+                </a:solidFill>
+                <a:latin typeface="Aptos Black" panose="020B0004020202020204" pitchFamily="34" charset="0"/>
+              </a:rPr>
+              <a:t>OUTLINE</a:t>
+            </a:r>
+            <a:endParaRPr lang="en-PH" sz="2400" dirty="0">
+              <a:solidFill>
+                <a:schemeClr val="tx1">
+                  <a:lumMod val="50000"/>
+                  <a:lumOff val="50000"/>
+                </a:schemeClr>
+              </a:solidFill>
+              <a:latin typeface="Aptos Black" panose="020B0004020202020204" pitchFamily="34" charset="0"/>
+            </a:endParaRPr>
+          </a:p>
+        </p:txBody>
+      </p:sp>
+      <p:sp>
+        <p:nvSpPr>
+          <p:cNvPr id="20" name="TextBox 19">
+            <a:extLst>
+              <a:ext uri="{FF2B5EF4-FFF2-40B4-BE49-F238E27FC236}">
+                <a16:creationId xmlns:a16="http://schemas.microsoft.com/office/drawing/2014/main" id="{ACBCE6E5-3FBC-E4EA-5E1A-AAC89E2427E0}"/>
+              </a:ext>
+            </a:extLst>
+          </p:cNvPr>
+          <p:cNvSpPr txBox="1"/>
+          <p:nvPr/>
+        </p:nvSpPr>
+        <p:spPr>
+          <a:xfrm>
+            <a:off x="9328872" y="129474"/>
+            <a:ext cx="2025426" cy="276999"/>
+          </a:xfrm>
+          <a:prstGeom prst="rect">
+            <a:avLst/>
+          </a:prstGeom>
+          <a:noFill/>
+        </p:spPr>
+        <p:txBody>
+          <a:bodyPr wrap="none" rtlCol="0">
+            <a:spAutoFit/>
+          </a:bodyPr>
+          <a:lstStyle/>
+          <a:p>
+            <a:r>
+              <a:rPr lang="en-US" sz="1200" dirty="0">
+                <a:latin typeface="+mj-lt"/>
+              </a:rPr>
+              <a:t>First City Providential College </a:t>
+            </a:r>
+            <a:endParaRPr lang="en-PH" sz="1200" dirty="0">
+              <a:latin typeface="+mj-lt"/>
+            </a:endParaRPr>
+          </a:p>
+        </p:txBody>
+      </p:sp>
+      <p:sp>
+        <p:nvSpPr>
+          <p:cNvPr id="7" name="Shape 4">
+            <a:extLst>
+              <a:ext uri="{FF2B5EF4-FFF2-40B4-BE49-F238E27FC236}">
+                <a16:creationId xmlns:a16="http://schemas.microsoft.com/office/drawing/2014/main" id="{9BA08435-FCD2-D3FD-660C-36FB1A667803}"/>
+              </a:ext>
+            </a:extLst>
+          </p:cNvPr>
+          <p:cNvSpPr/>
+          <p:nvPr/>
+        </p:nvSpPr>
+        <p:spPr>
+          <a:xfrm>
+            <a:off x="335280" y="1173456"/>
+            <a:ext cx="11521440" cy="438912"/>
+          </a:xfrm>
+          <a:prstGeom prst="rect">
+            <a:avLst/>
+          </a:prstGeom>
+          <a:solidFill>
+            <a:srgbClr val="1C2C4A"/>
+          </a:solidFill>
+          <a:ln w="12700">
+            <a:solidFill>
+              <a:srgbClr val="1C2C4A"/>
+            </a:solidFill>
+            <a:prstDash val="solid"/>
+          </a:ln>
+        </p:spPr>
+        <p:txBody>
+          <a:bodyPr/>
+          <a:lstStyle/>
+          <a:p>
+            <a:endParaRPr lang="en-PH"/>
+          </a:p>
+        </p:txBody>
+      </p:sp>
+      <p:sp>
+        <p:nvSpPr>
+          <p:cNvPr id="8" name="Shape 5">
+            <a:extLst>
+              <a:ext uri="{FF2B5EF4-FFF2-40B4-BE49-F238E27FC236}">
+                <a16:creationId xmlns:a16="http://schemas.microsoft.com/office/drawing/2014/main" id="{54378315-E223-9B3D-C866-1BBE393CF055}"/>
+              </a:ext>
+            </a:extLst>
+          </p:cNvPr>
+          <p:cNvSpPr/>
+          <p:nvPr/>
+        </p:nvSpPr>
+        <p:spPr>
+          <a:xfrm>
+            <a:off x="335280" y="1173456"/>
+            <a:ext cx="64008" cy="438912"/>
+          </a:xfrm>
+          <a:prstGeom prst="rect">
+            <a:avLst/>
+          </a:prstGeom>
+          <a:solidFill>
+            <a:srgbClr val="5B8CF5"/>
+          </a:solidFill>
+          <a:ln w="12700">
+            <a:solidFill>
+              <a:srgbClr val="5B8CF5"/>
+            </a:solidFill>
+            <a:prstDash val="solid"/>
+          </a:ln>
+        </p:spPr>
+        <p:txBody>
+          <a:bodyPr/>
+          <a:lstStyle/>
+          <a:p>
+            <a:endParaRPr lang="en-PH"/>
+          </a:p>
+        </p:txBody>
+      </p:sp>
+      <p:sp>
+        <p:nvSpPr>
+          <p:cNvPr id="9" name="Text 6">
+            <a:extLst>
+              <a:ext uri="{FF2B5EF4-FFF2-40B4-BE49-F238E27FC236}">
+                <a16:creationId xmlns:a16="http://schemas.microsoft.com/office/drawing/2014/main" id="{1207A5C1-1BB3-31B0-73E2-7ACC2B49F55F}"/>
+              </a:ext>
+            </a:extLst>
+          </p:cNvPr>
+          <p:cNvSpPr/>
+          <p:nvPr/>
+        </p:nvSpPr>
+        <p:spPr>
+          <a:xfrm>
+            <a:off x="445008" y="1173456"/>
+            <a:ext cx="502920" cy="438912"/>
+          </a:xfrm>
+          <a:prstGeom prst="rect">
+            <a:avLst/>
+          </a:prstGeom>
+          <a:noFill/>
+          <a:ln/>
+        </p:spPr>
+        <p:txBody>
+          <a:bodyPr wrap="square" lIns="0" tIns="0" rIns="0" bIns="0" rtlCol="0" anchor="ctr"/>
+          <a:lstStyle/>
+          <a:p>
+            <a:pPr marL="0" indent="0" algn="ctr">
+              <a:buNone/>
+            </a:pPr>
+            <a:r>
+              <a:rPr lang="en-US" sz="2600" b="1" dirty="0">
+                <a:solidFill>
+                  <a:srgbClr val="FFFFFF">
+                    <a:alpha val="35000"/>
+                  </a:srgbClr>
+                </a:solidFill>
+                <a:latin typeface="Georgia" pitchFamily="34" charset="0"/>
+                <a:ea typeface="Georgia" pitchFamily="34" charset="-122"/>
+                <a:cs typeface="Georgia" pitchFamily="34" charset="-120"/>
+              </a:rPr>
+              <a:t>II</a:t>
+            </a:r>
+            <a:endParaRPr lang="en-US" sz="2600" dirty="0"/>
+          </a:p>
+        </p:txBody>
+      </p:sp>
+      <p:sp>
+        <p:nvSpPr>
+          <p:cNvPr id="11" name="Text 7">
+            <a:extLst>
+              <a:ext uri="{FF2B5EF4-FFF2-40B4-BE49-F238E27FC236}">
+                <a16:creationId xmlns:a16="http://schemas.microsoft.com/office/drawing/2014/main" id="{FA035B89-79EA-BDCE-1D28-C1F14FDDADC5}"/>
+              </a:ext>
+            </a:extLst>
+          </p:cNvPr>
+          <p:cNvSpPr/>
+          <p:nvPr/>
+        </p:nvSpPr>
+        <p:spPr>
+          <a:xfrm>
+            <a:off x="993648" y="1254639"/>
+            <a:ext cx="5486400" cy="256032"/>
+          </a:xfrm>
+          <a:prstGeom prst="rect">
+            <a:avLst/>
+          </a:prstGeom>
+          <a:noFill/>
+          <a:ln/>
+        </p:spPr>
+        <p:txBody>
+          <a:bodyPr wrap="square" lIns="0" tIns="0" rIns="0" bIns="0" rtlCol="0" anchor="b"/>
+          <a:lstStyle/>
+          <a:p>
+            <a:pPr marL="0" indent="0">
+              <a:buNone/>
+            </a:pPr>
+            <a:r>
+              <a:rPr lang="en-US" sz="1400" b="1" dirty="0">
+                <a:solidFill>
+                  <a:srgbClr val="FFFFFF"/>
+                </a:solidFill>
+                <a:latin typeface="Calibri" pitchFamily="34" charset="0"/>
+                <a:ea typeface="Calibri" pitchFamily="34" charset="-122"/>
+                <a:cs typeface="Calibri" pitchFamily="34" charset="-120"/>
+              </a:rPr>
+              <a:t>Backend Development</a:t>
+            </a:r>
+            <a:endParaRPr lang="en-US" sz="1400" dirty="0"/>
+          </a:p>
+        </p:txBody>
+      </p:sp>
+      <p:sp>
+        <p:nvSpPr>
+          <p:cNvPr id="14" name="Shape 9">
+            <a:extLst>
+              <a:ext uri="{FF2B5EF4-FFF2-40B4-BE49-F238E27FC236}">
+                <a16:creationId xmlns:a16="http://schemas.microsoft.com/office/drawing/2014/main" id="{3E26E4A1-E396-2EE6-F054-79FCC9128F6C}"/>
+              </a:ext>
+            </a:extLst>
+          </p:cNvPr>
+          <p:cNvSpPr/>
+          <p:nvPr/>
+        </p:nvSpPr>
+        <p:spPr>
+          <a:xfrm>
+            <a:off x="10210800" y="1264896"/>
+            <a:ext cx="1508760" cy="246888"/>
+          </a:xfrm>
+          <a:prstGeom prst="rect">
+            <a:avLst/>
+          </a:prstGeom>
+          <a:solidFill>
+            <a:srgbClr val="5B8CF5"/>
+          </a:solidFill>
+          <a:ln w="12700">
+            <a:solidFill>
+              <a:srgbClr val="5B8CF5"/>
+            </a:solidFill>
+            <a:prstDash val="solid"/>
+          </a:ln>
+        </p:spPr>
+        <p:txBody>
+          <a:bodyPr/>
+          <a:lstStyle/>
+          <a:p>
+            <a:endParaRPr lang="en-PH"/>
+          </a:p>
+        </p:txBody>
+      </p:sp>
+      <p:sp>
+        <p:nvSpPr>
+          <p:cNvPr id="16" name="Text 10">
+            <a:extLst>
+              <a:ext uri="{FF2B5EF4-FFF2-40B4-BE49-F238E27FC236}">
+                <a16:creationId xmlns:a16="http://schemas.microsoft.com/office/drawing/2014/main" id="{2852C044-E64C-C8C0-845C-764726463000}"/>
+              </a:ext>
+            </a:extLst>
+          </p:cNvPr>
+          <p:cNvSpPr/>
+          <p:nvPr/>
+        </p:nvSpPr>
+        <p:spPr>
+          <a:xfrm>
+            <a:off x="10210800" y="1264896"/>
+            <a:ext cx="1508760" cy="246888"/>
+          </a:xfrm>
+          <a:prstGeom prst="rect">
+            <a:avLst/>
+          </a:prstGeom>
+          <a:noFill/>
+          <a:ln/>
+        </p:spPr>
+        <p:txBody>
+          <a:bodyPr wrap="square" lIns="0" tIns="0" rIns="0" bIns="0" rtlCol="0" anchor="ctr"/>
+          <a:lstStyle/>
+          <a:p>
+            <a:pPr marL="0" indent="0" algn="ctr">
+              <a:buNone/>
+            </a:pPr>
+            <a:r>
+              <a:rPr lang="en-US" sz="900" b="1" dirty="0">
+                <a:solidFill>
+                  <a:srgbClr val="1C2C4A"/>
+                </a:solidFill>
+                <a:latin typeface="Calibri" pitchFamily="34" charset="0"/>
+                <a:ea typeface="Calibri" pitchFamily="34" charset="-122"/>
+                <a:cs typeface="Calibri" pitchFamily="34" charset="-120"/>
+              </a:rPr>
+              <a:t>~2 HOURS</a:t>
+            </a:r>
+            <a:endParaRPr lang="en-US" sz="900" dirty="0"/>
+          </a:p>
+        </p:txBody>
+      </p:sp>
+      <p:sp>
+        <p:nvSpPr>
+          <p:cNvPr id="17" name="Shape 11">
+            <a:extLst>
+              <a:ext uri="{FF2B5EF4-FFF2-40B4-BE49-F238E27FC236}">
+                <a16:creationId xmlns:a16="http://schemas.microsoft.com/office/drawing/2014/main" id="{FF166072-3E65-3753-0B6F-3ACADDEF77E1}"/>
+              </a:ext>
+            </a:extLst>
+          </p:cNvPr>
+          <p:cNvSpPr/>
+          <p:nvPr/>
+        </p:nvSpPr>
+        <p:spPr>
+          <a:xfrm>
+            <a:off x="345098" y="1739271"/>
+            <a:ext cx="11521440" cy="201168"/>
+          </a:xfrm>
+          <a:prstGeom prst="rect">
+            <a:avLst/>
+          </a:prstGeom>
+          <a:solidFill>
+            <a:srgbClr val="243558"/>
+          </a:solidFill>
+          <a:ln w="12700">
+            <a:solidFill>
+              <a:srgbClr val="243558"/>
+            </a:solidFill>
+            <a:prstDash val="solid"/>
+          </a:ln>
+        </p:spPr>
+        <p:txBody>
+          <a:bodyPr/>
+          <a:lstStyle/>
+          <a:p>
+            <a:endParaRPr lang="en-PH"/>
+          </a:p>
+        </p:txBody>
+      </p:sp>
+      <p:sp>
+        <p:nvSpPr>
+          <p:cNvPr id="18" name="Text 12">
+            <a:extLst>
+              <a:ext uri="{FF2B5EF4-FFF2-40B4-BE49-F238E27FC236}">
+                <a16:creationId xmlns:a16="http://schemas.microsoft.com/office/drawing/2014/main" id="{B9F6DD93-99B7-0D33-44E2-FA407943A491}"/>
+              </a:ext>
+            </a:extLst>
+          </p:cNvPr>
+          <p:cNvSpPr/>
+          <p:nvPr/>
+        </p:nvSpPr>
+        <p:spPr>
+          <a:xfrm>
+            <a:off x="482258" y="1739271"/>
+            <a:ext cx="9144000" cy="201168"/>
+          </a:xfrm>
+          <a:prstGeom prst="rect">
+            <a:avLst/>
+          </a:prstGeom>
+          <a:noFill/>
+          <a:ln/>
+        </p:spPr>
+        <p:txBody>
+          <a:bodyPr wrap="square" lIns="0" tIns="0" rIns="0" bIns="0" rtlCol="0" anchor="ctr"/>
+          <a:lstStyle/>
+          <a:p>
+            <a:pPr marL="0" indent="0">
+              <a:buNone/>
+            </a:pPr>
+            <a:r>
+              <a:rPr lang="en-US" sz="750" b="1" kern="0" spc="250" dirty="0">
+                <a:solidFill>
+                  <a:srgbClr val="B8CEF0"/>
+                </a:solidFill>
+                <a:latin typeface="Calibri" pitchFamily="34" charset="0"/>
+                <a:ea typeface="Calibri" pitchFamily="34" charset="-122"/>
+                <a:cs typeface="Calibri" pitchFamily="34" charset="-120"/>
+              </a:rPr>
+              <a:t>ACTIVITY</a:t>
+            </a:r>
+            <a:endParaRPr lang="en-US" sz="750" dirty="0"/>
+          </a:p>
+        </p:txBody>
+      </p:sp>
+      <p:sp>
+        <p:nvSpPr>
+          <p:cNvPr id="19" name="Text 13">
+            <a:extLst>
+              <a:ext uri="{FF2B5EF4-FFF2-40B4-BE49-F238E27FC236}">
+                <a16:creationId xmlns:a16="http://schemas.microsoft.com/office/drawing/2014/main" id="{E8D6E659-14CD-1E3F-302E-50635ED5CA46}"/>
+              </a:ext>
+            </a:extLst>
+          </p:cNvPr>
+          <p:cNvSpPr/>
+          <p:nvPr/>
+        </p:nvSpPr>
+        <p:spPr>
+          <a:xfrm>
+            <a:off x="9717698" y="1739271"/>
+            <a:ext cx="2011680" cy="201168"/>
+          </a:xfrm>
+          <a:prstGeom prst="rect">
+            <a:avLst/>
+          </a:prstGeom>
+          <a:noFill/>
+          <a:ln/>
+        </p:spPr>
+        <p:txBody>
+          <a:bodyPr wrap="square" lIns="0" tIns="0" rIns="0" bIns="0" rtlCol="0" anchor="ctr"/>
+          <a:lstStyle/>
+          <a:p>
+            <a:pPr marL="0" indent="0" algn="r">
+              <a:buNone/>
+            </a:pPr>
+            <a:r>
+              <a:rPr lang="en-US" sz="750" b="1" kern="0" spc="150" dirty="0">
+                <a:solidFill>
+                  <a:srgbClr val="B8CEF0"/>
+                </a:solidFill>
+                <a:latin typeface="Calibri" pitchFamily="34" charset="0"/>
+                <a:ea typeface="Calibri" pitchFamily="34" charset="-122"/>
+                <a:cs typeface="Calibri" pitchFamily="34" charset="-120"/>
+              </a:rPr>
+              <a:t>EST. DURATION</a:t>
+            </a:r>
+            <a:endParaRPr lang="en-US" sz="750" dirty="0"/>
+          </a:p>
+        </p:txBody>
+      </p:sp>
+      <p:sp>
+        <p:nvSpPr>
+          <p:cNvPr id="21" name="Shape 14">
+            <a:extLst>
+              <a:ext uri="{FF2B5EF4-FFF2-40B4-BE49-F238E27FC236}">
+                <a16:creationId xmlns:a16="http://schemas.microsoft.com/office/drawing/2014/main" id="{06FEB042-50B0-D3EF-62BB-AF2F64816365}"/>
+              </a:ext>
+            </a:extLst>
+          </p:cNvPr>
+          <p:cNvSpPr/>
+          <p:nvPr/>
+        </p:nvSpPr>
+        <p:spPr>
+          <a:xfrm>
+            <a:off x="345098" y="1940439"/>
+            <a:ext cx="11521440" cy="246888"/>
+          </a:xfrm>
+          <a:prstGeom prst="rect">
+            <a:avLst/>
+          </a:prstGeom>
+          <a:solidFill>
+            <a:srgbClr val="EEF2EE"/>
+          </a:solidFill>
+          <a:ln w="6350">
+            <a:solidFill>
+              <a:srgbClr val="E8E8E8"/>
+            </a:solidFill>
+            <a:prstDash val="solid"/>
+          </a:ln>
+        </p:spPr>
+        <p:txBody>
+          <a:bodyPr/>
+          <a:lstStyle/>
+          <a:p>
+            <a:endParaRPr lang="en-PH"/>
+          </a:p>
+        </p:txBody>
+      </p:sp>
+      <p:sp>
+        <p:nvSpPr>
+          <p:cNvPr id="22" name="Shape 15">
+            <a:extLst>
+              <a:ext uri="{FF2B5EF4-FFF2-40B4-BE49-F238E27FC236}">
+                <a16:creationId xmlns:a16="http://schemas.microsoft.com/office/drawing/2014/main" id="{57413F05-B667-8984-033D-60BED38D0410}"/>
+              </a:ext>
+            </a:extLst>
+          </p:cNvPr>
+          <p:cNvSpPr/>
+          <p:nvPr/>
+        </p:nvSpPr>
+        <p:spPr>
+          <a:xfrm>
+            <a:off x="445682" y="1981587"/>
+            <a:ext cx="164592" cy="164592"/>
+          </a:xfrm>
+          <a:prstGeom prst="ellipse">
+            <a:avLst/>
+          </a:prstGeom>
+          <a:solidFill>
+            <a:srgbClr val="2E4A7A"/>
+          </a:solidFill>
+          <a:ln w="12700">
+            <a:solidFill>
+              <a:srgbClr val="2E4A7A"/>
+            </a:solidFill>
+            <a:prstDash val="solid"/>
+          </a:ln>
+        </p:spPr>
+        <p:txBody>
+          <a:bodyPr/>
+          <a:lstStyle/>
+          <a:p>
+            <a:endParaRPr lang="en-PH"/>
+          </a:p>
+        </p:txBody>
+      </p:sp>
+      <p:sp>
+        <p:nvSpPr>
+          <p:cNvPr id="23" name="Text 16">
+            <a:extLst>
+              <a:ext uri="{FF2B5EF4-FFF2-40B4-BE49-F238E27FC236}">
+                <a16:creationId xmlns:a16="http://schemas.microsoft.com/office/drawing/2014/main" id="{6164C24B-E5D9-4585-0C5D-44894DF0DD18}"/>
+              </a:ext>
+            </a:extLst>
+          </p:cNvPr>
+          <p:cNvSpPr/>
+          <p:nvPr/>
+        </p:nvSpPr>
+        <p:spPr>
+          <a:xfrm>
+            <a:off x="445682" y="1981587"/>
+            <a:ext cx="164592" cy="164592"/>
+          </a:xfrm>
+          <a:prstGeom prst="rect">
+            <a:avLst/>
+          </a:prstGeom>
+          <a:noFill/>
+          <a:ln/>
+        </p:spPr>
+        <p:txBody>
+          <a:bodyPr wrap="square" lIns="0" tIns="0" rIns="0" bIns="0" rtlCol="0" anchor="ctr"/>
+          <a:lstStyle/>
+          <a:p>
+            <a:pPr marL="0" indent="0" algn="ctr">
+              <a:buNone/>
+            </a:pPr>
+            <a:r>
+              <a:rPr lang="en-US" sz="700" b="1" dirty="0">
+                <a:solidFill>
+                  <a:srgbClr val="FFFFFF"/>
+                </a:solidFill>
+                <a:latin typeface="Calibri" pitchFamily="34" charset="0"/>
+                <a:ea typeface="Calibri" pitchFamily="34" charset="-122"/>
+                <a:cs typeface="Calibri" pitchFamily="34" charset="-120"/>
+              </a:rPr>
+              <a:t>1</a:t>
+            </a:r>
+            <a:endParaRPr lang="en-US" sz="700" dirty="0"/>
+          </a:p>
+        </p:txBody>
+      </p:sp>
+      <p:sp>
+        <p:nvSpPr>
+          <p:cNvPr id="24" name="Text 17">
+            <a:extLst>
+              <a:ext uri="{FF2B5EF4-FFF2-40B4-BE49-F238E27FC236}">
+                <a16:creationId xmlns:a16="http://schemas.microsoft.com/office/drawing/2014/main" id="{EA94708D-D99E-C342-52E1-F2EB76A7CFE0}"/>
+              </a:ext>
+            </a:extLst>
+          </p:cNvPr>
+          <p:cNvSpPr/>
+          <p:nvPr/>
+        </p:nvSpPr>
+        <p:spPr>
+          <a:xfrm>
+            <a:off x="683426" y="1940439"/>
+            <a:ext cx="8961120" cy="246888"/>
+          </a:xfrm>
+          <a:prstGeom prst="rect">
+            <a:avLst/>
+          </a:prstGeom>
+          <a:noFill/>
+          <a:ln/>
+        </p:spPr>
+        <p:txBody>
+          <a:bodyPr wrap="square" lIns="0" tIns="0" rIns="0" bIns="0" rtlCol="0" anchor="ctr"/>
+          <a:lstStyle/>
+          <a:p>
+            <a:pPr marL="0" indent="0">
+              <a:buNone/>
+            </a:pPr>
+            <a:r>
+              <a:rPr lang="en-US" sz="950" b="1" dirty="0">
+                <a:solidFill>
+                  <a:srgbClr val="111111"/>
+                </a:solidFill>
+                <a:latin typeface="Calibri" pitchFamily="34" charset="0"/>
+                <a:ea typeface="Calibri" pitchFamily="34" charset="-122"/>
+                <a:cs typeface="Calibri" pitchFamily="34" charset="-120"/>
+              </a:rPr>
+              <a:t>Environment Setup for BACKEND</a:t>
+            </a:r>
+            <a:endParaRPr lang="en-US" sz="950" dirty="0"/>
+          </a:p>
+        </p:txBody>
+      </p:sp>
+      <p:sp>
+        <p:nvSpPr>
+          <p:cNvPr id="25" name="Text 18">
+            <a:extLst>
+              <a:ext uri="{FF2B5EF4-FFF2-40B4-BE49-F238E27FC236}">
+                <a16:creationId xmlns:a16="http://schemas.microsoft.com/office/drawing/2014/main" id="{118B6E7F-9A0C-2988-3960-CF71671957A1}"/>
+              </a:ext>
+            </a:extLst>
+          </p:cNvPr>
+          <p:cNvSpPr/>
+          <p:nvPr/>
+        </p:nvSpPr>
+        <p:spPr>
+          <a:xfrm>
+            <a:off x="9717698" y="1940439"/>
+            <a:ext cx="2011680" cy="246888"/>
+          </a:xfrm>
+          <a:prstGeom prst="rect">
+            <a:avLst/>
+          </a:prstGeom>
+          <a:noFill/>
+          <a:ln/>
+        </p:spPr>
+        <p:txBody>
+          <a:bodyPr wrap="square" lIns="0" tIns="0" rIns="0" bIns="0" rtlCol="0" anchor="ctr"/>
+          <a:lstStyle/>
+          <a:p>
+            <a:pPr marL="0" indent="0" algn="r">
+              <a:buNone/>
+            </a:pPr>
+            <a:r>
+              <a:rPr lang="en-US" sz="900" b="1" dirty="0">
+                <a:solidFill>
+                  <a:srgbClr val="2E4A7A"/>
+                </a:solidFill>
+                <a:latin typeface="Calibri" pitchFamily="34" charset="0"/>
+                <a:ea typeface="Calibri" pitchFamily="34" charset="-122"/>
+                <a:cs typeface="Calibri" pitchFamily="34" charset="-120"/>
+              </a:rPr>
+              <a:t>~15 min</a:t>
+            </a:r>
+            <a:endParaRPr lang="en-US" sz="900" dirty="0"/>
+          </a:p>
+        </p:txBody>
+      </p:sp>
+      <p:sp>
+        <p:nvSpPr>
+          <p:cNvPr id="26" name="Shape 19">
+            <a:extLst>
+              <a:ext uri="{FF2B5EF4-FFF2-40B4-BE49-F238E27FC236}">
+                <a16:creationId xmlns:a16="http://schemas.microsoft.com/office/drawing/2014/main" id="{5E6836D5-DBE4-A3FC-AE38-930E43ADEECA}"/>
+              </a:ext>
+            </a:extLst>
+          </p:cNvPr>
+          <p:cNvSpPr/>
+          <p:nvPr/>
+        </p:nvSpPr>
+        <p:spPr>
+          <a:xfrm>
+            <a:off x="345098" y="2187327"/>
+            <a:ext cx="11521440" cy="246888"/>
+          </a:xfrm>
+          <a:prstGeom prst="rect">
+            <a:avLst/>
+          </a:prstGeom>
+          <a:solidFill>
+            <a:srgbClr val="EAF0EA"/>
+          </a:solidFill>
+          <a:ln w="6350">
+            <a:solidFill>
+              <a:srgbClr val="E8E8E8"/>
+            </a:solidFill>
+            <a:prstDash val="solid"/>
+          </a:ln>
+        </p:spPr>
+        <p:txBody>
+          <a:bodyPr/>
+          <a:lstStyle/>
+          <a:p>
+            <a:endParaRPr lang="en-PH"/>
+          </a:p>
+        </p:txBody>
+      </p:sp>
+      <p:sp>
+        <p:nvSpPr>
+          <p:cNvPr id="27" name="Shape 20">
+            <a:extLst>
+              <a:ext uri="{FF2B5EF4-FFF2-40B4-BE49-F238E27FC236}">
+                <a16:creationId xmlns:a16="http://schemas.microsoft.com/office/drawing/2014/main" id="{653F8E81-69CA-1CC2-3C9C-CCD18BCC1989}"/>
+              </a:ext>
+            </a:extLst>
+          </p:cNvPr>
+          <p:cNvSpPr/>
+          <p:nvPr/>
+        </p:nvSpPr>
+        <p:spPr>
+          <a:xfrm>
+            <a:off x="445682" y="2228475"/>
+            <a:ext cx="164592" cy="164592"/>
+          </a:xfrm>
+          <a:prstGeom prst="ellipse">
+            <a:avLst/>
+          </a:prstGeom>
+          <a:solidFill>
+            <a:srgbClr val="2E4A7A"/>
+          </a:solidFill>
+          <a:ln w="12700">
+            <a:solidFill>
+              <a:srgbClr val="2E4A7A"/>
+            </a:solidFill>
+            <a:prstDash val="solid"/>
+          </a:ln>
+        </p:spPr>
+        <p:txBody>
+          <a:bodyPr/>
+          <a:lstStyle/>
+          <a:p>
+            <a:endParaRPr lang="en-PH"/>
+          </a:p>
+        </p:txBody>
+      </p:sp>
+      <p:sp>
+        <p:nvSpPr>
+          <p:cNvPr id="28" name="Text 21">
+            <a:extLst>
+              <a:ext uri="{FF2B5EF4-FFF2-40B4-BE49-F238E27FC236}">
+                <a16:creationId xmlns:a16="http://schemas.microsoft.com/office/drawing/2014/main" id="{8A7DD147-838E-C2AD-88E5-28140534333C}"/>
+              </a:ext>
+            </a:extLst>
+          </p:cNvPr>
+          <p:cNvSpPr/>
+          <p:nvPr/>
+        </p:nvSpPr>
+        <p:spPr>
+          <a:xfrm>
+            <a:off x="445682" y="2228475"/>
+            <a:ext cx="164592" cy="164592"/>
+          </a:xfrm>
+          <a:prstGeom prst="rect">
+            <a:avLst/>
+          </a:prstGeom>
+          <a:noFill/>
+          <a:ln/>
+        </p:spPr>
+        <p:txBody>
+          <a:bodyPr wrap="square" lIns="0" tIns="0" rIns="0" bIns="0" rtlCol="0" anchor="ctr"/>
+          <a:lstStyle/>
+          <a:p>
+            <a:pPr marL="0" indent="0" algn="ctr">
+              <a:buNone/>
+            </a:pPr>
+            <a:r>
+              <a:rPr lang="en-US" sz="700" b="1" dirty="0">
+                <a:solidFill>
+                  <a:srgbClr val="FFFFFF"/>
+                </a:solidFill>
+                <a:latin typeface="Calibri" pitchFamily="34" charset="0"/>
+                <a:ea typeface="Calibri" pitchFamily="34" charset="-122"/>
+                <a:cs typeface="Calibri" pitchFamily="34" charset="-120"/>
+              </a:rPr>
+              <a:t>2</a:t>
+            </a:r>
+            <a:endParaRPr lang="en-US" sz="700" dirty="0"/>
+          </a:p>
+        </p:txBody>
+      </p:sp>
+      <p:sp>
+        <p:nvSpPr>
+          <p:cNvPr id="29" name="Text 22">
+            <a:extLst>
+              <a:ext uri="{FF2B5EF4-FFF2-40B4-BE49-F238E27FC236}">
+                <a16:creationId xmlns:a16="http://schemas.microsoft.com/office/drawing/2014/main" id="{DB1DC1AF-A7E6-3B14-958B-8FB5185A1332}"/>
+              </a:ext>
+            </a:extLst>
+          </p:cNvPr>
+          <p:cNvSpPr/>
+          <p:nvPr/>
+        </p:nvSpPr>
+        <p:spPr>
+          <a:xfrm>
+            <a:off x="683426" y="2187327"/>
+            <a:ext cx="8961120" cy="246888"/>
+          </a:xfrm>
+          <a:prstGeom prst="rect">
+            <a:avLst/>
+          </a:prstGeom>
+          <a:noFill/>
+          <a:ln/>
+        </p:spPr>
+        <p:txBody>
+          <a:bodyPr wrap="square" lIns="0" tIns="0" rIns="0" bIns="0" rtlCol="0" anchor="ctr"/>
+          <a:lstStyle/>
+          <a:p>
+            <a:pPr marL="0" indent="0">
+              <a:buNone/>
+            </a:pPr>
+            <a:r>
+              <a:rPr lang="en-US" sz="950" b="1" dirty="0">
+                <a:solidFill>
+                  <a:srgbClr val="111111"/>
+                </a:solidFill>
+                <a:latin typeface="Calibri" pitchFamily="34" charset="0"/>
+                <a:ea typeface="Calibri" pitchFamily="34" charset="-122"/>
+                <a:cs typeface="Calibri" pitchFamily="34" charset="-120"/>
+              </a:rPr>
+              <a:t>Backend Fundamentals (&amp; Concepts)</a:t>
+            </a:r>
+            <a:endParaRPr lang="en-US" sz="950" dirty="0"/>
+          </a:p>
+        </p:txBody>
+      </p:sp>
+      <p:sp>
+        <p:nvSpPr>
+          <p:cNvPr id="30" name="Text 23">
+            <a:extLst>
+              <a:ext uri="{FF2B5EF4-FFF2-40B4-BE49-F238E27FC236}">
+                <a16:creationId xmlns:a16="http://schemas.microsoft.com/office/drawing/2014/main" id="{8C1A6426-DCF3-BC82-0BAF-60FC8B856DDF}"/>
+              </a:ext>
+            </a:extLst>
+          </p:cNvPr>
+          <p:cNvSpPr/>
+          <p:nvPr/>
+        </p:nvSpPr>
+        <p:spPr>
+          <a:xfrm>
+            <a:off x="9717698" y="2187327"/>
+            <a:ext cx="2011680" cy="246888"/>
+          </a:xfrm>
+          <a:prstGeom prst="rect">
+            <a:avLst/>
+          </a:prstGeom>
+          <a:noFill/>
+          <a:ln/>
+        </p:spPr>
+        <p:txBody>
+          <a:bodyPr wrap="square" lIns="0" tIns="0" rIns="0" bIns="0" rtlCol="0" anchor="ctr"/>
+          <a:lstStyle/>
+          <a:p>
+            <a:pPr marL="0" indent="0" algn="r">
+              <a:buNone/>
+            </a:pPr>
+            <a:r>
+              <a:rPr lang="en-US" sz="900" b="1" dirty="0">
+                <a:solidFill>
+                  <a:srgbClr val="2E4A7A"/>
+                </a:solidFill>
+                <a:latin typeface="Calibri" pitchFamily="34" charset="0"/>
+                <a:ea typeface="Calibri" pitchFamily="34" charset="-122"/>
+                <a:cs typeface="Calibri" pitchFamily="34" charset="-120"/>
+              </a:rPr>
+              <a:t>~35 min</a:t>
+            </a:r>
+            <a:endParaRPr lang="en-US" sz="900" dirty="0"/>
+          </a:p>
+        </p:txBody>
+      </p:sp>
+      <p:sp>
+        <p:nvSpPr>
+          <p:cNvPr id="31" name="Shape 24">
+            <a:extLst>
+              <a:ext uri="{FF2B5EF4-FFF2-40B4-BE49-F238E27FC236}">
+                <a16:creationId xmlns:a16="http://schemas.microsoft.com/office/drawing/2014/main" id="{62628071-D147-7B70-BF1D-E6AAFE23684B}"/>
+              </a:ext>
+            </a:extLst>
+          </p:cNvPr>
+          <p:cNvSpPr/>
+          <p:nvPr/>
+        </p:nvSpPr>
+        <p:spPr>
+          <a:xfrm>
+            <a:off x="345098" y="2434215"/>
+            <a:ext cx="11521440" cy="196596"/>
+          </a:xfrm>
+          <a:prstGeom prst="rect">
+            <a:avLst/>
+          </a:prstGeom>
+          <a:solidFill>
+            <a:srgbClr val="FAFAFA"/>
+          </a:solidFill>
+          <a:ln w="6350">
+            <a:solidFill>
+              <a:srgbClr val="E8E8E8"/>
+            </a:solidFill>
+            <a:prstDash val="solid"/>
+          </a:ln>
+        </p:spPr>
+        <p:txBody>
+          <a:bodyPr/>
+          <a:lstStyle/>
+          <a:p>
+            <a:endParaRPr lang="en-PH"/>
+          </a:p>
+        </p:txBody>
+      </p:sp>
+      <p:sp>
+        <p:nvSpPr>
+          <p:cNvPr id="32" name="Shape 25">
+            <a:extLst>
+              <a:ext uri="{FF2B5EF4-FFF2-40B4-BE49-F238E27FC236}">
+                <a16:creationId xmlns:a16="http://schemas.microsoft.com/office/drawing/2014/main" id="{4D575E4E-F040-DE95-2755-927BB0D348BD}"/>
+              </a:ext>
+            </a:extLst>
+          </p:cNvPr>
+          <p:cNvSpPr/>
+          <p:nvPr/>
+        </p:nvSpPr>
+        <p:spPr>
+          <a:xfrm>
+            <a:off x="793154" y="2498680"/>
+            <a:ext cx="67666" cy="67666"/>
+          </a:xfrm>
+          <a:prstGeom prst="ellipse">
+            <a:avLst/>
+          </a:prstGeom>
+          <a:solidFill>
+            <a:srgbClr val="5B8CF5"/>
+          </a:solidFill>
+          <a:ln w="12700">
+            <a:solidFill>
+              <a:srgbClr val="5B8CF5"/>
+            </a:solidFill>
+            <a:prstDash val="solid"/>
+          </a:ln>
+        </p:spPr>
+        <p:txBody>
+          <a:bodyPr/>
+          <a:lstStyle/>
+          <a:p>
+            <a:endParaRPr lang="en-PH"/>
+          </a:p>
+        </p:txBody>
+      </p:sp>
+      <p:sp>
+        <p:nvSpPr>
+          <p:cNvPr id="33" name="Text 26">
+            <a:extLst>
+              <a:ext uri="{FF2B5EF4-FFF2-40B4-BE49-F238E27FC236}">
+                <a16:creationId xmlns:a16="http://schemas.microsoft.com/office/drawing/2014/main" id="{79D4ECCA-83AC-A57C-6C47-1FDDEE334DEC}"/>
+              </a:ext>
+            </a:extLst>
+          </p:cNvPr>
+          <p:cNvSpPr/>
+          <p:nvPr/>
+        </p:nvSpPr>
+        <p:spPr>
+          <a:xfrm>
+            <a:off x="921170" y="2434215"/>
+            <a:ext cx="10424160" cy="196596"/>
+          </a:xfrm>
+          <a:prstGeom prst="rect">
+            <a:avLst/>
+          </a:prstGeom>
+          <a:noFill/>
+          <a:ln/>
+        </p:spPr>
+        <p:txBody>
+          <a:bodyPr wrap="square" lIns="0" tIns="0" rIns="0" bIns="0" rtlCol="0" anchor="ctr"/>
+          <a:lstStyle/>
+          <a:p>
+            <a:pPr marL="0" indent="0">
+              <a:buNone/>
+            </a:pPr>
+            <a:r>
+              <a:rPr lang="en-US" sz="850" i="1" dirty="0">
+                <a:solidFill>
+                  <a:srgbClr val="333333"/>
+                </a:solidFill>
+                <a:latin typeface="Calibri" pitchFamily="34" charset="0"/>
+                <a:ea typeface="Calibri" pitchFamily="34" charset="-122"/>
+                <a:cs typeface="Calibri" pitchFamily="34" charset="-120"/>
+              </a:rPr>
+              <a:t>APIs and RESTful Endpoints</a:t>
+            </a:r>
+            <a:endParaRPr lang="en-US" sz="850" dirty="0"/>
+          </a:p>
+        </p:txBody>
+      </p:sp>
+      <p:sp>
+        <p:nvSpPr>
+          <p:cNvPr id="34" name="Shape 27">
+            <a:extLst>
+              <a:ext uri="{FF2B5EF4-FFF2-40B4-BE49-F238E27FC236}">
+                <a16:creationId xmlns:a16="http://schemas.microsoft.com/office/drawing/2014/main" id="{5CD53629-A144-1A93-3720-A3993B32F265}"/>
+              </a:ext>
+            </a:extLst>
+          </p:cNvPr>
+          <p:cNvSpPr/>
+          <p:nvPr/>
+        </p:nvSpPr>
+        <p:spPr>
+          <a:xfrm>
+            <a:off x="345098" y="2630811"/>
+            <a:ext cx="11521440" cy="196596"/>
+          </a:xfrm>
+          <a:prstGeom prst="rect">
+            <a:avLst/>
+          </a:prstGeom>
+          <a:solidFill>
+            <a:srgbClr val="FFFFFF"/>
+          </a:solidFill>
+          <a:ln w="6350">
+            <a:solidFill>
+              <a:srgbClr val="E8E8E8"/>
+            </a:solidFill>
+            <a:prstDash val="solid"/>
+          </a:ln>
+        </p:spPr>
+        <p:txBody>
+          <a:bodyPr/>
+          <a:lstStyle/>
+          <a:p>
+            <a:endParaRPr lang="en-PH"/>
+          </a:p>
+        </p:txBody>
+      </p:sp>
+      <p:sp>
+        <p:nvSpPr>
+          <p:cNvPr id="35" name="Shape 28">
+            <a:extLst>
+              <a:ext uri="{FF2B5EF4-FFF2-40B4-BE49-F238E27FC236}">
+                <a16:creationId xmlns:a16="http://schemas.microsoft.com/office/drawing/2014/main" id="{623846CB-9C4D-C46F-2664-0110304D7E28}"/>
+              </a:ext>
+            </a:extLst>
+          </p:cNvPr>
+          <p:cNvSpPr/>
+          <p:nvPr/>
+        </p:nvSpPr>
+        <p:spPr>
+          <a:xfrm>
+            <a:off x="793154" y="2695276"/>
+            <a:ext cx="67666" cy="67666"/>
+          </a:xfrm>
+          <a:prstGeom prst="ellipse">
+            <a:avLst/>
+          </a:prstGeom>
+          <a:solidFill>
+            <a:srgbClr val="5B8CF5"/>
+          </a:solidFill>
+          <a:ln w="12700">
+            <a:solidFill>
+              <a:srgbClr val="5B8CF5"/>
+            </a:solidFill>
+            <a:prstDash val="solid"/>
+          </a:ln>
+        </p:spPr>
+        <p:txBody>
+          <a:bodyPr/>
+          <a:lstStyle/>
+          <a:p>
+            <a:endParaRPr lang="en-PH"/>
+          </a:p>
+        </p:txBody>
+      </p:sp>
+      <p:sp>
+        <p:nvSpPr>
+          <p:cNvPr id="36" name="Text 29">
+            <a:extLst>
+              <a:ext uri="{FF2B5EF4-FFF2-40B4-BE49-F238E27FC236}">
+                <a16:creationId xmlns:a16="http://schemas.microsoft.com/office/drawing/2014/main" id="{2420A170-C7E0-6FE3-AEDB-ECC60CE8E4F7}"/>
+              </a:ext>
+            </a:extLst>
+          </p:cNvPr>
+          <p:cNvSpPr/>
+          <p:nvPr/>
+        </p:nvSpPr>
+        <p:spPr>
+          <a:xfrm>
+            <a:off x="921170" y="2630811"/>
+            <a:ext cx="10424160" cy="196596"/>
+          </a:xfrm>
+          <a:prstGeom prst="rect">
+            <a:avLst/>
+          </a:prstGeom>
+          <a:noFill/>
+          <a:ln/>
+        </p:spPr>
+        <p:txBody>
+          <a:bodyPr wrap="square" lIns="0" tIns="0" rIns="0" bIns="0" rtlCol="0" anchor="ctr"/>
+          <a:lstStyle/>
+          <a:p>
+            <a:pPr marL="0" indent="0">
+              <a:buNone/>
+            </a:pPr>
+            <a:r>
+              <a:rPr lang="en-US" sz="850" i="1" dirty="0">
+                <a:solidFill>
+                  <a:srgbClr val="333333"/>
+                </a:solidFill>
+                <a:latin typeface="Calibri" pitchFamily="34" charset="0"/>
+                <a:ea typeface="Calibri" pitchFamily="34" charset="-122"/>
+                <a:cs typeface="Calibri" pitchFamily="34" charset="-120"/>
+              </a:rPr>
+              <a:t>Different HTTP Requests (GET, POST, PUT, DELETE)</a:t>
+            </a:r>
+            <a:endParaRPr lang="en-US" sz="850" dirty="0"/>
+          </a:p>
+        </p:txBody>
+      </p:sp>
+      <p:sp>
+        <p:nvSpPr>
+          <p:cNvPr id="37" name="Shape 30">
+            <a:extLst>
+              <a:ext uri="{FF2B5EF4-FFF2-40B4-BE49-F238E27FC236}">
+                <a16:creationId xmlns:a16="http://schemas.microsoft.com/office/drawing/2014/main" id="{C059BF1E-A86A-038F-F20F-1EBD2AEA8C61}"/>
+              </a:ext>
+            </a:extLst>
+          </p:cNvPr>
+          <p:cNvSpPr/>
+          <p:nvPr/>
+        </p:nvSpPr>
+        <p:spPr>
+          <a:xfrm>
+            <a:off x="345098" y="2827407"/>
+            <a:ext cx="11521440" cy="196596"/>
+          </a:xfrm>
+          <a:prstGeom prst="rect">
+            <a:avLst/>
+          </a:prstGeom>
+          <a:solidFill>
+            <a:srgbClr val="FAFAFA"/>
+          </a:solidFill>
+          <a:ln w="6350">
+            <a:solidFill>
+              <a:srgbClr val="E8E8E8"/>
+            </a:solidFill>
+            <a:prstDash val="solid"/>
+          </a:ln>
+        </p:spPr>
+        <p:txBody>
+          <a:bodyPr/>
+          <a:lstStyle/>
+          <a:p>
+            <a:endParaRPr lang="en-PH"/>
+          </a:p>
+        </p:txBody>
+      </p:sp>
+      <p:sp>
+        <p:nvSpPr>
+          <p:cNvPr id="38" name="Shape 31">
+            <a:extLst>
+              <a:ext uri="{FF2B5EF4-FFF2-40B4-BE49-F238E27FC236}">
+                <a16:creationId xmlns:a16="http://schemas.microsoft.com/office/drawing/2014/main" id="{83570800-D97F-3412-A974-C097814A5BB7}"/>
+              </a:ext>
+            </a:extLst>
+          </p:cNvPr>
+          <p:cNvSpPr/>
+          <p:nvPr/>
+        </p:nvSpPr>
+        <p:spPr>
+          <a:xfrm>
+            <a:off x="793154" y="2891872"/>
+            <a:ext cx="67666" cy="67666"/>
+          </a:xfrm>
+          <a:prstGeom prst="ellipse">
+            <a:avLst/>
+          </a:prstGeom>
+          <a:solidFill>
+            <a:srgbClr val="5B8CF5"/>
+          </a:solidFill>
+          <a:ln w="12700">
+            <a:solidFill>
+              <a:srgbClr val="5B8CF5"/>
+            </a:solidFill>
+            <a:prstDash val="solid"/>
+          </a:ln>
+        </p:spPr>
+        <p:txBody>
+          <a:bodyPr/>
+          <a:lstStyle/>
+          <a:p>
+            <a:endParaRPr lang="en-PH"/>
+          </a:p>
+        </p:txBody>
+      </p:sp>
+      <p:sp>
+        <p:nvSpPr>
+          <p:cNvPr id="39" name="Text 32">
+            <a:extLst>
+              <a:ext uri="{FF2B5EF4-FFF2-40B4-BE49-F238E27FC236}">
+                <a16:creationId xmlns:a16="http://schemas.microsoft.com/office/drawing/2014/main" id="{7D2C9198-689E-A633-A4B4-D4A9BA38E4C7}"/>
+              </a:ext>
+            </a:extLst>
+          </p:cNvPr>
+          <p:cNvSpPr/>
+          <p:nvPr/>
+        </p:nvSpPr>
+        <p:spPr>
+          <a:xfrm>
+            <a:off x="921170" y="2827407"/>
+            <a:ext cx="10424160" cy="196596"/>
+          </a:xfrm>
+          <a:prstGeom prst="rect">
+            <a:avLst/>
+          </a:prstGeom>
+          <a:noFill/>
+          <a:ln/>
+        </p:spPr>
+        <p:txBody>
+          <a:bodyPr wrap="square" lIns="0" tIns="0" rIns="0" bIns="0" rtlCol="0" anchor="ctr"/>
+          <a:lstStyle/>
+          <a:p>
+            <a:pPr marL="0" indent="0">
+              <a:buNone/>
+            </a:pPr>
+            <a:r>
+              <a:rPr lang="en-US" sz="850" i="1" dirty="0">
+                <a:solidFill>
+                  <a:srgbClr val="333333"/>
+                </a:solidFill>
+                <a:latin typeface="Calibri" pitchFamily="34" charset="0"/>
+                <a:ea typeface="Calibri" pitchFamily="34" charset="-122"/>
+                <a:cs typeface="Calibri" pitchFamily="34" charset="-120"/>
+              </a:rPr>
+              <a:t>Handling loading states, errors, and JSON responses</a:t>
+            </a:r>
+            <a:endParaRPr lang="en-US" sz="850" dirty="0"/>
+          </a:p>
+        </p:txBody>
+      </p:sp>
+      <p:sp>
+        <p:nvSpPr>
+          <p:cNvPr id="40" name="Shape 33">
+            <a:extLst>
+              <a:ext uri="{FF2B5EF4-FFF2-40B4-BE49-F238E27FC236}">
+                <a16:creationId xmlns:a16="http://schemas.microsoft.com/office/drawing/2014/main" id="{F6639D40-D44E-9329-E3B4-311AFF7C5369}"/>
+              </a:ext>
+            </a:extLst>
+          </p:cNvPr>
+          <p:cNvSpPr/>
+          <p:nvPr/>
+        </p:nvSpPr>
+        <p:spPr>
+          <a:xfrm>
+            <a:off x="345098" y="3024003"/>
+            <a:ext cx="11521440" cy="246888"/>
+          </a:xfrm>
+          <a:prstGeom prst="rect">
+            <a:avLst/>
+          </a:prstGeom>
+          <a:solidFill>
+            <a:srgbClr val="EAF0EA"/>
+          </a:solidFill>
+          <a:ln w="6350">
+            <a:solidFill>
+              <a:srgbClr val="E8E8E8"/>
+            </a:solidFill>
+            <a:prstDash val="solid"/>
+          </a:ln>
+        </p:spPr>
+        <p:txBody>
+          <a:bodyPr/>
+          <a:lstStyle/>
+          <a:p>
+            <a:endParaRPr lang="en-PH"/>
+          </a:p>
+        </p:txBody>
+      </p:sp>
+      <p:sp>
+        <p:nvSpPr>
+          <p:cNvPr id="41" name="Shape 34">
+            <a:extLst>
+              <a:ext uri="{FF2B5EF4-FFF2-40B4-BE49-F238E27FC236}">
+                <a16:creationId xmlns:a16="http://schemas.microsoft.com/office/drawing/2014/main" id="{502257A6-3FE4-7E87-BA3F-FEFD645CA0F5}"/>
+              </a:ext>
+            </a:extLst>
+          </p:cNvPr>
+          <p:cNvSpPr/>
+          <p:nvPr/>
+        </p:nvSpPr>
+        <p:spPr>
+          <a:xfrm>
+            <a:off x="445682" y="3065151"/>
+            <a:ext cx="164592" cy="164592"/>
+          </a:xfrm>
+          <a:prstGeom prst="ellipse">
+            <a:avLst/>
+          </a:prstGeom>
+          <a:solidFill>
+            <a:srgbClr val="2E4A7A"/>
+          </a:solidFill>
+          <a:ln w="12700">
+            <a:solidFill>
+              <a:srgbClr val="2E4A7A"/>
+            </a:solidFill>
+            <a:prstDash val="solid"/>
+          </a:ln>
+        </p:spPr>
+        <p:txBody>
+          <a:bodyPr/>
+          <a:lstStyle/>
+          <a:p>
+            <a:endParaRPr lang="en-PH"/>
+          </a:p>
+        </p:txBody>
+      </p:sp>
+      <p:sp>
+        <p:nvSpPr>
+          <p:cNvPr id="42" name="Text 35">
+            <a:extLst>
+              <a:ext uri="{FF2B5EF4-FFF2-40B4-BE49-F238E27FC236}">
+                <a16:creationId xmlns:a16="http://schemas.microsoft.com/office/drawing/2014/main" id="{29035543-CAB4-2F7A-32B6-198DC32D0303}"/>
+              </a:ext>
+            </a:extLst>
+          </p:cNvPr>
+          <p:cNvSpPr/>
+          <p:nvPr/>
+        </p:nvSpPr>
+        <p:spPr>
+          <a:xfrm>
+            <a:off x="445682" y="3065151"/>
+            <a:ext cx="164592" cy="164592"/>
+          </a:xfrm>
+          <a:prstGeom prst="rect">
+            <a:avLst/>
+          </a:prstGeom>
+          <a:noFill/>
+          <a:ln/>
+        </p:spPr>
+        <p:txBody>
+          <a:bodyPr wrap="square" lIns="0" tIns="0" rIns="0" bIns="0" rtlCol="0" anchor="ctr"/>
+          <a:lstStyle/>
+          <a:p>
+            <a:pPr marL="0" indent="0" algn="ctr">
+              <a:buNone/>
+            </a:pPr>
+            <a:r>
+              <a:rPr lang="en-US" sz="700" b="1" dirty="0">
+                <a:solidFill>
+                  <a:srgbClr val="FFFFFF"/>
+                </a:solidFill>
+                <a:latin typeface="Calibri" pitchFamily="34" charset="0"/>
+                <a:ea typeface="Calibri" pitchFamily="34" charset="-122"/>
+                <a:cs typeface="Calibri" pitchFamily="34" charset="-120"/>
+              </a:rPr>
+              <a:t>3</a:t>
+            </a:r>
+            <a:endParaRPr lang="en-US" sz="700" dirty="0"/>
+          </a:p>
+        </p:txBody>
+      </p:sp>
+      <p:sp>
+        <p:nvSpPr>
+          <p:cNvPr id="43" name="Text 36">
+            <a:extLst>
+              <a:ext uri="{FF2B5EF4-FFF2-40B4-BE49-F238E27FC236}">
+                <a16:creationId xmlns:a16="http://schemas.microsoft.com/office/drawing/2014/main" id="{FB949255-B5B3-43DD-C307-523BE6952188}"/>
+              </a:ext>
+            </a:extLst>
+          </p:cNvPr>
+          <p:cNvSpPr/>
+          <p:nvPr/>
+        </p:nvSpPr>
+        <p:spPr>
+          <a:xfrm>
+            <a:off x="683426" y="3024003"/>
+            <a:ext cx="8961120" cy="246888"/>
+          </a:xfrm>
+          <a:prstGeom prst="rect">
+            <a:avLst/>
+          </a:prstGeom>
+          <a:noFill/>
+          <a:ln/>
+        </p:spPr>
+        <p:txBody>
+          <a:bodyPr wrap="square" lIns="0" tIns="0" rIns="0" bIns="0" rtlCol="0" anchor="ctr"/>
+          <a:lstStyle/>
+          <a:p>
+            <a:pPr marL="0" indent="0">
+              <a:buNone/>
+            </a:pPr>
+            <a:r>
+              <a:rPr lang="en-US" sz="950" b="1" dirty="0">
+                <a:solidFill>
+                  <a:srgbClr val="111111"/>
+                </a:solidFill>
+                <a:latin typeface="Calibri" pitchFamily="34" charset="0"/>
+                <a:ea typeface="Calibri" pitchFamily="34" charset="-122"/>
+                <a:cs typeface="Calibri" pitchFamily="34" charset="-120"/>
+              </a:rPr>
+              <a:t>Introduction to Authentication</a:t>
+            </a:r>
+            <a:endParaRPr lang="en-US" sz="950" dirty="0"/>
+          </a:p>
+        </p:txBody>
+      </p:sp>
+      <p:sp>
+        <p:nvSpPr>
+          <p:cNvPr id="44" name="Text 37">
+            <a:extLst>
+              <a:ext uri="{FF2B5EF4-FFF2-40B4-BE49-F238E27FC236}">
+                <a16:creationId xmlns:a16="http://schemas.microsoft.com/office/drawing/2014/main" id="{E026AAB2-3449-CD9A-ED2C-913C21D52DE4}"/>
+              </a:ext>
+            </a:extLst>
+          </p:cNvPr>
+          <p:cNvSpPr/>
+          <p:nvPr/>
+        </p:nvSpPr>
+        <p:spPr>
+          <a:xfrm>
+            <a:off x="9717698" y="3024003"/>
+            <a:ext cx="2011680" cy="246888"/>
+          </a:xfrm>
+          <a:prstGeom prst="rect">
+            <a:avLst/>
+          </a:prstGeom>
+          <a:noFill/>
+          <a:ln/>
+        </p:spPr>
+        <p:txBody>
+          <a:bodyPr wrap="square" lIns="0" tIns="0" rIns="0" bIns="0" rtlCol="0" anchor="ctr"/>
+          <a:lstStyle/>
+          <a:p>
+            <a:pPr marL="0" indent="0" algn="r">
+              <a:buNone/>
+            </a:pPr>
+            <a:r>
+              <a:rPr lang="en-US" sz="900" b="1" dirty="0">
+                <a:solidFill>
+                  <a:srgbClr val="2E4A7A"/>
+                </a:solidFill>
+                <a:latin typeface="Calibri" pitchFamily="34" charset="0"/>
+                <a:ea typeface="Calibri" pitchFamily="34" charset="-122"/>
+                <a:cs typeface="Calibri" pitchFamily="34" charset="-120"/>
+              </a:rPr>
+              <a:t>~25 min</a:t>
+            </a:r>
+            <a:endParaRPr lang="en-US" sz="900" dirty="0"/>
+          </a:p>
+        </p:txBody>
+      </p:sp>
+      <p:sp>
+        <p:nvSpPr>
+          <p:cNvPr id="45" name="Shape 38">
+            <a:extLst>
+              <a:ext uri="{FF2B5EF4-FFF2-40B4-BE49-F238E27FC236}">
+                <a16:creationId xmlns:a16="http://schemas.microsoft.com/office/drawing/2014/main" id="{3632064A-0DA4-7849-C6CE-81AE9A2AA76D}"/>
+              </a:ext>
+            </a:extLst>
+          </p:cNvPr>
+          <p:cNvSpPr/>
+          <p:nvPr/>
+        </p:nvSpPr>
+        <p:spPr>
+          <a:xfrm>
+            <a:off x="345098" y="3270891"/>
+            <a:ext cx="11521440" cy="196596"/>
+          </a:xfrm>
+          <a:prstGeom prst="rect">
+            <a:avLst/>
+          </a:prstGeom>
+          <a:solidFill>
+            <a:srgbClr val="FAFAFA"/>
+          </a:solidFill>
+          <a:ln w="6350">
+            <a:solidFill>
+              <a:srgbClr val="E8E8E8"/>
+            </a:solidFill>
+            <a:prstDash val="solid"/>
+          </a:ln>
+        </p:spPr>
+        <p:txBody>
+          <a:bodyPr/>
+          <a:lstStyle/>
+          <a:p>
+            <a:endParaRPr lang="en-PH"/>
+          </a:p>
+        </p:txBody>
+      </p:sp>
+      <p:sp>
+        <p:nvSpPr>
+          <p:cNvPr id="46" name="Shape 39">
+            <a:extLst>
+              <a:ext uri="{FF2B5EF4-FFF2-40B4-BE49-F238E27FC236}">
+                <a16:creationId xmlns:a16="http://schemas.microsoft.com/office/drawing/2014/main" id="{D6FC6672-6B21-5394-984B-279CC63B313A}"/>
+              </a:ext>
+            </a:extLst>
+          </p:cNvPr>
+          <p:cNvSpPr/>
+          <p:nvPr/>
+        </p:nvSpPr>
+        <p:spPr>
+          <a:xfrm>
+            <a:off x="793154" y="3335356"/>
+            <a:ext cx="67666" cy="67666"/>
+          </a:xfrm>
+          <a:prstGeom prst="ellipse">
+            <a:avLst/>
+          </a:prstGeom>
+          <a:solidFill>
+            <a:srgbClr val="5B8CF5"/>
+          </a:solidFill>
+          <a:ln w="12700">
+            <a:solidFill>
+              <a:srgbClr val="5B8CF5"/>
+            </a:solidFill>
+            <a:prstDash val="solid"/>
+          </a:ln>
+        </p:spPr>
+        <p:txBody>
+          <a:bodyPr/>
+          <a:lstStyle/>
+          <a:p>
+            <a:endParaRPr lang="en-PH"/>
+          </a:p>
+        </p:txBody>
+      </p:sp>
+      <p:sp>
+        <p:nvSpPr>
+          <p:cNvPr id="47" name="Text 40">
+            <a:extLst>
+              <a:ext uri="{FF2B5EF4-FFF2-40B4-BE49-F238E27FC236}">
+                <a16:creationId xmlns:a16="http://schemas.microsoft.com/office/drawing/2014/main" id="{30D3E768-0872-FF86-5F8D-C9A81603F5BD}"/>
+              </a:ext>
+            </a:extLst>
+          </p:cNvPr>
+          <p:cNvSpPr/>
+          <p:nvPr/>
+        </p:nvSpPr>
+        <p:spPr>
+          <a:xfrm>
+            <a:off x="921170" y="3270891"/>
+            <a:ext cx="10424160" cy="196596"/>
+          </a:xfrm>
+          <a:prstGeom prst="rect">
+            <a:avLst/>
+          </a:prstGeom>
+          <a:noFill/>
+          <a:ln/>
+        </p:spPr>
+        <p:txBody>
+          <a:bodyPr wrap="square" lIns="0" tIns="0" rIns="0" bIns="0" rtlCol="0" anchor="ctr"/>
+          <a:lstStyle/>
+          <a:p>
+            <a:pPr marL="0" indent="0">
+              <a:buNone/>
+            </a:pPr>
+            <a:r>
+              <a:rPr lang="en-US" sz="850" i="1" dirty="0">
+                <a:solidFill>
+                  <a:srgbClr val="333333"/>
+                </a:solidFill>
+                <a:latin typeface="Calibri" pitchFamily="34" charset="0"/>
+                <a:ea typeface="Calibri" pitchFamily="34" charset="-122"/>
+                <a:cs typeface="Calibri" pitchFamily="34" charset="-120"/>
+              </a:rPr>
+              <a:t>Stateless authentication using JWT</a:t>
+            </a:r>
+            <a:endParaRPr lang="en-US" sz="850" dirty="0"/>
+          </a:p>
+        </p:txBody>
+      </p:sp>
+      <p:sp>
+        <p:nvSpPr>
+          <p:cNvPr id="48" name="Shape 41">
+            <a:extLst>
+              <a:ext uri="{FF2B5EF4-FFF2-40B4-BE49-F238E27FC236}">
+                <a16:creationId xmlns:a16="http://schemas.microsoft.com/office/drawing/2014/main" id="{22164A8D-6869-D394-15A8-8A1F8CAA3F82}"/>
+              </a:ext>
+            </a:extLst>
+          </p:cNvPr>
+          <p:cNvSpPr/>
+          <p:nvPr/>
+        </p:nvSpPr>
+        <p:spPr>
+          <a:xfrm>
+            <a:off x="345098" y="3467487"/>
+            <a:ext cx="11521440" cy="196596"/>
+          </a:xfrm>
+          <a:prstGeom prst="rect">
+            <a:avLst/>
+          </a:prstGeom>
+          <a:solidFill>
+            <a:srgbClr val="FFFFFF"/>
+          </a:solidFill>
+          <a:ln w="6350">
+            <a:solidFill>
+              <a:srgbClr val="E8E8E8"/>
+            </a:solidFill>
+            <a:prstDash val="solid"/>
+          </a:ln>
+        </p:spPr>
+        <p:txBody>
+          <a:bodyPr/>
+          <a:lstStyle/>
+          <a:p>
+            <a:endParaRPr lang="en-PH"/>
+          </a:p>
+        </p:txBody>
+      </p:sp>
+      <p:sp>
+        <p:nvSpPr>
+          <p:cNvPr id="49" name="Shape 42">
+            <a:extLst>
+              <a:ext uri="{FF2B5EF4-FFF2-40B4-BE49-F238E27FC236}">
+                <a16:creationId xmlns:a16="http://schemas.microsoft.com/office/drawing/2014/main" id="{98476CFF-E537-FE6B-2AA7-715AD2602B08}"/>
+              </a:ext>
+            </a:extLst>
+          </p:cNvPr>
+          <p:cNvSpPr/>
+          <p:nvPr/>
+        </p:nvSpPr>
+        <p:spPr>
+          <a:xfrm>
+            <a:off x="793154" y="3531952"/>
+            <a:ext cx="67666" cy="67666"/>
+          </a:xfrm>
+          <a:prstGeom prst="ellipse">
+            <a:avLst/>
+          </a:prstGeom>
+          <a:solidFill>
+            <a:srgbClr val="5B8CF5"/>
+          </a:solidFill>
+          <a:ln w="12700">
+            <a:solidFill>
+              <a:srgbClr val="5B8CF5"/>
+            </a:solidFill>
+            <a:prstDash val="solid"/>
+          </a:ln>
+        </p:spPr>
+        <p:txBody>
+          <a:bodyPr/>
+          <a:lstStyle/>
+          <a:p>
+            <a:endParaRPr lang="en-PH"/>
+          </a:p>
+        </p:txBody>
+      </p:sp>
+      <p:sp>
+        <p:nvSpPr>
+          <p:cNvPr id="50" name="Text 43">
+            <a:extLst>
+              <a:ext uri="{FF2B5EF4-FFF2-40B4-BE49-F238E27FC236}">
+                <a16:creationId xmlns:a16="http://schemas.microsoft.com/office/drawing/2014/main" id="{F5447CFF-853E-AD74-2BD5-8293CFEA93E9}"/>
+              </a:ext>
+            </a:extLst>
+          </p:cNvPr>
+          <p:cNvSpPr/>
+          <p:nvPr/>
+        </p:nvSpPr>
+        <p:spPr>
+          <a:xfrm>
+            <a:off x="921170" y="3467487"/>
+            <a:ext cx="10424160" cy="196596"/>
+          </a:xfrm>
+          <a:prstGeom prst="rect">
+            <a:avLst/>
+          </a:prstGeom>
+          <a:noFill/>
+          <a:ln/>
+        </p:spPr>
+        <p:txBody>
+          <a:bodyPr wrap="square" lIns="0" tIns="0" rIns="0" bIns="0" rtlCol="0" anchor="ctr"/>
+          <a:lstStyle/>
+          <a:p>
+            <a:pPr marL="0" indent="0">
+              <a:buNone/>
+            </a:pPr>
+            <a:r>
+              <a:rPr lang="en-US" sz="850" i="1" dirty="0">
+                <a:solidFill>
+                  <a:srgbClr val="333333"/>
+                </a:solidFill>
+                <a:latin typeface="Calibri" pitchFamily="34" charset="0"/>
+                <a:ea typeface="Calibri" pitchFamily="34" charset="-122"/>
+                <a:cs typeface="Calibri" pitchFamily="34" charset="-120"/>
+              </a:rPr>
+              <a:t>Protected Routes</a:t>
+            </a:r>
+            <a:endParaRPr lang="en-US" sz="850" dirty="0"/>
+          </a:p>
+        </p:txBody>
+      </p:sp>
+      <p:sp>
+        <p:nvSpPr>
+          <p:cNvPr id="51" name="Shape 44">
+            <a:extLst>
+              <a:ext uri="{FF2B5EF4-FFF2-40B4-BE49-F238E27FC236}">
+                <a16:creationId xmlns:a16="http://schemas.microsoft.com/office/drawing/2014/main" id="{C0856571-416A-296A-FC9D-BB6B1EEFE005}"/>
+              </a:ext>
+            </a:extLst>
+          </p:cNvPr>
+          <p:cNvSpPr/>
+          <p:nvPr/>
+        </p:nvSpPr>
+        <p:spPr>
+          <a:xfrm>
+            <a:off x="345098" y="3664083"/>
+            <a:ext cx="11521440" cy="246888"/>
+          </a:xfrm>
+          <a:prstGeom prst="rect">
+            <a:avLst/>
+          </a:prstGeom>
+          <a:solidFill>
+            <a:srgbClr val="EEF2EE"/>
+          </a:solidFill>
+          <a:ln w="6350">
+            <a:solidFill>
+              <a:srgbClr val="E8E8E8"/>
+            </a:solidFill>
+            <a:prstDash val="solid"/>
+          </a:ln>
+        </p:spPr>
+        <p:txBody>
+          <a:bodyPr/>
+          <a:lstStyle/>
+          <a:p>
+            <a:endParaRPr lang="en-PH"/>
+          </a:p>
+        </p:txBody>
+      </p:sp>
+      <p:sp>
+        <p:nvSpPr>
+          <p:cNvPr id="52" name="Shape 45">
+            <a:extLst>
+              <a:ext uri="{FF2B5EF4-FFF2-40B4-BE49-F238E27FC236}">
+                <a16:creationId xmlns:a16="http://schemas.microsoft.com/office/drawing/2014/main" id="{123E1939-3E36-BC09-8EA9-83CF95193444}"/>
+              </a:ext>
+            </a:extLst>
+          </p:cNvPr>
+          <p:cNvSpPr/>
+          <p:nvPr/>
+        </p:nvSpPr>
+        <p:spPr>
+          <a:xfrm>
+            <a:off x="445682" y="3705231"/>
+            <a:ext cx="164592" cy="164592"/>
+          </a:xfrm>
+          <a:prstGeom prst="ellipse">
+            <a:avLst/>
+          </a:prstGeom>
+          <a:solidFill>
+            <a:srgbClr val="2E4A7A"/>
+          </a:solidFill>
+          <a:ln w="12700">
+            <a:solidFill>
+              <a:srgbClr val="2E4A7A"/>
+            </a:solidFill>
+            <a:prstDash val="solid"/>
+          </a:ln>
+        </p:spPr>
+        <p:txBody>
+          <a:bodyPr/>
+          <a:lstStyle/>
+          <a:p>
+            <a:endParaRPr lang="en-PH"/>
+          </a:p>
+        </p:txBody>
+      </p:sp>
+      <p:sp>
+        <p:nvSpPr>
+          <p:cNvPr id="53" name="Text 46">
+            <a:extLst>
+              <a:ext uri="{FF2B5EF4-FFF2-40B4-BE49-F238E27FC236}">
+                <a16:creationId xmlns:a16="http://schemas.microsoft.com/office/drawing/2014/main" id="{B809F58B-CDD3-83A1-18F9-D1905143F049}"/>
+              </a:ext>
+            </a:extLst>
+          </p:cNvPr>
+          <p:cNvSpPr/>
+          <p:nvPr/>
+        </p:nvSpPr>
+        <p:spPr>
+          <a:xfrm>
+            <a:off x="445682" y="3705231"/>
+            <a:ext cx="164592" cy="164592"/>
+          </a:xfrm>
+          <a:prstGeom prst="rect">
+            <a:avLst/>
+          </a:prstGeom>
+          <a:noFill/>
+          <a:ln/>
+        </p:spPr>
+        <p:txBody>
+          <a:bodyPr wrap="square" lIns="0" tIns="0" rIns="0" bIns="0" rtlCol="0" anchor="ctr"/>
+          <a:lstStyle/>
+          <a:p>
+            <a:pPr marL="0" indent="0" algn="ctr">
+              <a:buNone/>
+            </a:pPr>
+            <a:r>
+              <a:rPr lang="en-US" sz="700" b="1" dirty="0">
+                <a:solidFill>
+                  <a:srgbClr val="FFFFFF"/>
+                </a:solidFill>
+                <a:latin typeface="Calibri" pitchFamily="34" charset="0"/>
+                <a:ea typeface="Calibri" pitchFamily="34" charset="-122"/>
+                <a:cs typeface="Calibri" pitchFamily="34" charset="-120"/>
+              </a:rPr>
+              <a:t>4</a:t>
+            </a:r>
+            <a:endParaRPr lang="en-US" sz="700" dirty="0"/>
+          </a:p>
+        </p:txBody>
+      </p:sp>
+      <p:sp>
+        <p:nvSpPr>
+          <p:cNvPr id="54" name="Text 47">
+            <a:extLst>
+              <a:ext uri="{FF2B5EF4-FFF2-40B4-BE49-F238E27FC236}">
+                <a16:creationId xmlns:a16="http://schemas.microsoft.com/office/drawing/2014/main" id="{91DAEA00-3F87-8E56-9E28-A9ADA1A0D24B}"/>
+              </a:ext>
+            </a:extLst>
+          </p:cNvPr>
+          <p:cNvSpPr/>
+          <p:nvPr/>
+        </p:nvSpPr>
+        <p:spPr>
+          <a:xfrm>
+            <a:off x="683426" y="3664083"/>
+            <a:ext cx="8961120" cy="246888"/>
+          </a:xfrm>
+          <a:prstGeom prst="rect">
+            <a:avLst/>
+          </a:prstGeom>
+          <a:noFill/>
+          <a:ln/>
+        </p:spPr>
+        <p:txBody>
+          <a:bodyPr wrap="square" lIns="0" tIns="0" rIns="0" bIns="0" rtlCol="0" anchor="ctr"/>
+          <a:lstStyle/>
+          <a:p>
+            <a:pPr marL="0" indent="0">
+              <a:buNone/>
+            </a:pPr>
+            <a:r>
+              <a:rPr lang="en-US" sz="950" b="1" dirty="0">
+                <a:solidFill>
+                  <a:srgbClr val="111111"/>
+                </a:solidFill>
+                <a:latin typeface="Calibri" pitchFamily="34" charset="0"/>
+                <a:ea typeface="Calibri" pitchFamily="34" charset="-122"/>
+                <a:cs typeface="Calibri" pitchFamily="34" charset="-120"/>
+              </a:rPr>
+              <a:t>Database Integration</a:t>
+            </a:r>
+            <a:endParaRPr lang="en-US" sz="950" dirty="0"/>
+          </a:p>
+        </p:txBody>
+      </p:sp>
+      <p:sp>
+        <p:nvSpPr>
+          <p:cNvPr id="55" name="Text 48">
+            <a:extLst>
+              <a:ext uri="{FF2B5EF4-FFF2-40B4-BE49-F238E27FC236}">
+                <a16:creationId xmlns:a16="http://schemas.microsoft.com/office/drawing/2014/main" id="{890C62CD-8612-9B69-5F30-F13B5C8C8C75}"/>
+              </a:ext>
+            </a:extLst>
+          </p:cNvPr>
+          <p:cNvSpPr/>
+          <p:nvPr/>
+        </p:nvSpPr>
+        <p:spPr>
+          <a:xfrm>
+            <a:off x="9717698" y="3664083"/>
+            <a:ext cx="2011680" cy="246888"/>
+          </a:xfrm>
+          <a:prstGeom prst="rect">
+            <a:avLst/>
+          </a:prstGeom>
+          <a:noFill/>
+          <a:ln/>
+        </p:spPr>
+        <p:txBody>
+          <a:bodyPr wrap="square" lIns="0" tIns="0" rIns="0" bIns="0" rtlCol="0" anchor="ctr"/>
+          <a:lstStyle/>
+          <a:p>
+            <a:pPr marL="0" indent="0" algn="r">
+              <a:buNone/>
+            </a:pPr>
+            <a:r>
+              <a:rPr lang="en-US" sz="900" b="1" dirty="0">
+                <a:solidFill>
+                  <a:srgbClr val="2E4A7A"/>
+                </a:solidFill>
+                <a:latin typeface="Calibri" pitchFamily="34" charset="0"/>
+                <a:ea typeface="Calibri" pitchFamily="34" charset="-122"/>
+                <a:cs typeface="Calibri" pitchFamily="34" charset="-120"/>
+              </a:rPr>
+              <a:t>~25 min</a:t>
+            </a:r>
+            <a:endParaRPr lang="en-US" sz="900" dirty="0"/>
+          </a:p>
+        </p:txBody>
+      </p:sp>
+      <p:sp>
+        <p:nvSpPr>
+          <p:cNvPr id="56" name="Shape 49">
+            <a:extLst>
+              <a:ext uri="{FF2B5EF4-FFF2-40B4-BE49-F238E27FC236}">
+                <a16:creationId xmlns:a16="http://schemas.microsoft.com/office/drawing/2014/main" id="{4ABE3989-2499-9617-6B92-097D86083AED}"/>
+              </a:ext>
+            </a:extLst>
+          </p:cNvPr>
+          <p:cNvSpPr/>
+          <p:nvPr/>
+        </p:nvSpPr>
+        <p:spPr>
+          <a:xfrm>
+            <a:off x="345098" y="3910971"/>
+            <a:ext cx="11521440" cy="196596"/>
+          </a:xfrm>
+          <a:prstGeom prst="rect">
+            <a:avLst/>
+          </a:prstGeom>
+          <a:solidFill>
+            <a:srgbClr val="FFFFFF"/>
+          </a:solidFill>
+          <a:ln w="6350">
+            <a:solidFill>
+              <a:srgbClr val="E8E8E8"/>
+            </a:solidFill>
+            <a:prstDash val="solid"/>
+          </a:ln>
+        </p:spPr>
+        <p:txBody>
+          <a:bodyPr/>
+          <a:lstStyle/>
+          <a:p>
+            <a:endParaRPr lang="en-PH"/>
+          </a:p>
+        </p:txBody>
+      </p:sp>
+      <p:sp>
+        <p:nvSpPr>
+          <p:cNvPr id="57" name="Shape 50">
+            <a:extLst>
+              <a:ext uri="{FF2B5EF4-FFF2-40B4-BE49-F238E27FC236}">
+                <a16:creationId xmlns:a16="http://schemas.microsoft.com/office/drawing/2014/main" id="{DB12BDE7-CBD2-DA23-05FF-4D18E125B686}"/>
+              </a:ext>
+            </a:extLst>
+          </p:cNvPr>
+          <p:cNvSpPr/>
+          <p:nvPr/>
+        </p:nvSpPr>
+        <p:spPr>
+          <a:xfrm>
+            <a:off x="793154" y="3975436"/>
+            <a:ext cx="67666" cy="67666"/>
+          </a:xfrm>
+          <a:prstGeom prst="ellipse">
+            <a:avLst/>
+          </a:prstGeom>
+          <a:solidFill>
+            <a:srgbClr val="5B8CF5"/>
+          </a:solidFill>
+          <a:ln w="12700">
+            <a:solidFill>
+              <a:srgbClr val="5B8CF5"/>
+            </a:solidFill>
+            <a:prstDash val="solid"/>
+          </a:ln>
+        </p:spPr>
+        <p:txBody>
+          <a:bodyPr/>
+          <a:lstStyle/>
+          <a:p>
+            <a:endParaRPr lang="en-PH"/>
+          </a:p>
+        </p:txBody>
+      </p:sp>
+      <p:sp>
+        <p:nvSpPr>
+          <p:cNvPr id="58" name="Text 51">
+            <a:extLst>
+              <a:ext uri="{FF2B5EF4-FFF2-40B4-BE49-F238E27FC236}">
+                <a16:creationId xmlns:a16="http://schemas.microsoft.com/office/drawing/2014/main" id="{68033FF8-5DF1-7CFF-227B-894766CA8DB1}"/>
+              </a:ext>
+            </a:extLst>
+          </p:cNvPr>
+          <p:cNvSpPr/>
+          <p:nvPr/>
+        </p:nvSpPr>
+        <p:spPr>
+          <a:xfrm>
+            <a:off x="921170" y="3910971"/>
+            <a:ext cx="10424160" cy="196596"/>
+          </a:xfrm>
+          <a:prstGeom prst="rect">
+            <a:avLst/>
+          </a:prstGeom>
+          <a:noFill/>
+          <a:ln/>
+        </p:spPr>
+        <p:txBody>
+          <a:bodyPr wrap="square" lIns="0" tIns="0" rIns="0" bIns="0" rtlCol="0" anchor="ctr"/>
+          <a:lstStyle/>
+          <a:p>
+            <a:pPr marL="0" indent="0">
+              <a:buNone/>
+            </a:pPr>
+            <a:r>
+              <a:rPr lang="en-US" sz="850" i="1" dirty="0">
+                <a:solidFill>
+                  <a:srgbClr val="333333"/>
+                </a:solidFill>
+                <a:latin typeface="Calibri" pitchFamily="34" charset="0"/>
+                <a:ea typeface="Calibri" pitchFamily="34" charset="-122"/>
+                <a:cs typeface="Calibri" pitchFamily="34" charset="-120"/>
+              </a:rPr>
+              <a:t>Connecting to a database (PostgreSQL / MongoDB)</a:t>
+            </a:r>
+            <a:endParaRPr lang="en-US" sz="850" dirty="0"/>
+          </a:p>
+        </p:txBody>
+      </p:sp>
+      <p:sp>
+        <p:nvSpPr>
+          <p:cNvPr id="59" name="Shape 52">
+            <a:extLst>
+              <a:ext uri="{FF2B5EF4-FFF2-40B4-BE49-F238E27FC236}">
+                <a16:creationId xmlns:a16="http://schemas.microsoft.com/office/drawing/2014/main" id="{3456E40F-F72D-CAB1-A175-E119B92DE6DF}"/>
+              </a:ext>
+            </a:extLst>
+          </p:cNvPr>
+          <p:cNvSpPr/>
+          <p:nvPr/>
+        </p:nvSpPr>
+        <p:spPr>
+          <a:xfrm>
+            <a:off x="345098" y="4107567"/>
+            <a:ext cx="11521440" cy="196596"/>
+          </a:xfrm>
+          <a:prstGeom prst="rect">
+            <a:avLst/>
+          </a:prstGeom>
+          <a:solidFill>
+            <a:srgbClr val="FAFAFA"/>
+          </a:solidFill>
+          <a:ln w="6350">
+            <a:solidFill>
+              <a:srgbClr val="E8E8E8"/>
+            </a:solidFill>
+            <a:prstDash val="solid"/>
+          </a:ln>
+        </p:spPr>
+        <p:txBody>
+          <a:bodyPr/>
+          <a:lstStyle/>
+          <a:p>
+            <a:endParaRPr lang="en-PH"/>
+          </a:p>
+        </p:txBody>
+      </p:sp>
+      <p:sp>
+        <p:nvSpPr>
+          <p:cNvPr id="60" name="Shape 53">
+            <a:extLst>
+              <a:ext uri="{FF2B5EF4-FFF2-40B4-BE49-F238E27FC236}">
+                <a16:creationId xmlns:a16="http://schemas.microsoft.com/office/drawing/2014/main" id="{7DC97122-F1C3-2D93-F0A3-905DDF90A921}"/>
+              </a:ext>
+            </a:extLst>
+          </p:cNvPr>
+          <p:cNvSpPr/>
+          <p:nvPr/>
+        </p:nvSpPr>
+        <p:spPr>
+          <a:xfrm>
+            <a:off x="793154" y="4172032"/>
+            <a:ext cx="67666" cy="67666"/>
+          </a:xfrm>
+          <a:prstGeom prst="ellipse">
+            <a:avLst/>
+          </a:prstGeom>
+          <a:solidFill>
+            <a:srgbClr val="5B8CF5"/>
+          </a:solidFill>
+          <a:ln w="12700">
+            <a:solidFill>
+              <a:srgbClr val="5B8CF5"/>
+            </a:solidFill>
+            <a:prstDash val="solid"/>
+          </a:ln>
+        </p:spPr>
+        <p:txBody>
+          <a:bodyPr/>
+          <a:lstStyle/>
+          <a:p>
+            <a:endParaRPr lang="en-PH"/>
+          </a:p>
+        </p:txBody>
+      </p:sp>
+      <p:sp>
+        <p:nvSpPr>
+          <p:cNvPr id="61" name="Text 54">
+            <a:extLst>
+              <a:ext uri="{FF2B5EF4-FFF2-40B4-BE49-F238E27FC236}">
+                <a16:creationId xmlns:a16="http://schemas.microsoft.com/office/drawing/2014/main" id="{F87A2BEC-4C82-53DF-BBF3-2638C43D176C}"/>
+              </a:ext>
+            </a:extLst>
+          </p:cNvPr>
+          <p:cNvSpPr/>
+          <p:nvPr/>
+        </p:nvSpPr>
+        <p:spPr>
+          <a:xfrm>
+            <a:off x="921170" y="4107567"/>
+            <a:ext cx="10424160" cy="196596"/>
+          </a:xfrm>
+          <a:prstGeom prst="rect">
+            <a:avLst/>
+          </a:prstGeom>
+          <a:noFill/>
+          <a:ln/>
+        </p:spPr>
+        <p:txBody>
+          <a:bodyPr wrap="square" lIns="0" tIns="0" rIns="0" bIns="0" rtlCol="0" anchor="ctr"/>
+          <a:lstStyle/>
+          <a:p>
+            <a:pPr marL="0" indent="0">
+              <a:buNone/>
+            </a:pPr>
+            <a:r>
+              <a:rPr lang="en-US" sz="850" i="1" dirty="0">
+                <a:solidFill>
+                  <a:srgbClr val="333333"/>
+                </a:solidFill>
+                <a:latin typeface="Calibri" pitchFamily="34" charset="0"/>
+                <a:ea typeface="Calibri" pitchFamily="34" charset="-122"/>
+                <a:cs typeface="Calibri" pitchFamily="34" charset="-120"/>
+              </a:rPr>
+              <a:t>CRUD operations with an ORM / ODM</a:t>
+            </a:r>
+            <a:endParaRPr lang="en-US" sz="850" dirty="0"/>
+          </a:p>
+        </p:txBody>
+      </p:sp>
+      <p:sp>
+        <p:nvSpPr>
+          <p:cNvPr id="62" name="Shape 55">
+            <a:extLst>
+              <a:ext uri="{FF2B5EF4-FFF2-40B4-BE49-F238E27FC236}">
+                <a16:creationId xmlns:a16="http://schemas.microsoft.com/office/drawing/2014/main" id="{7FB2EF6C-AD91-6C33-7EA6-450B7ED2404A}"/>
+              </a:ext>
+            </a:extLst>
+          </p:cNvPr>
+          <p:cNvSpPr/>
+          <p:nvPr/>
+        </p:nvSpPr>
+        <p:spPr>
+          <a:xfrm>
+            <a:off x="345098" y="4304163"/>
+            <a:ext cx="11521440" cy="196596"/>
+          </a:xfrm>
+          <a:prstGeom prst="rect">
+            <a:avLst/>
+          </a:prstGeom>
+          <a:solidFill>
+            <a:srgbClr val="FFFFFF"/>
+          </a:solidFill>
+          <a:ln w="6350">
+            <a:solidFill>
+              <a:srgbClr val="E8E8E8"/>
+            </a:solidFill>
+            <a:prstDash val="solid"/>
+          </a:ln>
+        </p:spPr>
+        <p:txBody>
+          <a:bodyPr/>
+          <a:lstStyle/>
+          <a:p>
+            <a:endParaRPr lang="en-PH"/>
+          </a:p>
+        </p:txBody>
+      </p:sp>
+      <p:sp>
+        <p:nvSpPr>
+          <p:cNvPr id="63" name="Shape 56">
+            <a:extLst>
+              <a:ext uri="{FF2B5EF4-FFF2-40B4-BE49-F238E27FC236}">
+                <a16:creationId xmlns:a16="http://schemas.microsoft.com/office/drawing/2014/main" id="{861980E2-EB8C-4BF0-5B9A-C04D90CEA1FE}"/>
+              </a:ext>
+            </a:extLst>
+          </p:cNvPr>
+          <p:cNvSpPr/>
+          <p:nvPr/>
+        </p:nvSpPr>
+        <p:spPr>
+          <a:xfrm>
+            <a:off x="793154" y="4368628"/>
+            <a:ext cx="67666" cy="67666"/>
+          </a:xfrm>
+          <a:prstGeom prst="ellipse">
+            <a:avLst/>
+          </a:prstGeom>
+          <a:solidFill>
+            <a:srgbClr val="5B8CF5"/>
+          </a:solidFill>
+          <a:ln w="12700">
+            <a:solidFill>
+              <a:srgbClr val="5B8CF5"/>
+            </a:solidFill>
+            <a:prstDash val="solid"/>
+          </a:ln>
+        </p:spPr>
+        <p:txBody>
+          <a:bodyPr/>
+          <a:lstStyle/>
+          <a:p>
+            <a:endParaRPr lang="en-PH"/>
+          </a:p>
+        </p:txBody>
+      </p:sp>
+      <p:sp>
+        <p:nvSpPr>
+          <p:cNvPr id="64" name="Text 57">
+            <a:extLst>
+              <a:ext uri="{FF2B5EF4-FFF2-40B4-BE49-F238E27FC236}">
+                <a16:creationId xmlns:a16="http://schemas.microsoft.com/office/drawing/2014/main" id="{01DEF43F-2ED5-A86A-CA3F-4D5B88B71555}"/>
+              </a:ext>
+            </a:extLst>
+          </p:cNvPr>
+          <p:cNvSpPr/>
+          <p:nvPr/>
+        </p:nvSpPr>
+        <p:spPr>
+          <a:xfrm>
+            <a:off x="921170" y="4304163"/>
+            <a:ext cx="10424160" cy="196596"/>
+          </a:xfrm>
+          <a:prstGeom prst="rect">
+            <a:avLst/>
+          </a:prstGeom>
+          <a:noFill/>
+          <a:ln/>
+        </p:spPr>
+        <p:txBody>
+          <a:bodyPr wrap="square" lIns="0" tIns="0" rIns="0" bIns="0" rtlCol="0" anchor="ctr"/>
+          <a:lstStyle/>
+          <a:p>
+            <a:pPr marL="0" indent="0">
+              <a:buNone/>
+            </a:pPr>
+            <a:r>
+              <a:rPr lang="en-US" sz="850" i="1" dirty="0">
+                <a:solidFill>
+                  <a:srgbClr val="333333"/>
+                </a:solidFill>
+                <a:latin typeface="Calibri" pitchFamily="34" charset="0"/>
+                <a:ea typeface="Calibri" pitchFamily="34" charset="-122"/>
+                <a:cs typeface="Calibri" pitchFamily="34" charset="-120"/>
+              </a:rPr>
+              <a:t>Schema design fundamentals</a:t>
+            </a:r>
+            <a:endParaRPr lang="en-US" sz="850" dirty="0"/>
+          </a:p>
+        </p:txBody>
+      </p:sp>
+      <p:sp>
+        <p:nvSpPr>
+          <p:cNvPr id="65" name="Shape 58">
+            <a:extLst>
+              <a:ext uri="{FF2B5EF4-FFF2-40B4-BE49-F238E27FC236}">
+                <a16:creationId xmlns:a16="http://schemas.microsoft.com/office/drawing/2014/main" id="{C2842727-60D1-3FE1-F55C-4983430996B7}"/>
+              </a:ext>
+            </a:extLst>
+          </p:cNvPr>
+          <p:cNvSpPr/>
+          <p:nvPr/>
+        </p:nvSpPr>
+        <p:spPr>
+          <a:xfrm>
+            <a:off x="345098" y="4500759"/>
+            <a:ext cx="11521440" cy="246888"/>
+          </a:xfrm>
+          <a:prstGeom prst="rect">
+            <a:avLst/>
+          </a:prstGeom>
+          <a:solidFill>
+            <a:srgbClr val="EEF2EE"/>
+          </a:solidFill>
+          <a:ln w="6350">
+            <a:solidFill>
+              <a:srgbClr val="E8E8E8"/>
+            </a:solidFill>
+            <a:prstDash val="solid"/>
+          </a:ln>
+        </p:spPr>
+        <p:txBody>
+          <a:bodyPr/>
+          <a:lstStyle/>
+          <a:p>
+            <a:endParaRPr lang="en-PH"/>
+          </a:p>
+        </p:txBody>
+      </p:sp>
+      <p:sp>
+        <p:nvSpPr>
+          <p:cNvPr id="66" name="Shape 59">
+            <a:extLst>
+              <a:ext uri="{FF2B5EF4-FFF2-40B4-BE49-F238E27FC236}">
+                <a16:creationId xmlns:a16="http://schemas.microsoft.com/office/drawing/2014/main" id="{5E077908-E620-FF33-5770-05AB43480564}"/>
+              </a:ext>
+            </a:extLst>
+          </p:cNvPr>
+          <p:cNvSpPr/>
+          <p:nvPr/>
+        </p:nvSpPr>
+        <p:spPr>
+          <a:xfrm>
+            <a:off x="445682" y="4541907"/>
+            <a:ext cx="164592" cy="164592"/>
+          </a:xfrm>
+          <a:prstGeom prst="ellipse">
+            <a:avLst/>
+          </a:prstGeom>
+          <a:solidFill>
+            <a:srgbClr val="2E4A7A"/>
+          </a:solidFill>
+          <a:ln w="12700">
+            <a:solidFill>
+              <a:srgbClr val="2E4A7A"/>
+            </a:solidFill>
+            <a:prstDash val="solid"/>
+          </a:ln>
+        </p:spPr>
+        <p:txBody>
+          <a:bodyPr/>
+          <a:lstStyle/>
+          <a:p>
+            <a:endParaRPr lang="en-PH"/>
+          </a:p>
+        </p:txBody>
+      </p:sp>
+      <p:sp>
+        <p:nvSpPr>
+          <p:cNvPr id="67" name="Text 60">
+            <a:extLst>
+              <a:ext uri="{FF2B5EF4-FFF2-40B4-BE49-F238E27FC236}">
+                <a16:creationId xmlns:a16="http://schemas.microsoft.com/office/drawing/2014/main" id="{D377A8D7-C346-37B7-7D20-471839B2FF90}"/>
+              </a:ext>
+            </a:extLst>
+          </p:cNvPr>
+          <p:cNvSpPr/>
+          <p:nvPr/>
+        </p:nvSpPr>
+        <p:spPr>
+          <a:xfrm>
+            <a:off x="445682" y="4541907"/>
+            <a:ext cx="164592" cy="164592"/>
+          </a:xfrm>
+          <a:prstGeom prst="rect">
+            <a:avLst/>
+          </a:prstGeom>
+          <a:noFill/>
+          <a:ln/>
+        </p:spPr>
+        <p:txBody>
+          <a:bodyPr wrap="square" lIns="0" tIns="0" rIns="0" bIns="0" rtlCol="0" anchor="ctr"/>
+          <a:lstStyle/>
+          <a:p>
+            <a:pPr marL="0" indent="0" algn="ctr">
+              <a:buNone/>
+            </a:pPr>
+            <a:r>
+              <a:rPr lang="en-US" sz="700" b="1" dirty="0">
+                <a:solidFill>
+                  <a:srgbClr val="FFFFFF"/>
+                </a:solidFill>
+                <a:latin typeface="Calibri" pitchFamily="34" charset="0"/>
+                <a:ea typeface="Calibri" pitchFamily="34" charset="-122"/>
+                <a:cs typeface="Calibri" pitchFamily="34" charset="-120"/>
+              </a:rPr>
+              <a:t>5</a:t>
+            </a:r>
+            <a:endParaRPr lang="en-US" sz="700" dirty="0"/>
+          </a:p>
+        </p:txBody>
+      </p:sp>
+      <p:sp>
+        <p:nvSpPr>
+          <p:cNvPr id="68" name="Text 61">
+            <a:extLst>
+              <a:ext uri="{FF2B5EF4-FFF2-40B4-BE49-F238E27FC236}">
+                <a16:creationId xmlns:a16="http://schemas.microsoft.com/office/drawing/2014/main" id="{40340C25-C5E4-77C6-1C06-108918AC05AA}"/>
+              </a:ext>
+            </a:extLst>
+          </p:cNvPr>
+          <p:cNvSpPr/>
+          <p:nvPr/>
+        </p:nvSpPr>
+        <p:spPr>
+          <a:xfrm>
+            <a:off x="683426" y="4500759"/>
+            <a:ext cx="8961120" cy="246888"/>
+          </a:xfrm>
+          <a:prstGeom prst="rect">
+            <a:avLst/>
+          </a:prstGeom>
+          <a:noFill/>
+          <a:ln/>
+        </p:spPr>
+        <p:txBody>
+          <a:bodyPr wrap="square" lIns="0" tIns="0" rIns="0" bIns="0" rtlCol="0" anchor="ctr"/>
+          <a:lstStyle/>
+          <a:p>
+            <a:pPr marL="0" indent="0">
+              <a:buNone/>
+            </a:pPr>
+            <a:r>
+              <a:rPr lang="en-US" sz="950" b="1" dirty="0">
+                <a:solidFill>
+                  <a:srgbClr val="111111"/>
+                </a:solidFill>
+                <a:latin typeface="Calibri" pitchFamily="34" charset="0"/>
+                <a:ea typeface="Calibri" pitchFamily="34" charset="-122"/>
+                <a:cs typeface="Calibri" pitchFamily="34" charset="-120"/>
+              </a:rPr>
+              <a:t>Wrap-Up &amp; Q&amp;A</a:t>
+            </a:r>
+            <a:endParaRPr lang="en-US" sz="950" dirty="0"/>
+          </a:p>
+        </p:txBody>
+      </p:sp>
+      <p:sp>
+        <p:nvSpPr>
+          <p:cNvPr id="69" name="Text 62">
+            <a:extLst>
+              <a:ext uri="{FF2B5EF4-FFF2-40B4-BE49-F238E27FC236}">
+                <a16:creationId xmlns:a16="http://schemas.microsoft.com/office/drawing/2014/main" id="{C29D817B-1DE3-6C8D-5B6A-E2635081FD7B}"/>
+              </a:ext>
+            </a:extLst>
+          </p:cNvPr>
+          <p:cNvSpPr/>
+          <p:nvPr/>
+        </p:nvSpPr>
+        <p:spPr>
+          <a:xfrm>
+            <a:off x="9717698" y="4500759"/>
+            <a:ext cx="2011680" cy="246888"/>
+          </a:xfrm>
+          <a:prstGeom prst="rect">
+            <a:avLst/>
+          </a:prstGeom>
+          <a:noFill/>
+          <a:ln/>
+        </p:spPr>
+        <p:txBody>
+          <a:bodyPr wrap="square" lIns="0" tIns="0" rIns="0" bIns="0" rtlCol="0" anchor="ctr"/>
+          <a:lstStyle/>
+          <a:p>
+            <a:pPr marL="0" indent="0" algn="r">
+              <a:buNone/>
+            </a:pPr>
+            <a:r>
+              <a:rPr lang="en-US" sz="900" b="1" dirty="0">
+                <a:solidFill>
+                  <a:srgbClr val="2E4A7A"/>
+                </a:solidFill>
+                <a:latin typeface="Calibri" pitchFamily="34" charset="0"/>
+                <a:ea typeface="Calibri" pitchFamily="34" charset="-122"/>
+                <a:cs typeface="Calibri" pitchFamily="34" charset="-120"/>
+              </a:rPr>
+              <a:t>~20 min</a:t>
+            </a:r>
+            <a:endParaRPr lang="en-US" sz="900" dirty="0"/>
+          </a:p>
+        </p:txBody>
+      </p:sp>
+      <p:sp>
+        <p:nvSpPr>
+          <p:cNvPr id="70" name="Shape 63">
+            <a:extLst>
+              <a:ext uri="{FF2B5EF4-FFF2-40B4-BE49-F238E27FC236}">
+                <a16:creationId xmlns:a16="http://schemas.microsoft.com/office/drawing/2014/main" id="{37FB5684-295F-16A2-6410-CACE0ED188D8}"/>
+              </a:ext>
+            </a:extLst>
+          </p:cNvPr>
+          <p:cNvSpPr/>
+          <p:nvPr/>
+        </p:nvSpPr>
+        <p:spPr>
+          <a:xfrm>
+            <a:off x="345098" y="4747647"/>
+            <a:ext cx="11521440" cy="196596"/>
+          </a:xfrm>
+          <a:prstGeom prst="rect">
+            <a:avLst/>
+          </a:prstGeom>
+          <a:solidFill>
+            <a:srgbClr val="FFFFFF"/>
+          </a:solidFill>
+          <a:ln w="6350">
+            <a:solidFill>
+              <a:srgbClr val="E8E8E8"/>
+            </a:solidFill>
+            <a:prstDash val="solid"/>
+          </a:ln>
+        </p:spPr>
+        <p:txBody>
+          <a:bodyPr/>
+          <a:lstStyle/>
+          <a:p>
+            <a:endParaRPr lang="en-PH"/>
+          </a:p>
+        </p:txBody>
+      </p:sp>
+      <p:sp>
+        <p:nvSpPr>
+          <p:cNvPr id="71" name="Shape 64">
+            <a:extLst>
+              <a:ext uri="{FF2B5EF4-FFF2-40B4-BE49-F238E27FC236}">
+                <a16:creationId xmlns:a16="http://schemas.microsoft.com/office/drawing/2014/main" id="{E4254718-3E37-4228-F5FB-272D0A516770}"/>
+              </a:ext>
+            </a:extLst>
+          </p:cNvPr>
+          <p:cNvSpPr/>
+          <p:nvPr/>
+        </p:nvSpPr>
+        <p:spPr>
+          <a:xfrm>
+            <a:off x="793154" y="4812112"/>
+            <a:ext cx="67666" cy="67666"/>
+          </a:xfrm>
+          <a:prstGeom prst="ellipse">
+            <a:avLst/>
+          </a:prstGeom>
+          <a:solidFill>
+            <a:srgbClr val="5B8CF5"/>
+          </a:solidFill>
+          <a:ln w="12700">
+            <a:solidFill>
+              <a:srgbClr val="5B8CF5"/>
+            </a:solidFill>
+            <a:prstDash val="solid"/>
+          </a:ln>
+        </p:spPr>
+        <p:txBody>
+          <a:bodyPr/>
+          <a:lstStyle/>
+          <a:p>
+            <a:endParaRPr lang="en-PH"/>
+          </a:p>
+        </p:txBody>
+      </p:sp>
+      <p:sp>
+        <p:nvSpPr>
+          <p:cNvPr id="72" name="Text 65">
+            <a:extLst>
+              <a:ext uri="{FF2B5EF4-FFF2-40B4-BE49-F238E27FC236}">
+                <a16:creationId xmlns:a16="http://schemas.microsoft.com/office/drawing/2014/main" id="{3DB0849C-60AB-E558-9A3C-1F1C64096B82}"/>
+              </a:ext>
+            </a:extLst>
+          </p:cNvPr>
+          <p:cNvSpPr/>
+          <p:nvPr/>
+        </p:nvSpPr>
+        <p:spPr>
+          <a:xfrm>
+            <a:off x="921170" y="4747647"/>
+            <a:ext cx="10424160" cy="196596"/>
+          </a:xfrm>
+          <a:prstGeom prst="rect">
+            <a:avLst/>
+          </a:prstGeom>
+          <a:noFill/>
+          <a:ln/>
+        </p:spPr>
+        <p:txBody>
+          <a:bodyPr wrap="square" lIns="0" tIns="0" rIns="0" bIns="0" rtlCol="0" anchor="ctr"/>
+          <a:lstStyle/>
+          <a:p>
+            <a:pPr marL="0" indent="0">
+              <a:buNone/>
+            </a:pPr>
+            <a:r>
+              <a:rPr lang="en-US" sz="850" i="1" dirty="0">
+                <a:solidFill>
+                  <a:srgbClr val="333333"/>
+                </a:solidFill>
+                <a:latin typeface="Calibri" pitchFamily="34" charset="0"/>
+                <a:ea typeface="Calibri" pitchFamily="34" charset="-122"/>
+                <a:cs typeface="Calibri" pitchFamily="34" charset="-120"/>
+              </a:rPr>
+              <a:t>Key takeaways &amp; recap</a:t>
+            </a:r>
+            <a:endParaRPr lang="en-US" sz="850" dirty="0"/>
+          </a:p>
+        </p:txBody>
+      </p:sp>
+      <p:sp>
+        <p:nvSpPr>
+          <p:cNvPr id="73" name="Shape 66">
+            <a:extLst>
+              <a:ext uri="{FF2B5EF4-FFF2-40B4-BE49-F238E27FC236}">
+                <a16:creationId xmlns:a16="http://schemas.microsoft.com/office/drawing/2014/main" id="{36335BCF-6332-4BC3-FCFB-40234AE346E5}"/>
+              </a:ext>
+            </a:extLst>
+          </p:cNvPr>
+          <p:cNvSpPr/>
+          <p:nvPr/>
+        </p:nvSpPr>
+        <p:spPr>
+          <a:xfrm>
+            <a:off x="345098" y="4944243"/>
+            <a:ext cx="11521440" cy="196596"/>
+          </a:xfrm>
+          <a:prstGeom prst="rect">
+            <a:avLst/>
+          </a:prstGeom>
+          <a:solidFill>
+            <a:srgbClr val="FAFAFA"/>
+          </a:solidFill>
+          <a:ln w="6350">
+            <a:solidFill>
+              <a:srgbClr val="E8E8E8"/>
+            </a:solidFill>
+            <a:prstDash val="solid"/>
+          </a:ln>
+        </p:spPr>
+        <p:txBody>
+          <a:bodyPr/>
+          <a:lstStyle/>
+          <a:p>
+            <a:endParaRPr lang="en-PH"/>
+          </a:p>
+        </p:txBody>
+      </p:sp>
+      <p:sp>
+        <p:nvSpPr>
+          <p:cNvPr id="74" name="Shape 67">
+            <a:extLst>
+              <a:ext uri="{FF2B5EF4-FFF2-40B4-BE49-F238E27FC236}">
+                <a16:creationId xmlns:a16="http://schemas.microsoft.com/office/drawing/2014/main" id="{63417EC5-A917-1CFF-B580-783BFAE437C4}"/>
+              </a:ext>
+            </a:extLst>
+          </p:cNvPr>
+          <p:cNvSpPr/>
+          <p:nvPr/>
+        </p:nvSpPr>
+        <p:spPr>
+          <a:xfrm>
+            <a:off x="793154" y="5008708"/>
+            <a:ext cx="67666" cy="67666"/>
+          </a:xfrm>
+          <a:prstGeom prst="ellipse">
+            <a:avLst/>
+          </a:prstGeom>
+          <a:solidFill>
+            <a:srgbClr val="5B8CF5"/>
+          </a:solidFill>
+          <a:ln w="12700">
+            <a:solidFill>
+              <a:srgbClr val="5B8CF5"/>
+            </a:solidFill>
+            <a:prstDash val="solid"/>
+          </a:ln>
+        </p:spPr>
+        <p:txBody>
+          <a:bodyPr/>
+          <a:lstStyle/>
+          <a:p>
+            <a:endParaRPr lang="en-PH"/>
+          </a:p>
+        </p:txBody>
+      </p:sp>
+      <p:sp>
+        <p:nvSpPr>
+          <p:cNvPr id="75" name="Text 68">
+            <a:extLst>
+              <a:ext uri="{FF2B5EF4-FFF2-40B4-BE49-F238E27FC236}">
+                <a16:creationId xmlns:a16="http://schemas.microsoft.com/office/drawing/2014/main" id="{CDF55FEC-DCF9-0AE5-9BB2-ECB98D774B44}"/>
+              </a:ext>
+            </a:extLst>
+          </p:cNvPr>
+          <p:cNvSpPr/>
+          <p:nvPr/>
+        </p:nvSpPr>
+        <p:spPr>
+          <a:xfrm>
+            <a:off x="921170" y="4944243"/>
+            <a:ext cx="10424160" cy="196596"/>
+          </a:xfrm>
+          <a:prstGeom prst="rect">
+            <a:avLst/>
+          </a:prstGeom>
+          <a:noFill/>
+          <a:ln/>
+        </p:spPr>
+        <p:txBody>
+          <a:bodyPr wrap="square" lIns="0" tIns="0" rIns="0" bIns="0" rtlCol="0" anchor="ctr"/>
+          <a:lstStyle/>
+          <a:p>
+            <a:pPr marL="0" indent="0">
+              <a:buNone/>
+            </a:pPr>
+            <a:r>
+              <a:rPr lang="en-US" sz="850" i="1" dirty="0">
+                <a:solidFill>
+                  <a:srgbClr val="333333"/>
+                </a:solidFill>
+                <a:latin typeface="Calibri" pitchFamily="34" charset="0"/>
+                <a:ea typeface="Calibri" pitchFamily="34" charset="-122"/>
+                <a:cs typeface="Calibri" pitchFamily="34" charset="-120"/>
+              </a:rPr>
+              <a:t>Open floor Q&amp;A</a:t>
+            </a:r>
+            <a:endParaRPr lang="en-US" sz="850" dirty="0"/>
+          </a:p>
+        </p:txBody>
+      </p:sp>
+      <p:sp>
+        <p:nvSpPr>
+          <p:cNvPr id="76" name="Shape 69">
+            <a:extLst>
+              <a:ext uri="{FF2B5EF4-FFF2-40B4-BE49-F238E27FC236}">
+                <a16:creationId xmlns:a16="http://schemas.microsoft.com/office/drawing/2014/main" id="{DED17BF2-1044-1458-721C-06922D95C1A2}"/>
+              </a:ext>
+            </a:extLst>
+          </p:cNvPr>
+          <p:cNvSpPr/>
+          <p:nvPr/>
+        </p:nvSpPr>
+        <p:spPr>
+          <a:xfrm>
+            <a:off x="345098" y="5140839"/>
+            <a:ext cx="11521440" cy="196596"/>
+          </a:xfrm>
+          <a:prstGeom prst="rect">
+            <a:avLst/>
+          </a:prstGeom>
+          <a:solidFill>
+            <a:srgbClr val="FFFFFF"/>
+          </a:solidFill>
+          <a:ln w="6350">
+            <a:solidFill>
+              <a:srgbClr val="E8E8E8"/>
+            </a:solidFill>
+            <a:prstDash val="solid"/>
+          </a:ln>
+        </p:spPr>
+        <p:txBody>
+          <a:bodyPr/>
+          <a:lstStyle/>
+          <a:p>
+            <a:endParaRPr lang="en-PH"/>
+          </a:p>
+        </p:txBody>
+      </p:sp>
+      <p:sp>
+        <p:nvSpPr>
+          <p:cNvPr id="77" name="Shape 70">
+            <a:extLst>
+              <a:ext uri="{FF2B5EF4-FFF2-40B4-BE49-F238E27FC236}">
+                <a16:creationId xmlns:a16="http://schemas.microsoft.com/office/drawing/2014/main" id="{CE3E3BEA-B0A2-6793-5C94-925C0EE97337}"/>
+              </a:ext>
+            </a:extLst>
+          </p:cNvPr>
+          <p:cNvSpPr/>
+          <p:nvPr/>
+        </p:nvSpPr>
+        <p:spPr>
+          <a:xfrm>
+            <a:off x="793154" y="5205304"/>
+            <a:ext cx="67666" cy="67666"/>
+          </a:xfrm>
+          <a:prstGeom prst="ellipse">
+            <a:avLst/>
+          </a:prstGeom>
+          <a:solidFill>
+            <a:srgbClr val="5B8CF5"/>
+          </a:solidFill>
+          <a:ln w="12700">
+            <a:solidFill>
+              <a:srgbClr val="5B8CF5"/>
+            </a:solidFill>
+            <a:prstDash val="solid"/>
+          </a:ln>
+        </p:spPr>
+        <p:txBody>
+          <a:bodyPr/>
+          <a:lstStyle/>
+          <a:p>
+            <a:endParaRPr lang="en-PH"/>
+          </a:p>
+        </p:txBody>
+      </p:sp>
+      <p:sp>
+        <p:nvSpPr>
+          <p:cNvPr id="78" name="Text 71">
+            <a:extLst>
+              <a:ext uri="{FF2B5EF4-FFF2-40B4-BE49-F238E27FC236}">
+                <a16:creationId xmlns:a16="http://schemas.microsoft.com/office/drawing/2014/main" id="{5D6445EE-9793-39F4-1D38-7C1B54BC6F50}"/>
+              </a:ext>
+            </a:extLst>
+          </p:cNvPr>
+          <p:cNvSpPr/>
+          <p:nvPr/>
+        </p:nvSpPr>
+        <p:spPr>
+          <a:xfrm>
+            <a:off x="921170" y="5140839"/>
+            <a:ext cx="10424160" cy="196596"/>
+          </a:xfrm>
+          <a:prstGeom prst="rect">
+            <a:avLst/>
+          </a:prstGeom>
+          <a:noFill/>
+          <a:ln/>
+        </p:spPr>
+        <p:txBody>
+          <a:bodyPr wrap="square" lIns="0" tIns="0" rIns="0" bIns="0" rtlCol="0" anchor="ctr"/>
+          <a:lstStyle/>
+          <a:p>
+            <a:pPr marL="0" indent="0">
+              <a:buNone/>
+            </a:pPr>
+            <a:r>
+              <a:rPr lang="en-US" sz="850" i="1" dirty="0">
+                <a:solidFill>
+                  <a:srgbClr val="333333"/>
+                </a:solidFill>
+                <a:latin typeface="Calibri" pitchFamily="34" charset="0"/>
+                <a:ea typeface="Calibri" pitchFamily="34" charset="-122"/>
+                <a:cs typeface="Calibri" pitchFamily="34" charset="-120"/>
+              </a:rPr>
+              <a:t>Resources &amp; next steps</a:t>
+            </a:r>
+            <a:endParaRPr lang="en-US" sz="850" dirty="0"/>
+          </a:p>
+        </p:txBody>
+      </p:sp>
+    </p:spTree>
+    <p:extLst>
+      <p:ext uri="{BB962C8B-B14F-4D97-AF65-F5344CB8AC3E}">
+        <p14:creationId xmlns:p14="http://schemas.microsoft.com/office/powerpoint/2010/main" val="3297987904"/>
+      </p:ext>
+    </p:extLst>
+  </p:cSld>
+  <p:clrMapOvr>
+    <a:masterClrMapping/>
+  </p:clrMapOvr>
+</p:sld>
+</file>
+
+<file path=ppt/slides/slide5.xml><?xml version="1.0" encoding="utf-8"?>
+<p:sld xmlns:a="http://schemas.openxmlformats.org/drawingml/2006/main" xmlns:r="http://schemas.openxmlformats.org/officeDocument/2006/relationships" xmlns:p="http://schemas.openxmlformats.org/presentationml/2006/main">
+  <p:cSld>
+    <p:spTree>
+      <p:nvGrpSpPr>
+        <p:cNvPr id="1" name="">
+          <a:extLst>
+            <a:ext uri="{FF2B5EF4-FFF2-40B4-BE49-F238E27FC236}">
               <a16:creationId xmlns:a16="http://schemas.microsoft.com/office/drawing/2014/main" id="{30B0F827-7F16-DC13-82A0-803417A63F41}"/>
             </a:ext>
           </a:extLst>
@@ -5962,7 +13865,7 @@
 </p:sld>
 </file>
 
-<file path=ppt/slides/slide4.xml><?xml version="1.0" encoding="utf-8"?>
+<file path=ppt/slides/slide6.xml><?xml version="1.0" encoding="utf-8"?>
 <p:sld xmlns:a="http://schemas.openxmlformats.org/drawingml/2006/main" xmlns:r="http://schemas.openxmlformats.org/officeDocument/2006/relationships" xmlns:p="http://schemas.openxmlformats.org/presentationml/2006/main">
   <p:cSld>
     <p:spTree>
@@ -6541,7 +14444,7 @@
 </p:sld>
 </file>
 
-<file path=ppt/slides/slide5.xml><?xml version="1.0" encoding="utf-8"?>
+<file path=ppt/slides/slide7.xml><?xml version="1.0" encoding="utf-8"?>
 <p:sld xmlns:a="http://schemas.openxmlformats.org/drawingml/2006/main" xmlns:r="http://schemas.openxmlformats.org/officeDocument/2006/relationships" xmlns:p="http://schemas.openxmlformats.org/presentationml/2006/main">
   <p:cSld>
     <p:spTree>
@@ -7219,7 +15122,7 @@
 </p:sld>
 </file>
 
-<file path=ppt/slides/slide6.xml><?xml version="1.0" encoding="utf-8"?>
+<file path=ppt/slides/slide8.xml><?xml version="1.0" encoding="utf-8"?>
 <p:sld xmlns:a="http://schemas.openxmlformats.org/drawingml/2006/main" xmlns:r="http://schemas.openxmlformats.org/officeDocument/2006/relationships" xmlns:p="http://schemas.openxmlformats.org/presentationml/2006/main">
   <p:cSld>
     <p:spTree>
@@ -7800,7 +15703,7 @@
 </p:sld>
 </file>
 
-<file path=ppt/slides/slide7.xml><?xml version="1.0" encoding="utf-8"?>
+<file path=ppt/slides/slide9.xml><?xml version="1.0" encoding="utf-8"?>
 <p:sld xmlns:a="http://schemas.openxmlformats.org/drawingml/2006/main" xmlns:r="http://schemas.openxmlformats.org/officeDocument/2006/relationships" xmlns:p="http://schemas.openxmlformats.org/presentationml/2006/main">
   <p:cSld>
     <p:spTree>
@@ -8405,639 +16308,6 @@
     <p:extLst>
       <p:ext uri="{BB962C8B-B14F-4D97-AF65-F5344CB8AC3E}">
         <p14:creationId xmlns:p14="http://schemas.microsoft.com/office/powerpoint/2010/main" val="4245684545"/>
-      </p:ext>
-    </p:extLst>
-  </p:cSld>
-  <p:clrMapOvr>
-    <a:masterClrMapping/>
-  </p:clrMapOvr>
-</p:sld>
-</file>
-
-<file path=ppt/slides/slide8.xml><?xml version="1.0" encoding="utf-8"?>
-<p:sld xmlns:a="http://schemas.openxmlformats.org/drawingml/2006/main" xmlns:r="http://schemas.openxmlformats.org/officeDocument/2006/relationships" xmlns:p="http://schemas.openxmlformats.org/presentationml/2006/main">
-  <p:cSld>
-    <p:spTree>
-      <p:nvGrpSpPr>
-        <p:cNvPr id="1" name="">
-          <a:extLst>
-            <a:ext uri="{FF2B5EF4-FFF2-40B4-BE49-F238E27FC236}">
-              <a16:creationId xmlns:a16="http://schemas.microsoft.com/office/drawing/2014/main" id="{EB926461-778A-D3E5-4C48-F2168536D9C6}"/>
-            </a:ext>
-          </a:extLst>
-        </p:cNvPr>
-        <p:cNvGrpSpPr/>
-        <p:nvPr/>
-      </p:nvGrpSpPr>
-      <p:grpSpPr>
-        <a:xfrm>
-          <a:off x="0" y="0"/>
-          <a:ext cx="0" cy="0"/>
-          <a:chOff x="0" y="0"/>
-          <a:chExt cx="0" cy="0"/>
-        </a:xfrm>
-      </p:grpSpPr>
-      <p:sp>
-        <p:nvSpPr>
-          <p:cNvPr id="2" name="TextBox 1">
-            <a:extLst>
-              <a:ext uri="{FF2B5EF4-FFF2-40B4-BE49-F238E27FC236}">
-                <a16:creationId xmlns:a16="http://schemas.microsoft.com/office/drawing/2014/main" id="{8A97854A-CE4E-6AF6-115B-F2D2A7520779}"/>
-              </a:ext>
-            </a:extLst>
-          </p:cNvPr>
-          <p:cNvSpPr txBox="1"/>
-          <p:nvPr/>
-        </p:nvSpPr>
-        <p:spPr>
-          <a:xfrm>
-            <a:off x="106490" y="126682"/>
-            <a:ext cx="1444370" cy="276999"/>
-          </a:xfrm>
-          <a:prstGeom prst="rect">
-            <a:avLst/>
-          </a:prstGeom>
-          <a:noFill/>
-        </p:spPr>
-        <p:txBody>
-          <a:bodyPr wrap="none" rtlCol="0">
-            <a:spAutoFit/>
-          </a:bodyPr>
-          <a:lstStyle/>
-          <a:p>
-            <a:r>
-              <a:rPr lang="en-US" sz="1200" dirty="0">
-                <a:latin typeface="+mj-lt"/>
-              </a:rPr>
-              <a:t>REACT WORKSHOP</a:t>
-            </a:r>
-            <a:endParaRPr lang="en-PH" sz="1200" dirty="0">
-              <a:latin typeface="+mj-lt"/>
-            </a:endParaRPr>
-          </a:p>
-        </p:txBody>
-      </p:sp>
-      <p:pic>
-        <p:nvPicPr>
-          <p:cNvPr id="4" name="Picture 3">
-            <a:extLst>
-              <a:ext uri="{FF2B5EF4-FFF2-40B4-BE49-F238E27FC236}">
-                <a16:creationId xmlns:a16="http://schemas.microsoft.com/office/drawing/2014/main" id="{3DAFE6DE-0FFF-C26C-5D15-0A04DB0D079D}"/>
-              </a:ext>
-            </a:extLst>
-          </p:cNvPr>
-          <p:cNvPicPr>
-            <a:picLocks noChangeAspect="1"/>
-          </p:cNvPicPr>
-          <p:nvPr/>
-        </p:nvPicPr>
-        <p:blipFill>
-          <a:blip r:embed="rId2">
-            <a:extLst>
-              <a:ext uri="{28A0092B-C50C-407E-A947-70E740481C1C}">
-                <a14:useLocalDpi xmlns:a14="http://schemas.microsoft.com/office/drawing/2010/main" val="0"/>
-              </a:ext>
-            </a:extLst>
-          </a:blip>
-          <a:stretch>
-            <a:fillRect/>
-          </a:stretch>
-        </p:blipFill>
-        <p:spPr>
-          <a:xfrm>
-            <a:off x="11305222" y="130398"/>
-            <a:ext cx="780288" cy="723333"/>
-          </a:xfrm>
-          <a:prstGeom prst="rect">
-            <a:avLst/>
-          </a:prstGeom>
-        </p:spPr>
-      </p:pic>
-      <p:sp>
-        <p:nvSpPr>
-          <p:cNvPr id="5" name="TextBox 4">
-            <a:extLst>
-              <a:ext uri="{FF2B5EF4-FFF2-40B4-BE49-F238E27FC236}">
-                <a16:creationId xmlns:a16="http://schemas.microsoft.com/office/drawing/2014/main" id="{65BA651D-65F0-920F-F16A-DB173828EF1C}"/>
-              </a:ext>
-            </a:extLst>
-          </p:cNvPr>
-          <p:cNvSpPr txBox="1"/>
-          <p:nvPr/>
-        </p:nvSpPr>
-        <p:spPr>
-          <a:xfrm>
-            <a:off x="4079358" y="126682"/>
-            <a:ext cx="4033284" cy="461665"/>
-          </a:xfrm>
-          <a:prstGeom prst="rect">
-            <a:avLst/>
-          </a:prstGeom>
-          <a:noFill/>
-        </p:spPr>
-        <p:txBody>
-          <a:bodyPr wrap="none" rtlCol="0">
-            <a:spAutoFit/>
-          </a:bodyPr>
-          <a:lstStyle/>
-          <a:p>
-            <a:pPr algn="ctr"/>
-            <a:r>
-              <a:rPr lang="en-US" sz="1200" b="1" dirty="0">
-                <a:latin typeface="+mj-lt"/>
-              </a:rPr>
-              <a:t>REACT ESSENTIALS:</a:t>
-            </a:r>
-          </a:p>
-          <a:p>
-            <a:pPr algn="ctr"/>
-            <a:r>
-              <a:rPr lang="en-US" sz="1200" b="1" dirty="0">
-                <a:latin typeface="+mj-lt"/>
-              </a:rPr>
-              <a:t>BUILDING INTERACTIVE WEB APPLICATIONS WITH APIs</a:t>
-            </a:r>
-            <a:endParaRPr lang="en-PH" sz="1200" b="1" dirty="0">
-              <a:latin typeface="+mj-lt"/>
-            </a:endParaRPr>
-          </a:p>
-        </p:txBody>
-      </p:sp>
-      <p:cxnSp>
-        <p:nvCxnSpPr>
-          <p:cNvPr id="10" name="Straight Connector 9">
-            <a:extLst>
-              <a:ext uri="{FF2B5EF4-FFF2-40B4-BE49-F238E27FC236}">
-                <a16:creationId xmlns:a16="http://schemas.microsoft.com/office/drawing/2014/main" id="{B0850B5F-43D9-274F-3461-4D4431D3FF5D}"/>
-              </a:ext>
-            </a:extLst>
-          </p:cNvPr>
-          <p:cNvCxnSpPr>
-            <a:cxnSpLocks/>
-          </p:cNvCxnSpPr>
-          <p:nvPr/>
-        </p:nvCxnSpPr>
-        <p:spPr>
-          <a:xfrm>
-            <a:off x="246888" y="615779"/>
-            <a:ext cx="10991088" cy="0"/>
-          </a:xfrm>
-          <a:prstGeom prst="line">
-            <a:avLst/>
-          </a:prstGeom>
-        </p:spPr>
-        <p:style>
-          <a:lnRef idx="2">
-            <a:schemeClr val="accent1"/>
-          </a:lnRef>
-          <a:fillRef idx="0">
-            <a:schemeClr val="accent1"/>
-          </a:fillRef>
-          <a:effectRef idx="1">
-            <a:schemeClr val="accent1"/>
-          </a:effectRef>
-          <a:fontRef idx="minor">
-            <a:schemeClr val="tx1"/>
-          </a:fontRef>
-        </p:style>
-      </p:cxnSp>
-      <p:sp>
-        <p:nvSpPr>
-          <p:cNvPr id="20" name="TextBox 19">
-            <a:extLst>
-              <a:ext uri="{FF2B5EF4-FFF2-40B4-BE49-F238E27FC236}">
-                <a16:creationId xmlns:a16="http://schemas.microsoft.com/office/drawing/2014/main" id="{E674A659-C195-214E-9BBF-2DAFCC8F51BE}"/>
-              </a:ext>
-            </a:extLst>
-          </p:cNvPr>
-          <p:cNvSpPr txBox="1"/>
-          <p:nvPr/>
-        </p:nvSpPr>
-        <p:spPr>
-          <a:xfrm>
-            <a:off x="9328872" y="129474"/>
-            <a:ext cx="2025426" cy="276999"/>
-          </a:xfrm>
-          <a:prstGeom prst="rect">
-            <a:avLst/>
-          </a:prstGeom>
-          <a:noFill/>
-        </p:spPr>
-        <p:txBody>
-          <a:bodyPr wrap="none" rtlCol="0">
-            <a:spAutoFit/>
-          </a:bodyPr>
-          <a:lstStyle/>
-          <a:p>
-            <a:r>
-              <a:rPr lang="en-US" sz="1200" dirty="0">
-                <a:latin typeface="+mj-lt"/>
-              </a:rPr>
-              <a:t>First City Providential College </a:t>
-            </a:r>
-            <a:endParaRPr lang="en-PH" sz="1200" dirty="0">
-              <a:latin typeface="+mj-lt"/>
-            </a:endParaRPr>
-          </a:p>
-        </p:txBody>
-      </p:sp>
-      <p:sp>
-        <p:nvSpPr>
-          <p:cNvPr id="3" name="TextBox 2">
-            <a:extLst>
-              <a:ext uri="{FF2B5EF4-FFF2-40B4-BE49-F238E27FC236}">
-                <a16:creationId xmlns:a16="http://schemas.microsoft.com/office/drawing/2014/main" id="{F3DD3856-8DB3-D3B9-2C2B-6DA613710F05}"/>
-              </a:ext>
-            </a:extLst>
-          </p:cNvPr>
-          <p:cNvSpPr txBox="1"/>
-          <p:nvPr/>
-        </p:nvSpPr>
-        <p:spPr>
-          <a:xfrm>
-            <a:off x="10938914" y="6204382"/>
-            <a:ext cx="1146596" cy="523220"/>
-          </a:xfrm>
-          <a:prstGeom prst="rect">
-            <a:avLst/>
-          </a:prstGeom>
-          <a:noFill/>
-        </p:spPr>
-        <p:txBody>
-          <a:bodyPr wrap="none" rtlCol="0">
-            <a:spAutoFit/>
-          </a:bodyPr>
-          <a:lstStyle/>
-          <a:p>
-            <a:r>
-              <a:rPr lang="en-US" sz="2800" dirty="0">
-                <a:latin typeface="Aptos Black" panose="020B0004020202020204" pitchFamily="34" charset="0"/>
-              </a:rPr>
-              <a:t>DAY 1</a:t>
-            </a:r>
-            <a:endParaRPr lang="en-PH" sz="2800" dirty="0">
-              <a:latin typeface="Aptos Black" panose="020B0004020202020204" pitchFamily="34" charset="0"/>
-            </a:endParaRPr>
-          </a:p>
-        </p:txBody>
-      </p:sp>
-      <p:sp>
-        <p:nvSpPr>
-          <p:cNvPr id="6" name="TextBox 5">
-            <a:extLst>
-              <a:ext uri="{FF2B5EF4-FFF2-40B4-BE49-F238E27FC236}">
-                <a16:creationId xmlns:a16="http://schemas.microsoft.com/office/drawing/2014/main" id="{3F1718C8-A437-31BB-767C-53F56EBACDF0}"/>
-              </a:ext>
-            </a:extLst>
-          </p:cNvPr>
-          <p:cNvSpPr txBox="1"/>
-          <p:nvPr/>
-        </p:nvSpPr>
-        <p:spPr>
-          <a:xfrm>
-            <a:off x="246888" y="713232"/>
-            <a:ext cx="7162089" cy="646331"/>
-          </a:xfrm>
-          <a:prstGeom prst="rect">
-            <a:avLst/>
-          </a:prstGeom>
-          <a:noFill/>
-        </p:spPr>
-        <p:txBody>
-          <a:bodyPr wrap="none" rtlCol="0">
-            <a:spAutoFit/>
-          </a:bodyPr>
-          <a:lstStyle/>
-          <a:p>
-            <a:r>
-              <a:rPr lang="en-US" sz="3600" dirty="0">
-                <a:latin typeface="Aptos Black" panose="020B0004020202020204" pitchFamily="34" charset="0"/>
-              </a:rPr>
-              <a:t>HANDS-ON </a:t>
-            </a:r>
-            <a:r>
-              <a:rPr lang="en-US" sz="3600" dirty="0">
-                <a:solidFill>
-                  <a:schemeClr val="bg1">
-                    <a:lumMod val="75000"/>
-                  </a:schemeClr>
-                </a:solidFill>
-                <a:latin typeface="Aptos Black" panose="020B0004020202020204" pitchFamily="34" charset="0"/>
-              </a:rPr>
-              <a:t>REACT APPLICATION</a:t>
-            </a:r>
-            <a:endParaRPr lang="en-PH" sz="3600" dirty="0">
-              <a:solidFill>
-                <a:schemeClr val="bg1">
-                  <a:lumMod val="75000"/>
-                </a:schemeClr>
-              </a:solidFill>
-              <a:latin typeface="Aptos Black" panose="020B0004020202020204" pitchFamily="34" charset="0"/>
-            </a:endParaRPr>
-          </a:p>
-        </p:txBody>
-      </p:sp>
-      <p:sp>
-        <p:nvSpPr>
-          <p:cNvPr id="7" name="TextBox 6">
-            <a:extLst>
-              <a:ext uri="{FF2B5EF4-FFF2-40B4-BE49-F238E27FC236}">
-                <a16:creationId xmlns:a16="http://schemas.microsoft.com/office/drawing/2014/main" id="{C02F2E04-200A-83F7-AA3A-027B649FA331}"/>
-              </a:ext>
-            </a:extLst>
-          </p:cNvPr>
-          <p:cNvSpPr txBox="1"/>
-          <p:nvPr/>
-        </p:nvSpPr>
-        <p:spPr>
-          <a:xfrm>
-            <a:off x="246888" y="1272349"/>
-            <a:ext cx="4422301" cy="369332"/>
-          </a:xfrm>
-          <a:prstGeom prst="rect">
-            <a:avLst/>
-          </a:prstGeom>
-          <a:noFill/>
-        </p:spPr>
-        <p:txBody>
-          <a:bodyPr wrap="none" rtlCol="0">
-            <a:spAutoFit/>
-          </a:bodyPr>
-          <a:lstStyle/>
-          <a:p>
-            <a:r>
-              <a:rPr lang="en-US" dirty="0">
-                <a:solidFill>
-                  <a:schemeClr val="tx2">
-                    <a:lumMod val="75000"/>
-                    <a:lumOff val="25000"/>
-                  </a:schemeClr>
-                </a:solidFill>
-                <a:latin typeface="Aptos Black" panose="020B0004020202020204" pitchFamily="34" charset="0"/>
-              </a:rPr>
-              <a:t>CODE WORKSHOP (FRONTEND) – DAY 1</a:t>
-            </a:r>
-            <a:endParaRPr lang="en-PH" dirty="0">
-              <a:solidFill>
-                <a:schemeClr val="tx2">
-                  <a:lumMod val="75000"/>
-                  <a:lumOff val="25000"/>
-                </a:schemeClr>
-              </a:solidFill>
-              <a:latin typeface="Aptos Black" panose="020B0004020202020204" pitchFamily="34" charset="0"/>
-            </a:endParaRPr>
-          </a:p>
-        </p:txBody>
-      </p:sp>
-      <p:cxnSp>
-        <p:nvCxnSpPr>
-          <p:cNvPr id="8" name="Straight Connector 7">
-            <a:extLst>
-              <a:ext uri="{FF2B5EF4-FFF2-40B4-BE49-F238E27FC236}">
-                <a16:creationId xmlns:a16="http://schemas.microsoft.com/office/drawing/2014/main" id="{6794FE33-12BC-031B-5E9F-D1BC85DDF19F}"/>
-              </a:ext>
-            </a:extLst>
-          </p:cNvPr>
-          <p:cNvCxnSpPr>
-            <a:cxnSpLocks/>
-          </p:cNvCxnSpPr>
-          <p:nvPr/>
-        </p:nvCxnSpPr>
-        <p:spPr>
-          <a:xfrm>
-            <a:off x="246888" y="1669196"/>
-            <a:ext cx="10991088" cy="0"/>
-          </a:xfrm>
-          <a:prstGeom prst="line">
-            <a:avLst/>
-          </a:prstGeom>
-        </p:spPr>
-        <p:style>
-          <a:lnRef idx="2">
-            <a:schemeClr val="accent1"/>
-          </a:lnRef>
-          <a:fillRef idx="0">
-            <a:schemeClr val="accent1"/>
-          </a:fillRef>
-          <a:effectRef idx="1">
-            <a:schemeClr val="accent1"/>
-          </a:effectRef>
-          <a:fontRef idx="minor">
-            <a:schemeClr val="tx1"/>
-          </a:fontRef>
-        </p:style>
-      </p:cxnSp>
-      <p:pic>
-        <p:nvPicPr>
-          <p:cNvPr id="14" name="Picture 13">
-            <a:extLst>
-              <a:ext uri="{FF2B5EF4-FFF2-40B4-BE49-F238E27FC236}">
-                <a16:creationId xmlns:a16="http://schemas.microsoft.com/office/drawing/2014/main" id="{BA81590E-7B11-B7CE-E149-FDA1646087A7}"/>
-              </a:ext>
-            </a:extLst>
-          </p:cNvPr>
-          <p:cNvPicPr>
-            <a:picLocks noChangeAspect="1"/>
-          </p:cNvPicPr>
-          <p:nvPr/>
-        </p:nvPicPr>
-        <p:blipFill>
-          <a:blip r:embed="rId3">
-            <a:extLst>
-              <a:ext uri="{28A0092B-C50C-407E-A947-70E740481C1C}">
-                <a14:useLocalDpi xmlns:a14="http://schemas.microsoft.com/office/drawing/2010/main" val="0"/>
-              </a:ext>
-            </a:extLst>
-          </a:blip>
-          <a:stretch>
-            <a:fillRect/>
-          </a:stretch>
-        </p:blipFill>
-        <p:spPr>
-          <a:xfrm>
-            <a:off x="106490" y="1410730"/>
-            <a:ext cx="3584448" cy="2018270"/>
-          </a:xfrm>
-          <a:prstGeom prst="rect">
-            <a:avLst/>
-          </a:prstGeom>
-        </p:spPr>
-      </p:pic>
-      <p:sp>
-        <p:nvSpPr>
-          <p:cNvPr id="9" name="TextBox 8">
-            <a:extLst>
-              <a:ext uri="{FF2B5EF4-FFF2-40B4-BE49-F238E27FC236}">
-                <a16:creationId xmlns:a16="http://schemas.microsoft.com/office/drawing/2014/main" id="{84A6C33B-5758-4A9A-CBFE-B963F6A33DA2}"/>
-              </a:ext>
-            </a:extLst>
-          </p:cNvPr>
-          <p:cNvSpPr txBox="1"/>
-          <p:nvPr/>
-        </p:nvSpPr>
-        <p:spPr>
-          <a:xfrm>
-            <a:off x="5890674" y="2966846"/>
-            <a:ext cx="6400800" cy="1754326"/>
-          </a:xfrm>
-          <a:prstGeom prst="rect">
-            <a:avLst/>
-          </a:prstGeom>
-          <a:noFill/>
-        </p:spPr>
-        <p:txBody>
-          <a:bodyPr wrap="square" rtlCol="0">
-            <a:spAutoFit/>
-          </a:bodyPr>
-          <a:lstStyle/>
-          <a:p>
-            <a:r>
-              <a:rPr lang="en-US" dirty="0"/>
-              <a:t>Please do note that our activity is </a:t>
-            </a:r>
-            <a:r>
-              <a:rPr lang="en-US" b="1" dirty="0"/>
-              <a:t>open</a:t>
-            </a:r>
-            <a:r>
-              <a:rPr lang="en-US" dirty="0"/>
-              <a:t> and </a:t>
-            </a:r>
-            <a:r>
-              <a:rPr lang="en-US" b="1" dirty="0"/>
-              <a:t>free</a:t>
-            </a:r>
-            <a:r>
-              <a:rPr lang="en-US" dirty="0"/>
-              <a:t> to download.</a:t>
-            </a:r>
-            <a:r>
-              <a:rPr lang="en-PH" dirty="0"/>
-              <a:t> Everything you need will be in this </a:t>
-            </a:r>
-            <a:r>
-              <a:rPr lang="en-PH" dirty="0" err="1"/>
-              <a:t>github</a:t>
-            </a:r>
-            <a:r>
-              <a:rPr lang="en-PH" dirty="0"/>
-              <a:t> repository:</a:t>
-            </a:r>
-          </a:p>
-          <a:p>
-            <a:endParaRPr lang="en-PH" dirty="0"/>
-          </a:p>
-          <a:p>
-            <a:r>
-              <a:rPr lang="en-US" dirty="0">
-                <a:hlinkClick r:id="rId4"/>
-              </a:rPr>
-              <a:t>https://github.com/Cpm-X-Dev/ViteReactDemo</a:t>
-            </a:r>
-            <a:r>
-              <a:rPr lang="en-US" dirty="0"/>
-              <a:t> </a:t>
-            </a:r>
-          </a:p>
-          <a:p>
-            <a:endParaRPr lang="en-US" dirty="0"/>
-          </a:p>
-          <a:p>
-            <a:r>
-              <a:rPr lang="en-US" dirty="0"/>
-              <a:t>Clone command:</a:t>
-            </a:r>
-          </a:p>
-        </p:txBody>
-      </p:sp>
-      <p:sp>
-        <p:nvSpPr>
-          <p:cNvPr id="11" name="TextBox 10">
-            <a:extLst>
-              <a:ext uri="{FF2B5EF4-FFF2-40B4-BE49-F238E27FC236}">
-                <a16:creationId xmlns:a16="http://schemas.microsoft.com/office/drawing/2014/main" id="{39AA4CB0-8B5A-0C06-5752-69EEFB0B4445}"/>
-              </a:ext>
-            </a:extLst>
-          </p:cNvPr>
-          <p:cNvSpPr txBox="1"/>
-          <p:nvPr/>
-        </p:nvSpPr>
-        <p:spPr>
-          <a:xfrm>
-            <a:off x="5918106" y="4684596"/>
-            <a:ext cx="6057171" cy="369332"/>
-          </a:xfrm>
-          <a:prstGeom prst="rect">
-            <a:avLst/>
-          </a:prstGeom>
-          <a:solidFill>
-            <a:schemeClr val="accent1"/>
-          </a:solidFill>
-          <a:ln>
-            <a:noFill/>
-          </a:ln>
-        </p:spPr>
-        <p:style>
-          <a:lnRef idx="0">
-            <a:scrgbClr r="0" g="0" b="0"/>
-          </a:lnRef>
-          <a:fillRef idx="0">
-            <a:scrgbClr r="0" g="0" b="0"/>
-          </a:fillRef>
-          <a:effectRef idx="0">
-            <a:scrgbClr r="0" g="0" b="0"/>
-          </a:effectRef>
-          <a:fontRef idx="minor">
-            <a:schemeClr val="lt1"/>
-          </a:fontRef>
-        </p:style>
-        <p:txBody>
-          <a:bodyPr wrap="none" rtlCol="0">
-            <a:spAutoFit/>
-          </a:bodyPr>
-          <a:lstStyle/>
-          <a:p>
-            <a:r>
-              <a:rPr lang="en-PH" dirty="0"/>
-              <a:t>git clone https://github.com/Cpm-X-Dev/ViteReactDemo.git</a:t>
-            </a:r>
-          </a:p>
-        </p:txBody>
-      </p:sp>
-      <p:pic>
-        <p:nvPicPr>
-          <p:cNvPr id="13" name="Picture 12">
-            <a:extLst>
-              <a:ext uri="{FF2B5EF4-FFF2-40B4-BE49-F238E27FC236}">
-                <a16:creationId xmlns:a16="http://schemas.microsoft.com/office/drawing/2014/main" id="{C6D7E462-4697-E153-1467-FC05E1937214}"/>
-              </a:ext>
-            </a:extLst>
-          </p:cNvPr>
-          <p:cNvPicPr>
-            <a:picLocks noChangeAspect="1"/>
-          </p:cNvPicPr>
-          <p:nvPr/>
-        </p:nvPicPr>
-        <p:blipFill>
-          <a:blip r:embed="rId5"/>
-          <a:stretch>
-            <a:fillRect/>
-          </a:stretch>
-        </p:blipFill>
-        <p:spPr>
-          <a:xfrm>
-            <a:off x="246888" y="3328923"/>
-            <a:ext cx="5503388" cy="2875459"/>
-          </a:xfrm>
-          <a:prstGeom prst="rect">
-            <a:avLst/>
-          </a:prstGeom>
-        </p:spPr>
-      </p:pic>
-    </p:spTree>
-    <p:extLst>
-      <p:ext uri="{BB962C8B-B14F-4D97-AF65-F5344CB8AC3E}">
-        <p14:creationId xmlns:p14="http://schemas.microsoft.com/office/powerpoint/2010/main" val="86565824"/>
       </p:ext>
     </p:extLst>
   </p:cSld>
@@ -9360,4 +16630,319 @@
     </a:ext>
   </a:extLst>
 </a:theme>
+</file>
+
+<file path=ppt/theme/theme2.xml><?xml version="1.0" encoding="utf-8"?>
+<a:theme xmlns:a="http://schemas.openxmlformats.org/drawingml/2006/main" name="Office Theme">
+  <a:themeElements>
+    <a:clrScheme name="Office">
+      <a:dk1>
+        <a:sysClr val="windowText" lastClr="000000"/>
+      </a:dk1>
+      <a:lt1>
+        <a:sysClr val="window" lastClr="FFFFFF"/>
+      </a:lt1>
+      <a:dk2>
+        <a:srgbClr val="0E2841"/>
+      </a:dk2>
+      <a:lt2>
+        <a:srgbClr val="E8E8E8"/>
+      </a:lt2>
+      <a:accent1>
+        <a:srgbClr val="156082"/>
+      </a:accent1>
+      <a:accent2>
+        <a:srgbClr val="E97132"/>
+      </a:accent2>
+      <a:accent3>
+        <a:srgbClr val="196B24"/>
+      </a:accent3>
+      <a:accent4>
+        <a:srgbClr val="0F9ED5"/>
+      </a:accent4>
+      <a:accent5>
+        <a:srgbClr val="A02B93"/>
+      </a:accent5>
+      <a:accent6>
+        <a:srgbClr val="4EA72E"/>
+      </a:accent6>
+      <a:hlink>
+        <a:srgbClr val="467886"/>
+      </a:hlink>
+      <a:folHlink>
+        <a:srgbClr val="96607D"/>
+      </a:folHlink>
+    </a:clrScheme>
+    <a:fontScheme name="Office">
+      <a:majorFont>
+        <a:latin typeface="Aptos Display" panose="02110004020202020204"/>
+        <a:ea typeface=""/>
+        <a:cs typeface=""/>
+        <a:font script="Jpan" typeface="游ゴシック Light"/>
+        <a:font script="Hang" typeface="맑은 고딕"/>
+        <a:font script="Hans" typeface="等线 Light"/>
+        <a:font script="Hant" typeface="新細明體"/>
+        <a:font script="Arab" typeface="Times New Roman"/>
+        <a:font script="Hebr" typeface="Times New Roman"/>
+        <a:font script="Thai" typeface="Angsana New"/>
+        <a:font script="Ethi" typeface="Nyala"/>
+        <a:font script="Beng" typeface="Vrinda"/>
+        <a:font script="Gujr" typeface="Shruti"/>
+        <a:font script="Khmr" typeface="MoolBoran"/>
+        <a:font script="Knda" typeface="Tunga"/>
+        <a:font script="Guru" typeface="Raavi"/>
+        <a:font script="Cans" typeface="Euphemia"/>
+        <a:font script="Cher" typeface="Plantagenet Cherokee"/>
+        <a:font script="Yiii" typeface="Microsoft Yi Baiti"/>
+        <a:font script="Tibt" typeface="Microsoft Himalaya"/>
+        <a:font script="Thaa" typeface="MV Boli"/>
+        <a:font script="Deva" typeface="Mangal"/>
+        <a:font script="Telu" typeface="Gautami"/>
+        <a:font script="Taml" typeface="Latha"/>
+        <a:font script="Syrc" typeface="Estrangelo Edessa"/>
+        <a:font script="Orya" typeface="Kalinga"/>
+        <a:font script="Mlym" typeface="Kartika"/>
+        <a:font script="Laoo" typeface="DokChampa"/>
+        <a:font script="Sinh" typeface="Iskoola Pota"/>
+        <a:font script="Mong" typeface="Mongolian Baiti"/>
+        <a:font script="Viet" typeface="Times New Roman"/>
+        <a:font script="Uigh" typeface="Microsoft Uighur"/>
+        <a:font script="Geor" typeface="Sylfaen"/>
+        <a:font script="Armn" typeface="Arial"/>
+        <a:font script="Bugi" typeface="Leelawadee UI"/>
+        <a:font script="Bopo" typeface="Microsoft JhengHei"/>
+        <a:font script="Java" typeface="Javanese Text"/>
+        <a:font script="Lisu" typeface="Segoe UI"/>
+        <a:font script="Mymr" typeface="Myanmar Text"/>
+        <a:font script="Nkoo" typeface="Ebrima"/>
+        <a:font script="Olck" typeface="Nirmala UI"/>
+        <a:font script="Osma" typeface="Ebrima"/>
+        <a:font script="Phag" typeface="Phagspa"/>
+        <a:font script="Syrn" typeface="Estrangelo Edessa"/>
+        <a:font script="Syrj" typeface="Estrangelo Edessa"/>
+        <a:font script="Syre" typeface="Estrangelo Edessa"/>
+        <a:font script="Sora" typeface="Nirmala UI"/>
+        <a:font script="Tale" typeface="Microsoft Tai Le"/>
+        <a:font script="Talu" typeface="Microsoft New Tai Lue"/>
+        <a:font script="Tfng" typeface="Ebrima"/>
+      </a:majorFont>
+      <a:minorFont>
+        <a:latin typeface="Aptos" panose="02110004020202020204"/>
+        <a:ea typeface=""/>
+        <a:cs typeface=""/>
+        <a:font script="Jpan" typeface="游ゴシック"/>
+        <a:font script="Hang" typeface="맑은 고딕"/>
+        <a:font script="Hans" typeface="等线"/>
+        <a:font script="Hant" typeface="新細明體"/>
+        <a:font script="Arab" typeface="Arial"/>
+        <a:font script="Hebr" typeface="Arial"/>
+        <a:font script="Thai" typeface="Cordia New"/>
+        <a:font script="Ethi" typeface="Nyala"/>
+        <a:font script="Beng" typeface="Vrinda"/>
+        <a:font script="Gujr" typeface="Shruti"/>
+        <a:font script="Khmr" typeface="DaunPenh"/>
+        <a:font script="Knda" typeface="Tunga"/>
+        <a:font script="Guru" typeface="Raavi"/>
+        <a:font script="Cans" typeface="Euphemia"/>
+        <a:font script="Cher" typeface="Plantagenet Cherokee"/>
+        <a:font script="Yiii" typeface="Microsoft Yi Baiti"/>
+        <a:font script="Tibt" typeface="Microsoft Himalaya"/>
+        <a:font script="Thaa" typeface="MV Boli"/>
+        <a:font script="Deva" typeface="Mangal"/>
+        <a:font script="Telu" typeface="Gautami"/>
+        <a:font script="Taml" typeface="Latha"/>
+        <a:font script="Syrc" typeface="Estrangelo Edessa"/>
+        <a:font script="Orya" typeface="Kalinga"/>
+        <a:font script="Mlym" typeface="Kartika"/>
+        <a:font script="Laoo" typeface="DokChampa"/>
+        <a:font script="Sinh" typeface="Iskoola Pota"/>
+        <a:font script="Mong" typeface="Mongolian Baiti"/>
+        <a:font script="Viet" typeface="Arial"/>
+        <a:font script="Uigh" typeface="Microsoft Uighur"/>
+        <a:font script="Geor" typeface="Sylfaen"/>
+        <a:font script="Armn" typeface="Arial"/>
+        <a:font script="Bugi" typeface="Leelawadee UI"/>
+        <a:font script="Bopo" typeface="Microsoft JhengHei"/>
+        <a:font script="Java" typeface="Javanese Text"/>
+        <a:font script="Lisu" typeface="Segoe UI"/>
+        <a:font script="Mymr" typeface="Myanmar Text"/>
+        <a:font script="Nkoo" typeface="Ebrima"/>
+        <a:font script="Olck" typeface="Nirmala UI"/>
+        <a:font script="Osma" typeface="Ebrima"/>
+        <a:font script="Phag" typeface="Phagspa"/>
+        <a:font script="Syrn" typeface="Estrangelo Edessa"/>
+        <a:font script="Syrj" typeface="Estrangelo Edessa"/>
+        <a:font script="Syre" typeface="Estrangelo Edessa"/>
+        <a:font script="Sora" typeface="Nirmala UI"/>
+        <a:font script="Tale" typeface="Microsoft Tai Le"/>
+        <a:font script="Talu" typeface="Microsoft New Tai Lue"/>
+        <a:font script="Tfng" typeface="Ebrima"/>
+      </a:minorFont>
+    </a:fontScheme>
+    <a:fmtScheme name="Office">
+      <a:fillStyleLst>
+        <a:solidFill>
+          <a:schemeClr val="phClr"/>
+        </a:solidFill>
+        <a:gradFill rotWithShape="1">
+          <a:gsLst>
+            <a:gs pos="0">
+              <a:schemeClr val="phClr">
+                <a:lumMod val="110000"/>
+                <a:satMod val="105000"/>
+                <a:tint val="67000"/>
+              </a:schemeClr>
+            </a:gs>
+            <a:gs pos="50000">
+              <a:schemeClr val="phClr">
+                <a:lumMod val="105000"/>
+                <a:satMod val="103000"/>
+                <a:tint val="73000"/>
+              </a:schemeClr>
+            </a:gs>
+            <a:gs pos="100000">
+              <a:schemeClr val="phClr">
+                <a:lumMod val="105000"/>
+                <a:satMod val="109000"/>
+                <a:tint val="81000"/>
+              </a:schemeClr>
+            </a:gs>
+          </a:gsLst>
+          <a:lin ang="5400000" scaled="0"/>
+        </a:gradFill>
+        <a:gradFill rotWithShape="1">
+          <a:gsLst>
+            <a:gs pos="0">
+              <a:schemeClr val="phClr">
+                <a:satMod val="103000"/>
+                <a:lumMod val="102000"/>
+                <a:tint val="94000"/>
+              </a:schemeClr>
+            </a:gs>
+            <a:gs pos="50000">
+              <a:schemeClr val="phClr">
+                <a:satMod val="110000"/>
+                <a:lumMod val="100000"/>
+                <a:shade val="100000"/>
+              </a:schemeClr>
+            </a:gs>
+            <a:gs pos="100000">
+              <a:schemeClr val="phClr">
+                <a:lumMod val="99000"/>
+                <a:satMod val="120000"/>
+                <a:shade val="78000"/>
+              </a:schemeClr>
+            </a:gs>
+          </a:gsLst>
+          <a:lin ang="5400000" scaled="0"/>
+        </a:gradFill>
+      </a:fillStyleLst>
+      <a:lnStyleLst>
+        <a:ln w="12700" cap="flat" cmpd="sng" algn="ctr">
+          <a:solidFill>
+            <a:schemeClr val="phClr"/>
+          </a:solidFill>
+          <a:prstDash val="solid"/>
+          <a:miter lim="800000"/>
+        </a:ln>
+        <a:ln w="19050" cap="flat" cmpd="sng" algn="ctr">
+          <a:solidFill>
+            <a:schemeClr val="phClr"/>
+          </a:solidFill>
+          <a:prstDash val="solid"/>
+          <a:miter lim="800000"/>
+        </a:ln>
+        <a:ln w="25400" cap="flat" cmpd="sng" algn="ctr">
+          <a:solidFill>
+            <a:schemeClr val="phClr"/>
+          </a:solidFill>
+          <a:prstDash val="solid"/>
+          <a:miter lim="800000"/>
+        </a:ln>
+      </a:lnStyleLst>
+      <a:effectStyleLst>
+        <a:effectStyle>
+          <a:effectLst/>
+        </a:effectStyle>
+        <a:effectStyle>
+          <a:effectLst/>
+        </a:effectStyle>
+        <a:effectStyle>
+          <a:effectLst>
+            <a:outerShdw blurRad="57150" dist="19050" dir="5400000" algn="ctr" rotWithShape="0">
+              <a:srgbClr val="000000">
+                <a:alpha val="63000"/>
+              </a:srgbClr>
+            </a:outerShdw>
+          </a:effectLst>
+        </a:effectStyle>
+      </a:effectStyleLst>
+      <a:bgFillStyleLst>
+        <a:solidFill>
+          <a:schemeClr val="phClr"/>
+        </a:solidFill>
+        <a:solidFill>
+          <a:schemeClr val="phClr">
+            <a:tint val="95000"/>
+            <a:satMod val="170000"/>
+          </a:schemeClr>
+        </a:solidFill>
+        <a:gradFill rotWithShape="1">
+          <a:gsLst>
+            <a:gs pos="0">
+              <a:schemeClr val="phClr">
+                <a:tint val="93000"/>
+                <a:satMod val="150000"/>
+                <a:shade val="98000"/>
+                <a:lumMod val="102000"/>
+              </a:schemeClr>
+            </a:gs>
+            <a:gs pos="50000">
+              <a:schemeClr val="phClr">
+                <a:tint val="98000"/>
+                <a:satMod val="130000"/>
+                <a:shade val="90000"/>
+                <a:lumMod val="103000"/>
+              </a:schemeClr>
+            </a:gs>
+            <a:gs pos="100000">
+              <a:schemeClr val="phClr">
+                <a:shade val="63000"/>
+                <a:satMod val="120000"/>
+              </a:schemeClr>
+            </a:gs>
+          </a:gsLst>
+          <a:lin ang="5400000" scaled="0"/>
+        </a:gradFill>
+      </a:bgFillStyleLst>
+    </a:fmtScheme>
+  </a:themeElements>
+  <a:objectDefaults>
+    <a:lnDef>
+      <a:spPr/>
+      <a:bodyPr/>
+      <a:lstStyle/>
+      <a:style>
+        <a:lnRef idx="2">
+          <a:schemeClr val="accent1"/>
+        </a:lnRef>
+        <a:fillRef idx="0">
+          <a:schemeClr val="accent1"/>
+        </a:fillRef>
+        <a:effectRef idx="1">
+          <a:schemeClr val="accent1"/>
+        </a:effectRef>
+        <a:fontRef idx="minor">
+          <a:schemeClr val="tx1"/>
+        </a:fontRef>
+      </a:style>
+    </a:lnDef>
+  </a:objectDefaults>
+  <a:extraClrSchemeLst/>
+  <a:extLst>
+    <a:ext uri="{05A4C25C-085E-4340-85A3-A5531E510DB2}">
+      <thm15:themeFamily xmlns:thm15="http://schemas.microsoft.com/office/thememl/2012/main" name="Office Theme" id="{2E142A2C-CD16-42D6-873A-C26D2A0506FA}" vid="{1BDDFF52-6CD6-40A5-AB3C-68EB2F1E4D0A}"/>
+    </a:ext>
+  </a:extLst>
+</a:theme>
 </file>